--- a/report/CAPSTONE PROJECT PPT-220-2 UPDATED.pptx
+++ b/report/CAPSTONE PROJECT PPT-220-2 UPDATED.pptx
@@ -5,18 +5,22 @@
     <p:sldMasterId id="2147483648" r:id="rId1"/>
   </p:sldMasterIdLst>
   <p:notesMasterIdLst>
-    <p:notesMasterId r:id="rId11"/>
+    <p:notesMasterId r:id="rId15"/>
   </p:notesMasterIdLst>
   <p:sldIdLst>
     <p:sldId id="256" r:id="rId2"/>
     <p:sldId id="257" r:id="rId3"/>
     <p:sldId id="266" r:id="rId4"/>
     <p:sldId id="265" r:id="rId5"/>
-    <p:sldId id="258" r:id="rId6"/>
-    <p:sldId id="259" r:id="rId7"/>
-    <p:sldId id="264" r:id="rId8"/>
-    <p:sldId id="262" r:id="rId9"/>
-    <p:sldId id="261" r:id="rId10"/>
+    <p:sldId id="267" r:id="rId6"/>
+    <p:sldId id="268" r:id="rId7"/>
+    <p:sldId id="269" r:id="rId8"/>
+    <p:sldId id="258" r:id="rId9"/>
+    <p:sldId id="259" r:id="rId10"/>
+    <p:sldId id="264" r:id="rId11"/>
+    <p:sldId id="270" r:id="rId12"/>
+    <p:sldId id="262" r:id="rId13"/>
+    <p:sldId id="261" r:id="rId14"/>
   </p:sldIdLst>
   <p:sldSz cx="12192000" cy="6858000"/>
   <p:notesSz cx="6858000" cy="9144000"/>
@@ -205,7 +209,7 @@
           <a:p>
             <a:fld id="{86DEF94C-4954-4CD2-BA31-0E4D3D6974DB}" type="datetimeFigureOut">
               <a:rPr lang="en-IN" smtClean="0"/>
-              <a:t>19-08-2026</a:t>
+              <a:t>24-08-2026</a:t>
             </a:fld>
             <a:endParaRPr lang="en-IN"/>
           </a:p>
@@ -622,7 +626,7 @@
           <a:p>
             <a:fld id="{DAC6A6AC-FE39-46B3-9BD0-1432700D5A4A}" type="slidenum">
               <a:rPr lang="en-IN" smtClean="0"/>
-              <a:t>8</a:t>
+              <a:t>12</a:t>
             </a:fld>
             <a:endParaRPr lang="en-IN"/>
           </a:p>
@@ -790,7 +794,7 @@
           <a:p>
             <a:fld id="{B5DA8AC9-F5C4-4276-8E6D-5DD4E18EABEC}" type="datetimeFigureOut">
               <a:rPr lang="en-IN" smtClean="0"/>
-              <a:t>19-08-2026</a:t>
+              <a:t>24-08-2026</a:t>
             </a:fld>
             <a:endParaRPr lang="en-IN"/>
           </a:p>
@@ -990,7 +994,7 @@
           <a:p>
             <a:fld id="{B5DA8AC9-F5C4-4276-8E6D-5DD4E18EABEC}" type="datetimeFigureOut">
               <a:rPr lang="en-IN" smtClean="0"/>
-              <a:t>19-08-2026</a:t>
+              <a:t>24-08-2026</a:t>
             </a:fld>
             <a:endParaRPr lang="en-IN"/>
           </a:p>
@@ -1200,7 +1204,7 @@
           <a:p>
             <a:fld id="{B5DA8AC9-F5C4-4276-8E6D-5DD4E18EABEC}" type="datetimeFigureOut">
               <a:rPr lang="en-IN" smtClean="0"/>
-              <a:t>19-08-2026</a:t>
+              <a:t>24-08-2026</a:t>
             </a:fld>
             <a:endParaRPr lang="en-IN"/>
           </a:p>
@@ -1400,7 +1404,7 @@
           <a:p>
             <a:fld id="{B5DA8AC9-F5C4-4276-8E6D-5DD4E18EABEC}" type="datetimeFigureOut">
               <a:rPr lang="en-IN" smtClean="0"/>
-              <a:t>19-08-2026</a:t>
+              <a:t>24-08-2026</a:t>
             </a:fld>
             <a:endParaRPr lang="en-IN"/>
           </a:p>
@@ -1676,7 +1680,7 @@
           <a:p>
             <a:fld id="{B5DA8AC9-F5C4-4276-8E6D-5DD4E18EABEC}" type="datetimeFigureOut">
               <a:rPr lang="en-IN" smtClean="0"/>
-              <a:t>19-08-2026</a:t>
+              <a:t>24-08-2026</a:t>
             </a:fld>
             <a:endParaRPr lang="en-IN"/>
           </a:p>
@@ -1944,7 +1948,7 @@
           <a:p>
             <a:fld id="{B5DA8AC9-F5C4-4276-8E6D-5DD4E18EABEC}" type="datetimeFigureOut">
               <a:rPr lang="en-IN" smtClean="0"/>
-              <a:t>19-08-2026</a:t>
+              <a:t>24-08-2026</a:t>
             </a:fld>
             <a:endParaRPr lang="en-IN"/>
           </a:p>
@@ -2359,7 +2363,7 @@
           <a:p>
             <a:fld id="{B5DA8AC9-F5C4-4276-8E6D-5DD4E18EABEC}" type="datetimeFigureOut">
               <a:rPr lang="en-IN" smtClean="0"/>
-              <a:t>19-08-2026</a:t>
+              <a:t>24-08-2026</a:t>
             </a:fld>
             <a:endParaRPr lang="en-IN"/>
           </a:p>
@@ -2501,7 +2505,7 @@
           <a:p>
             <a:fld id="{B5DA8AC9-F5C4-4276-8E6D-5DD4E18EABEC}" type="datetimeFigureOut">
               <a:rPr lang="en-IN" smtClean="0"/>
-              <a:t>19-08-2026</a:t>
+              <a:t>24-08-2026</a:t>
             </a:fld>
             <a:endParaRPr lang="en-IN"/>
           </a:p>
@@ -2614,7 +2618,7 @@
           <a:p>
             <a:fld id="{B5DA8AC9-F5C4-4276-8E6D-5DD4E18EABEC}" type="datetimeFigureOut">
               <a:rPr lang="en-IN" smtClean="0"/>
-              <a:t>19-08-2026</a:t>
+              <a:t>24-08-2026</a:t>
             </a:fld>
             <a:endParaRPr lang="en-IN"/>
           </a:p>
@@ -2927,7 +2931,7 @@
           <a:p>
             <a:fld id="{B5DA8AC9-F5C4-4276-8E6D-5DD4E18EABEC}" type="datetimeFigureOut">
               <a:rPr lang="en-IN" smtClean="0"/>
-              <a:t>19-08-2026</a:t>
+              <a:t>24-08-2026</a:t>
             </a:fld>
             <a:endParaRPr lang="en-IN"/>
           </a:p>
@@ -3216,7 +3220,7 @@
           <a:p>
             <a:fld id="{B5DA8AC9-F5C4-4276-8E6D-5DD4E18EABEC}" type="datetimeFigureOut">
               <a:rPr lang="en-IN" smtClean="0"/>
-              <a:t>19-08-2026</a:t>
+              <a:t>24-08-2026</a:t>
             </a:fld>
             <a:endParaRPr lang="en-IN"/>
           </a:p>
@@ -3459,7 +3463,7 @@
           <a:p>
             <a:fld id="{B5DA8AC9-F5C4-4276-8E6D-5DD4E18EABEC}" type="datetimeFigureOut">
               <a:rPr lang="en-IN" smtClean="0"/>
-              <a:t>19-08-2026</a:t>
+              <a:t>24-08-2026</a:t>
             </a:fld>
             <a:endParaRPr lang="en-IN"/>
           </a:p>
@@ -4159,7 +4163,7 @@
                 </a:solidFill>
                 <a:latin typeface="Lucida Bright" panose="02040602050505020304" pitchFamily="18" charset="0"/>
               </a:rPr>
-              <a:t>GARIKAPATI SATYA KARTHIKA — 2300030988</a:t>
+              <a:t>GARIKAPATI SATYA KEERTHIKA — 2300030988</a:t>
             </a:r>
           </a:p>
         </p:txBody>
@@ -4272,7 +4276,7 @@
                   </a:schemeClr>
                 </a:solidFill>
               </a:rPr>
-              <a:t>Guide: Mr. M. Subba Rao (M-Tech)</a:t>
+              <a:t>Guide: Mr. M. Subba Rao    M-Tech</a:t>
             </a:r>
           </a:p>
           <a:p>
@@ -4331,6 +4335,1943 @@
     <p:extLst>
       <p:ext uri="{BB962C8B-B14F-4D97-AF65-F5344CB8AC3E}">
         <p14:creationId xmlns:p14="http://schemas.microsoft.com/office/powerpoint/2010/main" val="27143920"/>
+      </p:ext>
+    </p:extLst>
+  </p:cSld>
+  <p:clrMapOvr>
+    <a:masterClrMapping/>
+  </p:clrMapOvr>
+</p:sld>
+</file>
+
+<file path=ppt/slides/slide10.xml><?xml version="1.0" encoding="utf-8"?>
+<p:sld xmlns:a="http://schemas.openxmlformats.org/drawingml/2006/main" xmlns:r="http://schemas.openxmlformats.org/officeDocument/2006/relationships" xmlns:p="http://schemas.openxmlformats.org/presentationml/2006/main">
+  <p:cSld>
+    <p:spTree>
+      <p:nvGrpSpPr>
+        <p:cNvPr id="1" name=""/>
+        <p:cNvGrpSpPr/>
+        <p:nvPr/>
+      </p:nvGrpSpPr>
+      <p:grpSpPr>
+        <a:xfrm>
+          <a:off x="0" y="0"/>
+          <a:ext cx="0" cy="0"/>
+          <a:chOff x="0" y="0"/>
+          <a:chExt cx="0" cy="0"/>
+        </a:xfrm>
+      </p:grpSpPr>
+      <p:sp>
+        <p:nvSpPr>
+          <p:cNvPr id="3" name="TextBox 2">
+            <a:extLst>
+              <a:ext uri="{FF2B5EF4-FFF2-40B4-BE49-F238E27FC236}">
+                <a16:creationId xmlns:a16="http://schemas.microsoft.com/office/drawing/2014/main" id="{B0624FCB-5E4B-1576-C12C-584945FF0519}"/>
+              </a:ext>
+            </a:extLst>
+          </p:cNvPr>
+          <p:cNvSpPr txBox="1"/>
+          <p:nvPr/>
+        </p:nvSpPr>
+        <p:spPr>
+          <a:xfrm>
+            <a:off x="196645" y="235974"/>
+            <a:ext cx="6096000" cy="415498"/>
+          </a:xfrm>
+          <a:prstGeom prst="rect">
+            <a:avLst/>
+          </a:prstGeom>
+          <a:noFill/>
+        </p:spPr>
+        <p:txBody>
+          <a:bodyPr wrap="square">
+            <a:spAutoFit/>
+          </a:bodyPr>
+          <a:lstStyle/>
+          <a:p>
+            <a:r>
+              <a:rPr lang="en-IN" sz="2100" b="1" dirty="0">
+                <a:solidFill>
+                  <a:srgbClr val="0070C0"/>
+                </a:solidFill>
+                <a:latin typeface="Lucida Bright" panose="02040602050505020304" pitchFamily="18" charset="0"/>
+              </a:rPr>
+              <a:t>Project Cost Estimation (Hard Ware)</a:t>
+            </a:r>
+          </a:p>
+        </p:txBody>
+      </p:sp>
+      <p:sp>
+        <p:nvSpPr>
+          <p:cNvPr id="5" name="TextBox 4">
+            <a:extLst>
+              <a:ext uri="{FF2B5EF4-FFF2-40B4-BE49-F238E27FC236}">
+                <a16:creationId xmlns:a16="http://schemas.microsoft.com/office/drawing/2014/main" id="{AF42C48D-3171-96F8-2E9E-58703D8CD746}"/>
+              </a:ext>
+            </a:extLst>
+          </p:cNvPr>
+          <p:cNvSpPr txBox="1"/>
+          <p:nvPr/>
+        </p:nvSpPr>
+        <p:spPr>
+          <a:xfrm>
+            <a:off x="786580" y="836699"/>
+            <a:ext cx="8672052" cy="2862322"/>
+          </a:xfrm>
+          <a:prstGeom prst="rect">
+            <a:avLst/>
+          </a:prstGeom>
+          <a:noFill/>
+        </p:spPr>
+        <p:txBody>
+          <a:bodyPr wrap="square">
+            <a:spAutoFit/>
+          </a:bodyPr>
+          <a:lstStyle/>
+          <a:p>
+            <a:pPr marL="342900" lvl="0" indent="-342900">
+              <a:buFont typeface="Arial" panose="020B0604020202020204" pitchFamily="34" charset="0"/>
+              <a:buChar char="•"/>
+            </a:pPr>
+            <a:r>
+              <a:rPr lang="en-IN" dirty="0">
+                <a:latin typeface="Times New Roman" panose="02020603050405020304" pitchFamily="18" charset="0"/>
+                <a:cs typeface="Times New Roman" panose="02020603050405020304" pitchFamily="18" charset="0"/>
+              </a:rPr>
+              <a:t>The proposed project is designed to be cost-effective for a final-year </a:t>
+            </a:r>
+            <a:r>
+              <a:rPr lang="en-IN" dirty="0" err="1">
+                <a:latin typeface="Times New Roman" panose="02020603050405020304" pitchFamily="18" charset="0"/>
+                <a:cs typeface="Times New Roman" panose="02020603050405020304" pitchFamily="18" charset="0"/>
+              </a:rPr>
+              <a:t>B.Tech</a:t>
+            </a:r>
+            <a:r>
+              <a:rPr lang="en-IN" dirty="0">
+                <a:latin typeface="Times New Roman" panose="02020603050405020304" pitchFamily="18" charset="0"/>
+                <a:cs typeface="Times New Roman" panose="02020603050405020304" pitchFamily="18" charset="0"/>
+              </a:rPr>
+              <a:t> prototype. </a:t>
+            </a:r>
+          </a:p>
+          <a:p>
+            <a:pPr marL="342900" lvl="0" indent="-342900">
+              <a:buFont typeface="Arial" panose="020B0604020202020204" pitchFamily="34" charset="0"/>
+              <a:buChar char="•"/>
+            </a:pPr>
+            <a:r>
+              <a:rPr lang="en-IN" dirty="0">
+                <a:latin typeface="Times New Roman" panose="02020603050405020304" pitchFamily="18" charset="0"/>
+                <a:cs typeface="Times New Roman" panose="02020603050405020304" pitchFamily="18" charset="0"/>
+              </a:rPr>
+              <a:t>Most of the software tools used in the project are free and open-source. </a:t>
+            </a:r>
+          </a:p>
+          <a:p>
+            <a:pPr marL="342900" lvl="0" indent="-342900">
+              <a:buFont typeface="Arial" panose="020B0604020202020204" pitchFamily="34" charset="0"/>
+              <a:buChar char="•"/>
+            </a:pPr>
+            <a:r>
+              <a:rPr lang="en-IN" dirty="0">
+                <a:latin typeface="Times New Roman" panose="02020603050405020304" pitchFamily="18" charset="0"/>
+                <a:cs typeface="Times New Roman" panose="02020603050405020304" pitchFamily="18" charset="0"/>
+              </a:rPr>
+              <a:t>The main expense is for the IoT-based wearable safety prototype. </a:t>
+            </a:r>
+          </a:p>
+          <a:p>
+            <a:pPr marL="342900" lvl="0" indent="-342900">
+              <a:buFont typeface="Arial" panose="020B0604020202020204" pitchFamily="34" charset="0"/>
+              <a:buChar char="•"/>
+            </a:pPr>
+            <a:r>
+              <a:rPr lang="en-IN" dirty="0">
+                <a:latin typeface="Times New Roman" panose="02020603050405020304" pitchFamily="18" charset="0"/>
+                <a:cs typeface="Times New Roman" panose="02020603050405020304" pitchFamily="18" charset="0"/>
+              </a:rPr>
+              <a:t>The hardware includes ESP32, GPS module, SOS button, buzzer, battery and basic components. </a:t>
+            </a:r>
+          </a:p>
+          <a:p>
+            <a:pPr marL="342900" lvl="0" indent="-342900">
+              <a:buFont typeface="Arial" panose="020B0604020202020204" pitchFamily="34" charset="0"/>
+              <a:buChar char="•"/>
+            </a:pPr>
+            <a:r>
+              <a:rPr lang="en-IN" dirty="0">
+                <a:latin typeface="Times New Roman" panose="02020603050405020304" pitchFamily="18" charset="0"/>
+                <a:cs typeface="Times New Roman" panose="02020603050405020304" pitchFamily="18" charset="0"/>
+              </a:rPr>
+              <a:t>The estimated hardware cost is approximately </a:t>
+            </a:r>
+            <a:r>
+              <a:rPr lang="en-IN" b="1" dirty="0">
+                <a:latin typeface="Times New Roman" panose="02020603050405020304" pitchFamily="18" charset="0"/>
+                <a:cs typeface="Times New Roman" panose="02020603050405020304" pitchFamily="18" charset="0"/>
+              </a:rPr>
+              <a:t>₹1,900</a:t>
+            </a:r>
+            <a:r>
+              <a:rPr lang="en-IN" dirty="0">
+                <a:latin typeface="Times New Roman" panose="02020603050405020304" pitchFamily="18" charset="0"/>
+                <a:cs typeface="Times New Roman" panose="02020603050405020304" pitchFamily="18" charset="0"/>
+              </a:rPr>
+              <a:t>. </a:t>
+            </a:r>
+          </a:p>
+          <a:p>
+            <a:pPr marL="342900" lvl="0" indent="-342900">
+              <a:buFont typeface="Arial" panose="020B0604020202020204" pitchFamily="34" charset="0"/>
+              <a:buChar char="•"/>
+            </a:pPr>
+            <a:r>
+              <a:rPr lang="en-IN" dirty="0">
+                <a:latin typeface="Times New Roman" panose="02020603050405020304" pitchFamily="18" charset="0"/>
+                <a:cs typeface="Times New Roman" panose="02020603050405020304" pitchFamily="18" charset="0"/>
+              </a:rPr>
+              <a:t>Depending on additional components, the total cost may range between </a:t>
+            </a:r>
+            <a:r>
+              <a:rPr lang="en-IN" b="1" dirty="0">
+                <a:latin typeface="Times New Roman" panose="02020603050405020304" pitchFamily="18" charset="0"/>
+                <a:cs typeface="Times New Roman" panose="02020603050405020304" pitchFamily="18" charset="0"/>
+              </a:rPr>
+              <a:t>₹1,900 and ₹2,500</a:t>
+            </a:r>
+            <a:r>
+              <a:rPr lang="en-IN" dirty="0">
+                <a:latin typeface="Times New Roman" panose="02020603050405020304" pitchFamily="18" charset="0"/>
+                <a:cs typeface="Times New Roman" panose="02020603050405020304" pitchFamily="18" charset="0"/>
+              </a:rPr>
+              <a:t>. </a:t>
+            </a:r>
+          </a:p>
+          <a:p>
+            <a:pPr marL="342900" lvl="0" indent="-342900">
+              <a:buFont typeface="Arial" panose="020B0604020202020204" pitchFamily="34" charset="0"/>
+              <a:buChar char="•"/>
+            </a:pPr>
+            <a:r>
+              <a:rPr lang="en-IN" dirty="0">
+                <a:latin typeface="Times New Roman" panose="02020603050405020304" pitchFamily="18" charset="0"/>
+                <a:cs typeface="Times New Roman" panose="02020603050405020304" pitchFamily="18" charset="0"/>
+              </a:rPr>
+              <a:t>No major software licensing cost is expected during development. </a:t>
+            </a:r>
+          </a:p>
+          <a:p>
+            <a:pPr marL="342900" lvl="0" indent="-342900">
+              <a:buFont typeface="Arial" panose="020B0604020202020204" pitchFamily="34" charset="0"/>
+              <a:buChar char="•"/>
+            </a:pPr>
+            <a:r>
+              <a:rPr lang="en-IN" b="1" dirty="0">
+                <a:latin typeface="Times New Roman" panose="02020603050405020304" pitchFamily="18" charset="0"/>
+                <a:cs typeface="Times New Roman" panose="02020603050405020304" pitchFamily="18" charset="0"/>
+              </a:rPr>
+              <a:t>Estimated overall project budget: ₹1,900–₹2,500.</a:t>
+            </a:r>
+            <a:endParaRPr lang="en-IN" dirty="0">
+              <a:latin typeface="Times New Roman" panose="02020603050405020304" pitchFamily="18" charset="0"/>
+              <a:cs typeface="Times New Roman" panose="02020603050405020304" pitchFamily="18" charset="0"/>
+            </a:endParaRPr>
+          </a:p>
+        </p:txBody>
+      </p:sp>
+      <p:pic>
+        <p:nvPicPr>
+          <p:cNvPr id="7" name="Picture 6">
+            <a:extLst>
+              <a:ext uri="{FF2B5EF4-FFF2-40B4-BE49-F238E27FC236}">
+                <a16:creationId xmlns:a16="http://schemas.microsoft.com/office/drawing/2014/main" id="{2A2DE980-3D57-BDD8-C47B-0FD922ED5A2B}"/>
+              </a:ext>
+            </a:extLst>
+          </p:cNvPr>
+          <p:cNvPicPr>
+            <a:picLocks noChangeAspect="1"/>
+          </p:cNvPicPr>
+          <p:nvPr/>
+        </p:nvPicPr>
+        <p:blipFill>
+          <a:blip r:embed="rId2">
+            <a:extLst>
+              <a:ext uri="{28A0092B-C50C-407E-A947-70E740481C1C}">
+                <a14:useLocalDpi xmlns:a14="http://schemas.microsoft.com/office/drawing/2010/main" val="0"/>
+              </a:ext>
+            </a:extLst>
+          </a:blip>
+          <a:stretch>
+            <a:fillRect/>
+          </a:stretch>
+        </p:blipFill>
+        <p:spPr>
+          <a:xfrm rot="16200000">
+            <a:off x="447476" y="3528910"/>
+            <a:ext cx="1995731" cy="2229161"/>
+          </a:xfrm>
+          <a:prstGeom prst="rect">
+            <a:avLst/>
+          </a:prstGeom>
+        </p:spPr>
+      </p:pic>
+      <p:pic>
+        <p:nvPicPr>
+          <p:cNvPr id="9" name="Picture 8">
+            <a:extLst>
+              <a:ext uri="{FF2B5EF4-FFF2-40B4-BE49-F238E27FC236}">
+                <a16:creationId xmlns:a16="http://schemas.microsoft.com/office/drawing/2014/main" id="{FF51E24A-DB63-1C95-1EE1-64F3BA47FC0D}"/>
+              </a:ext>
+            </a:extLst>
+          </p:cNvPr>
+          <p:cNvPicPr>
+            <a:picLocks noChangeAspect="1"/>
+          </p:cNvPicPr>
+          <p:nvPr/>
+        </p:nvPicPr>
+        <p:blipFill>
+          <a:blip r:embed="rId3"/>
+          <a:stretch>
+            <a:fillRect/>
+          </a:stretch>
+        </p:blipFill>
+        <p:spPr>
+          <a:xfrm>
+            <a:off x="3133186" y="3677938"/>
+            <a:ext cx="2720311" cy="1995732"/>
+          </a:xfrm>
+          <a:prstGeom prst="rect">
+            <a:avLst/>
+          </a:prstGeom>
+        </p:spPr>
+      </p:pic>
+      <p:sp>
+        <p:nvSpPr>
+          <p:cNvPr id="10" name="Rectangle: Rounded Corners 9">
+            <a:extLst>
+              <a:ext uri="{FF2B5EF4-FFF2-40B4-BE49-F238E27FC236}">
+                <a16:creationId xmlns:a16="http://schemas.microsoft.com/office/drawing/2014/main" id="{DF62361B-141B-C590-9732-AFAF3B05D041}"/>
+              </a:ext>
+            </a:extLst>
+          </p:cNvPr>
+          <p:cNvSpPr/>
+          <p:nvPr/>
+        </p:nvSpPr>
+        <p:spPr>
+          <a:xfrm>
+            <a:off x="196645" y="5638574"/>
+            <a:ext cx="2497394" cy="884903"/>
+          </a:xfrm>
+          <a:prstGeom prst="roundRect">
+            <a:avLst/>
+          </a:prstGeom>
+        </p:spPr>
+        <p:style>
+          <a:lnRef idx="2">
+            <a:schemeClr val="accent1">
+              <a:shade val="15000"/>
+            </a:schemeClr>
+          </a:lnRef>
+          <a:fillRef idx="1">
+            <a:schemeClr val="accent1"/>
+          </a:fillRef>
+          <a:effectRef idx="0">
+            <a:schemeClr val="accent1"/>
+          </a:effectRef>
+          <a:fontRef idx="minor">
+            <a:schemeClr val="lt1"/>
+          </a:fontRef>
+        </p:style>
+        <p:txBody>
+          <a:bodyPr rtlCol="0" anchor="ctr"/>
+          <a:lstStyle/>
+          <a:p>
+            <a:pPr algn="ctr"/>
+            <a:r>
+              <a:rPr lang="en-IN" dirty="0"/>
+              <a:t>ESP-32 Development Board</a:t>
+            </a:r>
+          </a:p>
+          <a:p>
+            <a:pPr algn="ctr"/>
+            <a:r>
+              <a:rPr lang="en-IN" dirty="0"/>
+              <a:t>COST : ₹500</a:t>
+            </a:r>
+          </a:p>
+        </p:txBody>
+      </p:sp>
+      <p:sp>
+        <p:nvSpPr>
+          <p:cNvPr id="12" name="Rectangle: Rounded Corners 11">
+            <a:extLst>
+              <a:ext uri="{FF2B5EF4-FFF2-40B4-BE49-F238E27FC236}">
+                <a16:creationId xmlns:a16="http://schemas.microsoft.com/office/drawing/2014/main" id="{1FCC8CC5-E897-D51F-9FD4-667E0EDBAEA2}"/>
+              </a:ext>
+            </a:extLst>
+          </p:cNvPr>
+          <p:cNvSpPr/>
+          <p:nvPr/>
+        </p:nvSpPr>
+        <p:spPr>
+          <a:xfrm>
+            <a:off x="3356103" y="5673670"/>
+            <a:ext cx="2497394" cy="884903"/>
+          </a:xfrm>
+          <a:prstGeom prst="roundRect">
+            <a:avLst/>
+          </a:prstGeom>
+        </p:spPr>
+        <p:style>
+          <a:lnRef idx="2">
+            <a:schemeClr val="accent1">
+              <a:shade val="15000"/>
+            </a:schemeClr>
+          </a:lnRef>
+          <a:fillRef idx="1">
+            <a:schemeClr val="accent1"/>
+          </a:fillRef>
+          <a:effectRef idx="0">
+            <a:schemeClr val="accent1"/>
+          </a:effectRef>
+          <a:fontRef idx="minor">
+            <a:schemeClr val="lt1"/>
+          </a:fontRef>
+        </p:style>
+        <p:txBody>
+          <a:bodyPr rtlCol="0" anchor="ctr"/>
+          <a:lstStyle/>
+          <a:p>
+            <a:pPr algn="ctr"/>
+            <a:r>
+              <a:rPr lang="en-IN" dirty="0"/>
+              <a:t>GPS Module (NEO-6M)</a:t>
+            </a:r>
+          </a:p>
+          <a:p>
+            <a:pPr algn="ctr"/>
+            <a:r>
+              <a:rPr lang="en-IN" dirty="0"/>
+              <a:t>COST : ₹600</a:t>
+            </a:r>
+          </a:p>
+        </p:txBody>
+      </p:sp>
+      <p:pic>
+        <p:nvPicPr>
+          <p:cNvPr id="14" name="Picture 13">
+            <a:extLst>
+              <a:ext uri="{FF2B5EF4-FFF2-40B4-BE49-F238E27FC236}">
+                <a16:creationId xmlns:a16="http://schemas.microsoft.com/office/drawing/2014/main" id="{A760C07D-DC10-C26B-C464-6571587B92DC}"/>
+              </a:ext>
+            </a:extLst>
+          </p:cNvPr>
+          <p:cNvPicPr>
+            <a:picLocks noChangeAspect="1"/>
+          </p:cNvPicPr>
+          <p:nvPr/>
+        </p:nvPicPr>
+        <p:blipFill>
+          <a:blip r:embed="rId4"/>
+          <a:stretch>
+            <a:fillRect/>
+          </a:stretch>
+        </p:blipFill>
+        <p:spPr>
+          <a:xfrm>
+            <a:off x="6600826" y="3904730"/>
+            <a:ext cx="1971776" cy="1542148"/>
+          </a:xfrm>
+          <a:prstGeom prst="rect">
+            <a:avLst/>
+          </a:prstGeom>
+        </p:spPr>
+      </p:pic>
+      <p:sp>
+        <p:nvSpPr>
+          <p:cNvPr id="20" name="Rectangle: Rounded Corners 19">
+            <a:extLst>
+              <a:ext uri="{FF2B5EF4-FFF2-40B4-BE49-F238E27FC236}">
+                <a16:creationId xmlns:a16="http://schemas.microsoft.com/office/drawing/2014/main" id="{114C31D1-65A8-61F1-BDCD-A14C9453932A}"/>
+              </a:ext>
+            </a:extLst>
+          </p:cNvPr>
+          <p:cNvSpPr/>
+          <p:nvPr/>
+        </p:nvSpPr>
+        <p:spPr>
+          <a:xfrm>
+            <a:off x="6600826" y="5578849"/>
+            <a:ext cx="2266335" cy="884903"/>
+          </a:xfrm>
+          <a:prstGeom prst="roundRect">
+            <a:avLst/>
+          </a:prstGeom>
+        </p:spPr>
+        <p:style>
+          <a:lnRef idx="2">
+            <a:schemeClr val="accent1">
+              <a:shade val="15000"/>
+            </a:schemeClr>
+          </a:lnRef>
+          <a:fillRef idx="1">
+            <a:schemeClr val="accent1"/>
+          </a:fillRef>
+          <a:effectRef idx="0">
+            <a:schemeClr val="accent1"/>
+          </a:effectRef>
+          <a:fontRef idx="minor">
+            <a:schemeClr val="lt1"/>
+          </a:fontRef>
+        </p:style>
+        <p:txBody>
+          <a:bodyPr rtlCol="0" anchor="ctr"/>
+          <a:lstStyle/>
+          <a:p>
+            <a:pPr algn="ctr"/>
+            <a:r>
+              <a:rPr lang="en-IN" dirty="0"/>
+              <a:t>BUZZER COST : ₹60</a:t>
+            </a:r>
+          </a:p>
+        </p:txBody>
+      </p:sp>
+      <p:sp>
+        <p:nvSpPr>
+          <p:cNvPr id="27" name="TextBox 26">
+            <a:extLst>
+              <a:ext uri="{FF2B5EF4-FFF2-40B4-BE49-F238E27FC236}">
+                <a16:creationId xmlns:a16="http://schemas.microsoft.com/office/drawing/2014/main" id="{1776BA0A-45E9-C700-1C9E-D783FFE13B1A}"/>
+              </a:ext>
+            </a:extLst>
+          </p:cNvPr>
+          <p:cNvSpPr txBox="1"/>
+          <p:nvPr/>
+        </p:nvSpPr>
+        <p:spPr>
+          <a:xfrm>
+            <a:off x="3244645" y="6595723"/>
+            <a:ext cx="6096000" cy="276999"/>
+          </a:xfrm>
+          <a:prstGeom prst="rect">
+            <a:avLst/>
+          </a:prstGeom>
+          <a:noFill/>
+        </p:spPr>
+        <p:txBody>
+          <a:bodyPr wrap="square">
+            <a:spAutoFit/>
+          </a:bodyPr>
+          <a:lstStyle/>
+          <a:p>
+            <a:r>
+              <a:rPr lang="en-IN" sz="1200" dirty="0">
+                <a:solidFill>
+                  <a:schemeClr val="accent5">
+                    <a:lumMod val="75000"/>
+                  </a:schemeClr>
+                </a:solidFill>
+              </a:rPr>
+              <a:t>KL University | Department of Computer Science and Engineering  | Academic Year 2026–27</a:t>
+            </a:r>
+          </a:p>
+        </p:txBody>
+      </p:sp>
+      <p:pic>
+        <p:nvPicPr>
+          <p:cNvPr id="4" name="Picture 3">
+            <a:extLst>
+              <a:ext uri="{FF2B5EF4-FFF2-40B4-BE49-F238E27FC236}">
+                <a16:creationId xmlns:a16="http://schemas.microsoft.com/office/drawing/2014/main" id="{C3496091-989C-4C4A-B6DD-CABDF7DBE027}"/>
+              </a:ext>
+            </a:extLst>
+          </p:cNvPr>
+          <p:cNvPicPr>
+            <a:picLocks noChangeAspect="1"/>
+          </p:cNvPicPr>
+          <p:nvPr/>
+        </p:nvPicPr>
+        <p:blipFill>
+          <a:blip r:embed="rId5"/>
+          <a:stretch>
+            <a:fillRect/>
+          </a:stretch>
+        </p:blipFill>
+        <p:spPr>
+          <a:xfrm>
+            <a:off x="9176258" y="3645625"/>
+            <a:ext cx="2229162" cy="1740578"/>
+          </a:xfrm>
+          <a:prstGeom prst="rect">
+            <a:avLst/>
+          </a:prstGeom>
+        </p:spPr>
+      </p:pic>
+      <p:sp>
+        <p:nvSpPr>
+          <p:cNvPr id="16" name="Rectangle: Rounded Corners 15">
+            <a:extLst>
+              <a:ext uri="{FF2B5EF4-FFF2-40B4-BE49-F238E27FC236}">
+                <a16:creationId xmlns:a16="http://schemas.microsoft.com/office/drawing/2014/main" id="{9F945DA8-959F-B799-2CA5-FC9324F980A5}"/>
+              </a:ext>
+            </a:extLst>
+          </p:cNvPr>
+          <p:cNvSpPr/>
+          <p:nvPr/>
+        </p:nvSpPr>
+        <p:spPr>
+          <a:xfrm>
+            <a:off x="9176258" y="5638574"/>
+            <a:ext cx="2497394" cy="884903"/>
+          </a:xfrm>
+          <a:prstGeom prst="roundRect">
+            <a:avLst/>
+          </a:prstGeom>
+        </p:spPr>
+        <p:style>
+          <a:lnRef idx="2">
+            <a:schemeClr val="accent1">
+              <a:shade val="15000"/>
+            </a:schemeClr>
+          </a:lnRef>
+          <a:fillRef idx="1">
+            <a:schemeClr val="accent1"/>
+          </a:fillRef>
+          <a:effectRef idx="0">
+            <a:schemeClr val="accent1"/>
+          </a:effectRef>
+          <a:fontRef idx="minor">
+            <a:schemeClr val="lt1"/>
+          </a:fontRef>
+        </p:style>
+        <p:txBody>
+          <a:bodyPr rtlCol="0" anchor="ctr"/>
+          <a:lstStyle/>
+          <a:p>
+            <a:pPr algn="ctr"/>
+            <a:r>
+              <a:rPr lang="en-IN" dirty="0"/>
+              <a:t> SOS BUTTON</a:t>
+            </a:r>
+          </a:p>
+          <a:p>
+            <a:pPr algn="ctr"/>
+            <a:r>
+              <a:rPr lang="en-IN" dirty="0"/>
+              <a:t>COST : ₹250</a:t>
+            </a:r>
+          </a:p>
+        </p:txBody>
+      </p:sp>
+      <p:pic>
+        <p:nvPicPr>
+          <p:cNvPr id="18" name="Picture 17">
+            <a:extLst>
+              <a:ext uri="{FF2B5EF4-FFF2-40B4-BE49-F238E27FC236}">
+                <a16:creationId xmlns:a16="http://schemas.microsoft.com/office/drawing/2014/main" id="{DD55A570-C791-E8C8-1DE9-91574CF61CD3}"/>
+              </a:ext>
+            </a:extLst>
+          </p:cNvPr>
+          <p:cNvPicPr>
+            <a:picLocks noChangeAspect="1"/>
+          </p:cNvPicPr>
+          <p:nvPr/>
+        </p:nvPicPr>
+        <p:blipFill>
+          <a:blip r:embed="rId6"/>
+          <a:stretch>
+            <a:fillRect/>
+          </a:stretch>
+        </p:blipFill>
+        <p:spPr>
+          <a:xfrm>
+            <a:off x="9485562" y="105383"/>
+            <a:ext cx="2706438" cy="2162477"/>
+          </a:xfrm>
+          <a:prstGeom prst="rect">
+            <a:avLst/>
+          </a:prstGeom>
+        </p:spPr>
+      </p:pic>
+      <p:sp>
+        <p:nvSpPr>
+          <p:cNvPr id="21" name="Rectangle: Rounded Corners 20">
+            <a:extLst>
+              <a:ext uri="{FF2B5EF4-FFF2-40B4-BE49-F238E27FC236}">
+                <a16:creationId xmlns:a16="http://schemas.microsoft.com/office/drawing/2014/main" id="{A7BF93BE-B41B-25F0-814A-9FEFD0947945}"/>
+              </a:ext>
+            </a:extLst>
+          </p:cNvPr>
+          <p:cNvSpPr/>
+          <p:nvPr/>
+        </p:nvSpPr>
+        <p:spPr>
+          <a:xfrm>
+            <a:off x="9801226" y="2267860"/>
+            <a:ext cx="2266335" cy="884903"/>
+          </a:xfrm>
+          <a:prstGeom prst="roundRect">
+            <a:avLst/>
+          </a:prstGeom>
+        </p:spPr>
+        <p:style>
+          <a:lnRef idx="2">
+            <a:schemeClr val="accent1">
+              <a:shade val="15000"/>
+            </a:schemeClr>
+          </a:lnRef>
+          <a:fillRef idx="1">
+            <a:schemeClr val="accent1"/>
+          </a:fillRef>
+          <a:effectRef idx="0">
+            <a:schemeClr val="accent1"/>
+          </a:effectRef>
+          <a:fontRef idx="minor">
+            <a:schemeClr val="lt1"/>
+          </a:fontRef>
+        </p:style>
+        <p:txBody>
+          <a:bodyPr rtlCol="0" anchor="ctr"/>
+          <a:lstStyle/>
+          <a:p>
+            <a:pPr algn="ctr"/>
+            <a:r>
+              <a:rPr lang="en-IN" dirty="0"/>
+              <a:t>WIRE KIT COST: ₹300</a:t>
+            </a:r>
+          </a:p>
+        </p:txBody>
+      </p:sp>
+    </p:spTree>
+    <p:extLst>
+      <p:ext uri="{BB962C8B-B14F-4D97-AF65-F5344CB8AC3E}">
+        <p14:creationId xmlns:p14="http://schemas.microsoft.com/office/powerpoint/2010/main" val="539521928"/>
+      </p:ext>
+    </p:extLst>
+  </p:cSld>
+  <p:clrMapOvr>
+    <a:masterClrMapping/>
+  </p:clrMapOvr>
+</p:sld>
+</file>
+
+<file path=ppt/slides/slide11.xml><?xml version="1.0" encoding="utf-8"?>
+<p:sld xmlns:a="http://schemas.openxmlformats.org/drawingml/2006/main" xmlns:r="http://schemas.openxmlformats.org/officeDocument/2006/relationships" xmlns:p="http://schemas.openxmlformats.org/presentationml/2006/main">
+  <p:cSld>
+    <p:spTree>
+      <p:nvGrpSpPr>
+        <p:cNvPr id="1" name=""/>
+        <p:cNvGrpSpPr/>
+        <p:nvPr/>
+      </p:nvGrpSpPr>
+      <p:grpSpPr>
+        <a:xfrm>
+          <a:off x="0" y="0"/>
+          <a:ext cx="0" cy="0"/>
+          <a:chOff x="0" y="0"/>
+          <a:chExt cx="0" cy="0"/>
+        </a:xfrm>
+      </p:grpSpPr>
+      <p:sp>
+        <p:nvSpPr>
+          <p:cNvPr id="3" name="TextBox 2">
+            <a:extLst>
+              <a:ext uri="{FF2B5EF4-FFF2-40B4-BE49-F238E27FC236}">
+                <a16:creationId xmlns:a16="http://schemas.microsoft.com/office/drawing/2014/main" id="{D1E68E26-F4DD-351B-8297-30F0E68D477B}"/>
+              </a:ext>
+            </a:extLst>
+          </p:cNvPr>
+          <p:cNvSpPr txBox="1"/>
+          <p:nvPr/>
+        </p:nvSpPr>
+        <p:spPr>
+          <a:xfrm>
+            <a:off x="147484" y="167148"/>
+            <a:ext cx="5034116" cy="477054"/>
+          </a:xfrm>
+          <a:prstGeom prst="rect">
+            <a:avLst/>
+          </a:prstGeom>
+          <a:noFill/>
+        </p:spPr>
+        <p:txBody>
+          <a:bodyPr wrap="square" rtlCol="0">
+            <a:spAutoFit/>
+          </a:bodyPr>
+          <a:lstStyle/>
+          <a:p>
+            <a:r>
+              <a:rPr lang="en-IN" sz="2500" b="1" dirty="0">
+                <a:solidFill>
+                  <a:schemeClr val="accent1"/>
+                </a:solidFill>
+                <a:latin typeface="Times New Roman" panose="02020603050405020304" pitchFamily="18" charset="0"/>
+                <a:cs typeface="Times New Roman" panose="02020603050405020304" pitchFamily="18" charset="0"/>
+              </a:rPr>
+              <a:t>Software  Program Used</a:t>
+            </a:r>
+          </a:p>
+        </p:txBody>
+      </p:sp>
+      <p:sp>
+        <p:nvSpPr>
+          <p:cNvPr id="4" name="TextBox 3">
+            <a:extLst>
+              <a:ext uri="{FF2B5EF4-FFF2-40B4-BE49-F238E27FC236}">
+                <a16:creationId xmlns:a16="http://schemas.microsoft.com/office/drawing/2014/main" id="{5BF02238-4C5A-DB18-0039-C0CBC0635AB6}"/>
+              </a:ext>
+            </a:extLst>
+          </p:cNvPr>
+          <p:cNvSpPr txBox="1"/>
+          <p:nvPr/>
+        </p:nvSpPr>
+        <p:spPr>
+          <a:xfrm>
+            <a:off x="452284" y="914400"/>
+            <a:ext cx="8436077" cy="1785104"/>
+          </a:xfrm>
+          <a:prstGeom prst="rect">
+            <a:avLst/>
+          </a:prstGeom>
+          <a:noFill/>
+        </p:spPr>
+        <p:txBody>
+          <a:bodyPr wrap="square" rtlCol="0">
+            <a:spAutoFit/>
+          </a:bodyPr>
+          <a:lstStyle/>
+          <a:p>
+            <a:r>
+              <a:rPr lang="en-IN" sz="2200" b="1" dirty="0">
+                <a:latin typeface="Times New Roman" panose="02020603050405020304" pitchFamily="18" charset="0"/>
+                <a:cs typeface="Times New Roman" panose="02020603050405020304" pitchFamily="18" charset="0"/>
+              </a:rPr>
+              <a:t>Frontend:</a:t>
+            </a:r>
+            <a:r>
+              <a:rPr lang="en-IN" sz="2200" dirty="0">
+                <a:latin typeface="Times New Roman" panose="02020603050405020304" pitchFamily="18" charset="0"/>
+                <a:cs typeface="Times New Roman" panose="02020603050405020304" pitchFamily="18" charset="0"/>
+              </a:rPr>
+              <a:t> React.js, HTML5, CSS3, JavaScript, Chart.js, Leaflet.js</a:t>
+            </a:r>
+            <a:br>
+              <a:rPr lang="en-IN" sz="2200" dirty="0">
+                <a:latin typeface="Times New Roman" panose="02020603050405020304" pitchFamily="18" charset="0"/>
+                <a:cs typeface="Times New Roman" panose="02020603050405020304" pitchFamily="18" charset="0"/>
+              </a:rPr>
+            </a:br>
+            <a:r>
+              <a:rPr lang="en-IN" sz="2200" b="1" dirty="0">
+                <a:latin typeface="Times New Roman" panose="02020603050405020304" pitchFamily="18" charset="0"/>
+                <a:cs typeface="Times New Roman" panose="02020603050405020304" pitchFamily="18" charset="0"/>
+              </a:rPr>
+              <a:t>Backend:</a:t>
+            </a:r>
+            <a:r>
+              <a:rPr lang="en-IN" sz="2200" dirty="0">
+                <a:latin typeface="Times New Roman" panose="02020603050405020304" pitchFamily="18" charset="0"/>
+                <a:cs typeface="Times New Roman" panose="02020603050405020304" pitchFamily="18" charset="0"/>
+              </a:rPr>
+              <a:t> Python, </a:t>
+            </a:r>
+            <a:r>
+              <a:rPr lang="en-IN" sz="2200" dirty="0" err="1">
+                <a:latin typeface="Times New Roman" panose="02020603050405020304" pitchFamily="18" charset="0"/>
+                <a:cs typeface="Times New Roman" panose="02020603050405020304" pitchFamily="18" charset="0"/>
+              </a:rPr>
+              <a:t>FastAPI</a:t>
+            </a:r>
+            <a:r>
+              <a:rPr lang="en-IN" sz="2200" dirty="0">
+                <a:latin typeface="Times New Roman" panose="02020603050405020304" pitchFamily="18" charset="0"/>
+                <a:cs typeface="Times New Roman" panose="02020603050405020304" pitchFamily="18" charset="0"/>
+              </a:rPr>
+              <a:t>/Flask, REST API</a:t>
+            </a:r>
+            <a:br>
+              <a:rPr lang="en-IN" sz="2200" dirty="0">
+                <a:latin typeface="Times New Roman" panose="02020603050405020304" pitchFamily="18" charset="0"/>
+                <a:cs typeface="Times New Roman" panose="02020603050405020304" pitchFamily="18" charset="0"/>
+              </a:rPr>
+            </a:br>
+            <a:r>
+              <a:rPr lang="en-IN" sz="2200" b="1" dirty="0">
+                <a:latin typeface="Times New Roman" panose="02020603050405020304" pitchFamily="18" charset="0"/>
+                <a:cs typeface="Times New Roman" panose="02020603050405020304" pitchFamily="18" charset="0"/>
+              </a:rPr>
+              <a:t>Database:</a:t>
+            </a:r>
+            <a:r>
+              <a:rPr lang="en-IN" sz="2200" dirty="0">
+                <a:latin typeface="Times New Roman" panose="02020603050405020304" pitchFamily="18" charset="0"/>
+                <a:cs typeface="Times New Roman" panose="02020603050405020304" pitchFamily="18" charset="0"/>
+              </a:rPr>
+              <a:t> MySQL</a:t>
+            </a:r>
+            <a:br>
+              <a:rPr lang="en-IN" sz="2200" dirty="0">
+                <a:latin typeface="Times New Roman" panose="02020603050405020304" pitchFamily="18" charset="0"/>
+                <a:cs typeface="Times New Roman" panose="02020603050405020304" pitchFamily="18" charset="0"/>
+              </a:rPr>
+            </a:br>
+            <a:r>
+              <a:rPr lang="en-IN" sz="2200" b="1" dirty="0">
+                <a:latin typeface="Times New Roman" panose="02020603050405020304" pitchFamily="18" charset="0"/>
+                <a:cs typeface="Times New Roman" panose="02020603050405020304" pitchFamily="18" charset="0"/>
+              </a:rPr>
+              <a:t>AI/NLP:</a:t>
+            </a:r>
+            <a:r>
+              <a:rPr lang="en-IN" sz="2200" dirty="0">
+                <a:latin typeface="Times New Roman" panose="02020603050405020304" pitchFamily="18" charset="0"/>
+                <a:cs typeface="Times New Roman" panose="02020603050405020304" pitchFamily="18" charset="0"/>
+              </a:rPr>
+              <a:t> NLTK, VADER, Pandas, Scikit-learn, TF-IDF</a:t>
+            </a:r>
+            <a:br>
+              <a:rPr lang="en-IN" sz="2200" dirty="0">
+                <a:latin typeface="Times New Roman" panose="02020603050405020304" pitchFamily="18" charset="0"/>
+                <a:cs typeface="Times New Roman" panose="02020603050405020304" pitchFamily="18" charset="0"/>
+              </a:rPr>
+            </a:br>
+            <a:r>
+              <a:rPr lang="en-IN" sz="2200" b="1" dirty="0">
+                <a:latin typeface="Times New Roman" panose="02020603050405020304" pitchFamily="18" charset="0"/>
+                <a:cs typeface="Times New Roman" panose="02020603050405020304" pitchFamily="18" charset="0"/>
+              </a:rPr>
+              <a:t>Development:</a:t>
+            </a:r>
+            <a:r>
+              <a:rPr lang="en-IN" sz="2200" dirty="0">
+                <a:latin typeface="Times New Roman" panose="02020603050405020304" pitchFamily="18" charset="0"/>
+                <a:cs typeface="Times New Roman" panose="02020603050405020304" pitchFamily="18" charset="0"/>
+              </a:rPr>
+              <a:t> VS Code, Git, GitHub, Postman</a:t>
+            </a:r>
+          </a:p>
+        </p:txBody>
+      </p:sp>
+      <p:pic>
+        <p:nvPicPr>
+          <p:cNvPr id="6" name="Picture 5" descr="https://images.openai.com/static-rsc-4/87aQ_aImVV-zZv7ShBJywA6ry0i0yd-dohJW9EWcA5a2nBM4HrD5VNEnO6UzdmAJ5rr-A9uJQtfD_DsABWJ-cGks-RTVvNLF2-aOlrqP3pOcKQzI3s4JIQm5dKBe7g18jpz4M1Oevw0mXBfeCr6s6LRq1C8RJsQgxqNXKId2f4Z6pzNMIZL73SvXrygKFPSD?purpose=fullsize">
+            <a:extLst>
+              <a:ext uri="{FF2B5EF4-FFF2-40B4-BE49-F238E27FC236}">
+                <a16:creationId xmlns:a16="http://schemas.microsoft.com/office/drawing/2014/main" id="{F672732E-654C-D5E1-91D3-9466BFC8447C}"/>
+              </a:ext>
+            </a:extLst>
+          </p:cNvPr>
+          <p:cNvPicPr>
+            <a:picLocks noChangeAspect="1"/>
+          </p:cNvPicPr>
+          <p:nvPr/>
+        </p:nvPicPr>
+        <p:blipFill>
+          <a:blip r:embed="rId2"/>
+          <a:stretch>
+            <a:fillRect/>
+          </a:stretch>
+        </p:blipFill>
+        <p:spPr>
+          <a:xfrm>
+            <a:off x="4230328" y="3754872"/>
+            <a:ext cx="2750575" cy="2329885"/>
+          </a:xfrm>
+          <a:prstGeom prst="rect">
+            <a:avLst/>
+          </a:prstGeom>
+        </p:spPr>
+      </p:pic>
+      <p:pic>
+        <p:nvPicPr>
+          <p:cNvPr id="7" name="Picture 6" descr="https://images.openai.com/static-rsc-4/eyYXA-ptCDa-sqRy11Nxo5_aSEU3aHERz4F0xaFbNMhkL6V94LMH7SOSfrIw2HA17TsNDovlbTR6bm7D-6VtCS2-IkbJJ7x80Zxhms2R9lRzaVzIAlGSzAIeAK6RqmEtUH7yeMi9I7mZlSqNMSCQwM-5T91tKY7xALI_B7_ypYGuzAsfdGST-gpz9CbQaC1p?purpose=fullsize">
+            <a:extLst>
+              <a:ext uri="{FF2B5EF4-FFF2-40B4-BE49-F238E27FC236}">
+                <a16:creationId xmlns:a16="http://schemas.microsoft.com/office/drawing/2014/main" id="{963595D7-E20A-B21F-CE21-8A765A0B79E1}"/>
+              </a:ext>
+            </a:extLst>
+          </p:cNvPr>
+          <p:cNvPicPr>
+            <a:picLocks noChangeAspect="1"/>
+          </p:cNvPicPr>
+          <p:nvPr/>
+        </p:nvPicPr>
+        <p:blipFill>
+          <a:blip r:embed="rId3"/>
+          <a:stretch>
+            <a:fillRect/>
+          </a:stretch>
+        </p:blipFill>
+        <p:spPr>
+          <a:xfrm>
+            <a:off x="602534" y="3114916"/>
+            <a:ext cx="2991464" cy="3256255"/>
+          </a:xfrm>
+          <a:prstGeom prst="rect">
+            <a:avLst/>
+          </a:prstGeom>
+        </p:spPr>
+      </p:pic>
+      <p:pic>
+        <p:nvPicPr>
+          <p:cNvPr id="8" name="Picture 7" descr="https://images.openai.com/static-rsc-4/J0bqefK6Jcn88hoJJy4rYn5uYHTYutVLu4eiMpaPZmhIAOCo_hcJ-K9pw3YWK0JVq32ifmTfeBUclvo3QpDdFhn8fPUxcWUtWfEyrRvpbhE4IZ1WjxkyBXOfdrBwuhmiv_TcIQYceBgrbsXxtbmPHxJqVSoWNjYZ3IvSCvTSWX90YDYkLT5y901vPG6Ce6xx?purpose=fullsize">
+            <a:extLst>
+              <a:ext uri="{FF2B5EF4-FFF2-40B4-BE49-F238E27FC236}">
+                <a16:creationId xmlns:a16="http://schemas.microsoft.com/office/drawing/2014/main" id="{B5067C51-342E-B530-396D-FF2E68D24FE2}"/>
+              </a:ext>
+            </a:extLst>
+          </p:cNvPr>
+          <p:cNvPicPr>
+            <a:picLocks noChangeAspect="1"/>
+          </p:cNvPicPr>
+          <p:nvPr/>
+        </p:nvPicPr>
+        <p:blipFill>
+          <a:blip r:embed="rId4"/>
+          <a:stretch>
+            <a:fillRect/>
+          </a:stretch>
+        </p:blipFill>
+        <p:spPr>
+          <a:xfrm>
+            <a:off x="7511844" y="3792793"/>
+            <a:ext cx="4077622" cy="2254045"/>
+          </a:xfrm>
+          <a:prstGeom prst="rect">
+            <a:avLst/>
+          </a:prstGeom>
+        </p:spPr>
+      </p:pic>
+      <p:pic>
+        <p:nvPicPr>
+          <p:cNvPr id="9" name="Picture 8" descr="https://images.openai.com/static-rsc-4/zuQgzvxQlLz6QucSfhdOVSyxXbhDalnTC5Pob6E1SAHQ4gZYLzXA1wD-RRVQzWOHAFc76b9AN-sGJoLdbphFS_IDQunudjTfIFyWlWQ2xWXo45X7lHx2--UT-Www6_a1YeJdYpd5wv8izPj-YUf6AnVhmKkKZzoT9ZZpMxvKV-6WeaUM88jUwnGDlkd5-GGe?purpose=fullsize">
+            <a:extLst>
+              <a:ext uri="{FF2B5EF4-FFF2-40B4-BE49-F238E27FC236}">
+                <a16:creationId xmlns:a16="http://schemas.microsoft.com/office/drawing/2014/main" id="{9049134E-9473-E476-8A01-2FBE38500C4E}"/>
+              </a:ext>
+            </a:extLst>
+          </p:cNvPr>
+          <p:cNvPicPr>
+            <a:picLocks noChangeAspect="1"/>
+          </p:cNvPicPr>
+          <p:nvPr/>
+        </p:nvPicPr>
+        <p:blipFill>
+          <a:blip r:embed="rId5"/>
+          <a:stretch>
+            <a:fillRect/>
+          </a:stretch>
+        </p:blipFill>
+        <p:spPr>
+          <a:xfrm>
+            <a:off x="9094839" y="914400"/>
+            <a:ext cx="1907458" cy="1369692"/>
+          </a:xfrm>
+          <a:prstGeom prst="rect">
+            <a:avLst/>
+          </a:prstGeom>
+        </p:spPr>
+      </p:pic>
+    </p:spTree>
+    <p:extLst>
+      <p:ext uri="{BB962C8B-B14F-4D97-AF65-F5344CB8AC3E}">
+        <p14:creationId xmlns:p14="http://schemas.microsoft.com/office/powerpoint/2010/main" val="3385961203"/>
+      </p:ext>
+    </p:extLst>
+  </p:cSld>
+  <p:clrMapOvr>
+    <a:masterClrMapping/>
+  </p:clrMapOvr>
+</p:sld>
+</file>
+
+<file path=ppt/slides/slide12.xml><?xml version="1.0" encoding="utf-8"?>
+<p:sld xmlns:a="http://schemas.openxmlformats.org/drawingml/2006/main" xmlns:r="http://schemas.openxmlformats.org/officeDocument/2006/relationships" xmlns:p="http://schemas.openxmlformats.org/presentationml/2006/main">
+  <p:cSld>
+    <p:spTree>
+      <p:nvGrpSpPr>
+        <p:cNvPr id="1" name=""/>
+        <p:cNvGrpSpPr/>
+        <p:nvPr/>
+      </p:nvGrpSpPr>
+      <p:grpSpPr>
+        <a:xfrm>
+          <a:off x="0" y="0"/>
+          <a:ext cx="0" cy="0"/>
+          <a:chOff x="0" y="0"/>
+          <a:chExt cx="0" cy="0"/>
+        </a:xfrm>
+      </p:grpSpPr>
+      <p:sp>
+        <p:nvSpPr>
+          <p:cNvPr id="3" name="TextBox 2">
+            <a:extLst>
+              <a:ext uri="{FF2B5EF4-FFF2-40B4-BE49-F238E27FC236}">
+                <a16:creationId xmlns:a16="http://schemas.microsoft.com/office/drawing/2014/main" id="{386FFF22-B3B9-90ED-3DA4-8B26CABF9FBE}"/>
+              </a:ext>
+            </a:extLst>
+          </p:cNvPr>
+          <p:cNvSpPr txBox="1"/>
+          <p:nvPr/>
+        </p:nvSpPr>
+        <p:spPr>
+          <a:xfrm>
+            <a:off x="3156155" y="6581001"/>
+            <a:ext cx="6096000" cy="276999"/>
+          </a:xfrm>
+          <a:prstGeom prst="rect">
+            <a:avLst/>
+          </a:prstGeom>
+          <a:noFill/>
+        </p:spPr>
+        <p:txBody>
+          <a:bodyPr wrap="square">
+            <a:spAutoFit/>
+          </a:bodyPr>
+          <a:lstStyle/>
+          <a:p>
+            <a:r>
+              <a:rPr lang="en-IN" sz="1200" dirty="0">
+                <a:solidFill>
+                  <a:schemeClr val="accent5">
+                    <a:lumMod val="75000"/>
+                  </a:schemeClr>
+                </a:solidFill>
+              </a:rPr>
+              <a:t>KL University | Department of Computer Science and Engineering | Academic Year 2026–27</a:t>
+            </a:r>
+          </a:p>
+        </p:txBody>
+      </p:sp>
+      <p:sp>
+        <p:nvSpPr>
+          <p:cNvPr id="5" name="TextBox 4">
+            <a:extLst>
+              <a:ext uri="{FF2B5EF4-FFF2-40B4-BE49-F238E27FC236}">
+                <a16:creationId xmlns:a16="http://schemas.microsoft.com/office/drawing/2014/main" id="{A4724C24-5259-AC59-408D-C91F6710C363}"/>
+              </a:ext>
+            </a:extLst>
+          </p:cNvPr>
+          <p:cNvSpPr txBox="1"/>
+          <p:nvPr/>
+        </p:nvSpPr>
+        <p:spPr>
+          <a:xfrm>
+            <a:off x="108155" y="193876"/>
+            <a:ext cx="6096000" cy="415498"/>
+          </a:xfrm>
+          <a:prstGeom prst="rect">
+            <a:avLst/>
+          </a:prstGeom>
+          <a:noFill/>
+        </p:spPr>
+        <p:txBody>
+          <a:bodyPr wrap="square">
+            <a:spAutoFit/>
+          </a:bodyPr>
+          <a:lstStyle/>
+          <a:p>
+            <a:r>
+              <a:rPr lang="en-IN" sz="2100" b="1" dirty="0">
+                <a:solidFill>
+                  <a:schemeClr val="accent1">
+                    <a:lumMod val="75000"/>
+                  </a:schemeClr>
+                </a:solidFill>
+                <a:latin typeface="Lucida Bright" panose="02040602050505020304" pitchFamily="18" charset="0"/>
+              </a:rPr>
+              <a:t>    IoT WEARABLE AND SOS</a:t>
+            </a:r>
+          </a:p>
+        </p:txBody>
+      </p:sp>
+      <p:sp>
+        <p:nvSpPr>
+          <p:cNvPr id="7" name="TextBox 6">
+            <a:extLst>
+              <a:ext uri="{FF2B5EF4-FFF2-40B4-BE49-F238E27FC236}">
+                <a16:creationId xmlns:a16="http://schemas.microsoft.com/office/drawing/2014/main" id="{FADCDF61-3B95-2D81-DC67-DDA7596BB594}"/>
+              </a:ext>
+            </a:extLst>
+          </p:cNvPr>
+          <p:cNvSpPr txBox="1"/>
+          <p:nvPr/>
+        </p:nvSpPr>
+        <p:spPr>
+          <a:xfrm>
+            <a:off x="648929" y="731765"/>
+            <a:ext cx="6469626" cy="4247317"/>
+          </a:xfrm>
+          <a:prstGeom prst="rect">
+            <a:avLst/>
+          </a:prstGeom>
+          <a:noFill/>
+        </p:spPr>
+        <p:txBody>
+          <a:bodyPr wrap="square">
+            <a:spAutoFit/>
+          </a:bodyPr>
+          <a:lstStyle/>
+          <a:p>
+            <a:pPr marL="342900" lvl="0" indent="-342900">
+              <a:buFont typeface="Arial" panose="020B0604020202020204" pitchFamily="34" charset="0"/>
+              <a:buChar char="•"/>
+            </a:pPr>
+            <a:r>
+              <a:rPr lang="en-IN" dirty="0">
+                <a:latin typeface="Times New Roman" panose="02020603050405020304" pitchFamily="18" charset="0"/>
+                <a:cs typeface="Times New Roman" panose="02020603050405020304" pitchFamily="18" charset="0"/>
+              </a:rPr>
+              <a:t>ESP32 is used as the main controller for the proposed wearable prototype. </a:t>
+            </a:r>
+          </a:p>
+          <a:p>
+            <a:pPr marL="342900" lvl="0" indent="-342900">
+              <a:buFont typeface="Arial" panose="020B0604020202020204" pitchFamily="34" charset="0"/>
+              <a:buChar char="•"/>
+            </a:pPr>
+            <a:r>
+              <a:rPr lang="en-IN" dirty="0">
+                <a:latin typeface="Times New Roman" panose="02020603050405020304" pitchFamily="18" charset="0"/>
+                <a:cs typeface="Times New Roman" panose="02020603050405020304" pitchFamily="18" charset="0"/>
+              </a:rPr>
+              <a:t>A GPS module provides the approximate location of the user. </a:t>
+            </a:r>
+          </a:p>
+          <a:p>
+            <a:pPr marL="342900" lvl="0" indent="-342900">
+              <a:buFont typeface="Arial" panose="020B0604020202020204" pitchFamily="34" charset="0"/>
+              <a:buChar char="•"/>
+            </a:pPr>
+            <a:r>
+              <a:rPr lang="en-IN" dirty="0">
+                <a:latin typeface="Times New Roman" panose="02020603050405020304" pitchFamily="18" charset="0"/>
+                <a:cs typeface="Times New Roman" panose="02020603050405020304" pitchFamily="18" charset="0"/>
+              </a:rPr>
+              <a:t>The current location can be compared with selected potential risk zones. </a:t>
+            </a:r>
+          </a:p>
+          <a:p>
+            <a:pPr marL="342900" lvl="0" indent="-342900">
+              <a:buFont typeface="Arial" panose="020B0604020202020204" pitchFamily="34" charset="0"/>
+              <a:buChar char="•"/>
+            </a:pPr>
+            <a:r>
+              <a:rPr lang="en-IN" dirty="0">
+                <a:latin typeface="Times New Roman" panose="02020603050405020304" pitchFamily="18" charset="0"/>
+                <a:cs typeface="Times New Roman" panose="02020603050405020304" pitchFamily="18" charset="0"/>
+              </a:rPr>
+              <a:t>An alert can be generated when the user enters a designated risk area. </a:t>
+            </a:r>
+          </a:p>
+          <a:p>
+            <a:pPr marL="342900" lvl="0" indent="-342900">
+              <a:buFont typeface="Arial" panose="020B0604020202020204" pitchFamily="34" charset="0"/>
+              <a:buChar char="•"/>
+            </a:pPr>
+            <a:r>
+              <a:rPr lang="en-IN" dirty="0">
+                <a:latin typeface="Times New Roman" panose="02020603050405020304" pitchFamily="18" charset="0"/>
+                <a:cs typeface="Times New Roman" panose="02020603050405020304" pitchFamily="18" charset="0"/>
+              </a:rPr>
+              <a:t>A physical SOS button can create an emergency event in the prototype. </a:t>
+            </a:r>
+          </a:p>
+          <a:p>
+            <a:pPr marL="342900" lvl="0" indent="-342900">
+              <a:buFont typeface="Arial" panose="020B0604020202020204" pitchFamily="34" charset="0"/>
+              <a:buChar char="•"/>
+            </a:pPr>
+            <a:r>
+              <a:rPr lang="en-IN" dirty="0">
+                <a:latin typeface="Times New Roman" panose="02020603050405020304" pitchFamily="18" charset="0"/>
+                <a:cs typeface="Times New Roman" panose="02020603050405020304" pitchFamily="18" charset="0"/>
+              </a:rPr>
+              <a:t>A buzzer or vibration motor can provide a local warning to the user. </a:t>
+            </a:r>
+          </a:p>
+          <a:p>
+            <a:pPr marL="342900" lvl="0" indent="-342900">
+              <a:buFont typeface="Arial" panose="020B0604020202020204" pitchFamily="34" charset="0"/>
+              <a:buChar char="•"/>
+            </a:pPr>
+            <a:r>
+              <a:rPr lang="en-IN" dirty="0">
+                <a:latin typeface="Times New Roman" panose="02020603050405020304" pitchFamily="18" charset="0"/>
+                <a:cs typeface="Times New Roman" panose="02020603050405020304" pitchFamily="18" charset="0"/>
+              </a:rPr>
+              <a:t>Wi-Fi can be used for the initial prototype, with GSM or LTE as a future extension. </a:t>
+            </a:r>
+          </a:p>
+          <a:p>
+            <a:pPr marL="342900" lvl="0" indent="-342900">
+              <a:buFont typeface="Arial" panose="020B0604020202020204" pitchFamily="34" charset="0"/>
+              <a:buChar char="•"/>
+            </a:pPr>
+            <a:r>
+              <a:rPr lang="en-IN" dirty="0">
+                <a:latin typeface="Times New Roman" panose="02020603050405020304" pitchFamily="18" charset="0"/>
+                <a:cs typeface="Times New Roman" panose="02020603050405020304" pitchFamily="18" charset="0"/>
+              </a:rPr>
+              <a:t>The wearable connects the project’s data analysis with a practical safety-assistance feature.</a:t>
+            </a:r>
+          </a:p>
+        </p:txBody>
+      </p:sp>
+      <p:sp>
+        <p:nvSpPr>
+          <p:cNvPr id="9" name="Rectangle: Folded Corner 8">
+            <a:extLst>
+              <a:ext uri="{FF2B5EF4-FFF2-40B4-BE49-F238E27FC236}">
+                <a16:creationId xmlns:a16="http://schemas.microsoft.com/office/drawing/2014/main" id="{29F35040-B62A-BC91-B0E0-75E777DF72DE}"/>
+              </a:ext>
+            </a:extLst>
+          </p:cNvPr>
+          <p:cNvSpPr/>
+          <p:nvPr/>
+        </p:nvSpPr>
+        <p:spPr>
+          <a:xfrm>
+            <a:off x="7855974" y="609374"/>
+            <a:ext cx="3913239" cy="4631220"/>
+          </a:xfrm>
+          <a:prstGeom prst="foldedCorner">
+            <a:avLst/>
+          </a:prstGeom>
+        </p:spPr>
+        <p:style>
+          <a:lnRef idx="1">
+            <a:schemeClr val="accent4"/>
+          </a:lnRef>
+          <a:fillRef idx="2">
+            <a:schemeClr val="accent4"/>
+          </a:fillRef>
+          <a:effectRef idx="1">
+            <a:schemeClr val="accent4"/>
+          </a:effectRef>
+          <a:fontRef idx="minor">
+            <a:schemeClr val="dk1"/>
+          </a:fontRef>
+        </p:style>
+        <p:txBody>
+          <a:bodyPr rtlCol="0" anchor="ctr"/>
+          <a:lstStyle/>
+          <a:p>
+            <a:pPr algn="ctr"/>
+            <a:r>
+              <a:rPr lang="en-IN" dirty="0"/>
+              <a:t> </a:t>
+            </a:r>
+            <a:r>
+              <a:rPr lang="en-IN" b="1" dirty="0">
+                <a:solidFill>
+                  <a:schemeClr val="accent1"/>
+                </a:solidFill>
+              </a:rPr>
+              <a:t>GPS</a:t>
+            </a:r>
+          </a:p>
+          <a:p>
+            <a:pPr algn="ctr"/>
+            <a:r>
+              <a:rPr lang="en-IN" b="1" dirty="0">
+                <a:solidFill>
+                  <a:schemeClr val="accent1"/>
+                </a:solidFill>
+              </a:rPr>
+              <a:t>  ↓</a:t>
+            </a:r>
+          </a:p>
+          <a:p>
+            <a:pPr algn="ctr"/>
+            <a:r>
+              <a:rPr lang="en-IN" b="1" dirty="0">
+                <a:solidFill>
+                  <a:schemeClr val="accent1"/>
+                </a:solidFill>
+              </a:rPr>
+              <a:t>   ESP32</a:t>
+            </a:r>
+          </a:p>
+          <a:p>
+            <a:pPr algn="ctr"/>
+            <a:r>
+              <a:rPr lang="en-IN" b="1" dirty="0">
+                <a:solidFill>
+                  <a:schemeClr val="accent1"/>
+                </a:solidFill>
+              </a:rPr>
+              <a:t> ↙     ↘</a:t>
+            </a:r>
+          </a:p>
+          <a:p>
+            <a:pPr algn="ctr"/>
+            <a:r>
+              <a:rPr lang="en-IN" b="1" dirty="0">
+                <a:solidFill>
+                  <a:schemeClr val="accent1"/>
+                </a:solidFill>
+              </a:rPr>
+              <a:t>        BUZZER               SOS BUTTON</a:t>
+            </a:r>
+          </a:p>
+          <a:p>
+            <a:pPr algn="ctr"/>
+            <a:r>
+              <a:rPr lang="en-IN" b="1" dirty="0">
+                <a:solidFill>
+                  <a:schemeClr val="accent1"/>
+                </a:solidFill>
+              </a:rPr>
+              <a:t>  ↓                             ↓</a:t>
+            </a:r>
+          </a:p>
+          <a:p>
+            <a:pPr algn="ctr"/>
+            <a:r>
+              <a:rPr lang="en-IN" b="1" dirty="0">
+                <a:solidFill>
+                  <a:schemeClr val="accent1"/>
+                </a:solidFill>
+              </a:rPr>
+              <a:t>         ALERT                  EMERGENCY</a:t>
+            </a:r>
+          </a:p>
+        </p:txBody>
+      </p:sp>
+    </p:spTree>
+    <p:extLst>
+      <p:ext uri="{BB962C8B-B14F-4D97-AF65-F5344CB8AC3E}">
+        <p14:creationId xmlns:p14="http://schemas.microsoft.com/office/powerpoint/2010/main" val="3552089556"/>
+      </p:ext>
+    </p:extLst>
+  </p:cSld>
+  <p:clrMapOvr>
+    <a:masterClrMapping/>
+  </p:clrMapOvr>
+</p:sld>
+</file>
+
+<file path=ppt/slides/slide13.xml><?xml version="1.0" encoding="utf-8"?>
+<p:sld xmlns:a="http://schemas.openxmlformats.org/drawingml/2006/main" xmlns:r="http://schemas.openxmlformats.org/officeDocument/2006/relationships" xmlns:p="http://schemas.openxmlformats.org/presentationml/2006/main">
+  <p:cSld>
+    <p:spTree>
+      <p:nvGrpSpPr>
+        <p:cNvPr id="1" name=""/>
+        <p:cNvGrpSpPr/>
+        <p:nvPr/>
+      </p:nvGrpSpPr>
+      <p:grpSpPr>
+        <a:xfrm>
+          <a:off x="0" y="0"/>
+          <a:ext cx="0" cy="0"/>
+          <a:chOff x="0" y="0"/>
+          <a:chExt cx="0" cy="0"/>
+        </a:xfrm>
+      </p:grpSpPr>
+      <p:sp>
+        <p:nvSpPr>
+          <p:cNvPr id="3" name="TextBox 2">
+            <a:extLst>
+              <a:ext uri="{FF2B5EF4-FFF2-40B4-BE49-F238E27FC236}">
+                <a16:creationId xmlns:a16="http://schemas.microsoft.com/office/drawing/2014/main" id="{B6F22D28-F95D-CBEC-3D64-7EE8F6A986E1}"/>
+              </a:ext>
+            </a:extLst>
+          </p:cNvPr>
+          <p:cNvSpPr txBox="1"/>
+          <p:nvPr/>
+        </p:nvSpPr>
+        <p:spPr>
+          <a:xfrm>
+            <a:off x="3175819" y="6581001"/>
+            <a:ext cx="6096000" cy="276999"/>
+          </a:xfrm>
+          <a:prstGeom prst="rect">
+            <a:avLst/>
+          </a:prstGeom>
+          <a:noFill/>
+        </p:spPr>
+        <p:txBody>
+          <a:bodyPr wrap="square">
+            <a:spAutoFit/>
+          </a:bodyPr>
+          <a:lstStyle/>
+          <a:p>
+            <a:r>
+              <a:rPr lang="en-IN" sz="1200" dirty="0">
+                <a:solidFill>
+                  <a:schemeClr val="accent5">
+                    <a:lumMod val="75000"/>
+                  </a:schemeClr>
+                </a:solidFill>
+              </a:rPr>
+              <a:t>KL University | Department of Computer Science and Engineering  | Academic Year 2026–27</a:t>
+            </a:r>
+          </a:p>
+        </p:txBody>
+      </p:sp>
+      <p:sp>
+        <p:nvSpPr>
+          <p:cNvPr id="5" name="TextBox 4">
+            <a:extLst>
+              <a:ext uri="{FF2B5EF4-FFF2-40B4-BE49-F238E27FC236}">
+                <a16:creationId xmlns:a16="http://schemas.microsoft.com/office/drawing/2014/main" id="{B18FF67D-A539-B955-911D-BD8CDB4919A5}"/>
+              </a:ext>
+            </a:extLst>
+          </p:cNvPr>
+          <p:cNvSpPr txBox="1"/>
+          <p:nvPr/>
+        </p:nvSpPr>
+        <p:spPr>
+          <a:xfrm>
+            <a:off x="294968" y="243036"/>
+            <a:ext cx="6096000" cy="415498"/>
+          </a:xfrm>
+          <a:prstGeom prst="rect">
+            <a:avLst/>
+          </a:prstGeom>
+          <a:noFill/>
+        </p:spPr>
+        <p:txBody>
+          <a:bodyPr wrap="square">
+            <a:spAutoFit/>
+          </a:bodyPr>
+          <a:lstStyle/>
+          <a:p>
+            <a:r>
+              <a:rPr lang="en-IN" sz="2100" b="1" dirty="0">
+                <a:solidFill>
+                  <a:schemeClr val="accent1">
+                    <a:lumMod val="75000"/>
+                  </a:schemeClr>
+                </a:solidFill>
+                <a:latin typeface="Lucida Bright" panose="02040602050505020304" pitchFamily="18" charset="0"/>
+              </a:rPr>
+              <a:t>DASHBOARD AND POTENTIAL RISK ZONES</a:t>
+            </a:r>
+          </a:p>
+        </p:txBody>
+      </p:sp>
+      <p:sp>
+        <p:nvSpPr>
+          <p:cNvPr id="7" name="TextBox 6">
+            <a:extLst>
+              <a:ext uri="{FF2B5EF4-FFF2-40B4-BE49-F238E27FC236}">
+                <a16:creationId xmlns:a16="http://schemas.microsoft.com/office/drawing/2014/main" id="{E40B13E5-ABEE-ADC7-8793-CF1D6191AA61}"/>
+              </a:ext>
+            </a:extLst>
+          </p:cNvPr>
+          <p:cNvSpPr txBox="1"/>
+          <p:nvPr/>
+        </p:nvSpPr>
+        <p:spPr>
+          <a:xfrm>
+            <a:off x="875070" y="790759"/>
+            <a:ext cx="6587613" cy="4524315"/>
+          </a:xfrm>
+          <a:prstGeom prst="rect">
+            <a:avLst/>
+          </a:prstGeom>
+          <a:noFill/>
+        </p:spPr>
+        <p:txBody>
+          <a:bodyPr wrap="square">
+            <a:spAutoFit/>
+          </a:bodyPr>
+          <a:lstStyle/>
+          <a:p>
+            <a:pPr marL="342900" lvl="0" indent="-342900">
+              <a:buFont typeface="Arial" panose="020B0604020202020204" pitchFamily="34" charset="0"/>
+              <a:buChar char="•"/>
+            </a:pPr>
+            <a:r>
+              <a:rPr lang="en-IN" dirty="0">
+                <a:latin typeface="Times New Roman" panose="02020603050405020304" pitchFamily="18" charset="0"/>
+                <a:cs typeface="Times New Roman" panose="02020603050405020304" pitchFamily="18" charset="0"/>
+              </a:rPr>
+              <a:t>The dashboard provides a simple overview of the </a:t>
+            </a:r>
+            <a:r>
+              <a:rPr lang="en-IN" dirty="0" err="1">
+                <a:latin typeface="Times New Roman" panose="02020603050405020304" pitchFamily="18" charset="0"/>
+                <a:cs typeface="Times New Roman" panose="02020603050405020304" pitchFamily="18" charset="0"/>
+              </a:rPr>
+              <a:t>analyzed</a:t>
+            </a:r>
+            <a:r>
+              <a:rPr lang="en-IN" dirty="0">
+                <a:latin typeface="Times New Roman" panose="02020603050405020304" pitchFamily="18" charset="0"/>
+                <a:cs typeface="Times New Roman" panose="02020603050405020304" pitchFamily="18" charset="0"/>
+              </a:rPr>
+              <a:t> safety-related information. </a:t>
+            </a:r>
+          </a:p>
+          <a:p>
+            <a:pPr marL="342900" lvl="0" indent="-342900">
+              <a:buFont typeface="Arial" panose="020B0604020202020204" pitchFamily="34" charset="0"/>
+              <a:buChar char="•"/>
+            </a:pPr>
+            <a:r>
+              <a:rPr lang="en-IN" dirty="0">
+                <a:latin typeface="Times New Roman" panose="02020603050405020304" pitchFamily="18" charset="0"/>
+                <a:cs typeface="Times New Roman" panose="02020603050405020304" pitchFamily="18" charset="0"/>
+              </a:rPr>
+              <a:t>Sentiment charts show positive, negative and neutral distributions. </a:t>
+            </a:r>
+          </a:p>
+          <a:p>
+            <a:pPr marL="342900" lvl="0" indent="-342900">
+              <a:buFont typeface="Arial" panose="020B0604020202020204" pitchFamily="34" charset="0"/>
+              <a:buChar char="•"/>
+            </a:pPr>
+            <a:r>
+              <a:rPr lang="en-IN" dirty="0">
+                <a:latin typeface="Times New Roman" panose="02020603050405020304" pitchFamily="18" charset="0"/>
+                <a:cs typeface="Times New Roman" panose="02020603050405020304" pitchFamily="18" charset="0"/>
+              </a:rPr>
+              <a:t>Incident charts compare different types of reported safety concerns. </a:t>
+            </a:r>
+          </a:p>
+          <a:p>
+            <a:pPr marL="342900" lvl="0" indent="-342900">
+              <a:buFont typeface="Arial" panose="020B0604020202020204" pitchFamily="34" charset="0"/>
+              <a:buChar char="•"/>
+            </a:pPr>
+            <a:r>
+              <a:rPr lang="en-IN" dirty="0">
+                <a:latin typeface="Times New Roman" panose="02020603050405020304" pitchFamily="18" charset="0"/>
+                <a:cs typeface="Times New Roman" panose="02020603050405020304" pitchFamily="18" charset="0"/>
+              </a:rPr>
+              <a:t>Time-based graphs show how reports change during selected periods. </a:t>
+            </a:r>
+          </a:p>
+          <a:p>
+            <a:pPr marL="342900" lvl="0" indent="-342900">
+              <a:buFont typeface="Arial" panose="020B0604020202020204" pitchFamily="34" charset="0"/>
+              <a:buChar char="•"/>
+            </a:pPr>
+            <a:r>
+              <a:rPr lang="en-IN" dirty="0">
+                <a:latin typeface="Times New Roman" panose="02020603050405020304" pitchFamily="18" charset="0"/>
+                <a:cs typeface="Times New Roman" panose="02020603050405020304" pitchFamily="18" charset="0"/>
+              </a:rPr>
+              <a:t>A map view can display the geographic concentration of </a:t>
+            </a:r>
+            <a:r>
+              <a:rPr lang="en-IN" dirty="0" err="1">
+                <a:latin typeface="Times New Roman" panose="02020603050405020304" pitchFamily="18" charset="0"/>
+                <a:cs typeface="Times New Roman" panose="02020603050405020304" pitchFamily="18" charset="0"/>
+              </a:rPr>
+              <a:t>analyzed</a:t>
+            </a:r>
+            <a:r>
+              <a:rPr lang="en-IN" dirty="0">
+                <a:latin typeface="Times New Roman" panose="02020603050405020304" pitchFamily="18" charset="0"/>
+                <a:cs typeface="Times New Roman" panose="02020603050405020304" pitchFamily="18" charset="0"/>
+              </a:rPr>
+              <a:t> reports. </a:t>
+            </a:r>
+          </a:p>
+          <a:p>
+            <a:pPr marL="342900" lvl="0" indent="-342900">
+              <a:buFont typeface="Arial" panose="020B0604020202020204" pitchFamily="34" charset="0"/>
+              <a:buChar char="•"/>
+            </a:pPr>
+            <a:r>
+              <a:rPr lang="en-IN" dirty="0">
+                <a:latin typeface="Times New Roman" panose="02020603050405020304" pitchFamily="18" charset="0"/>
+                <a:cs typeface="Times New Roman" panose="02020603050405020304" pitchFamily="18" charset="0"/>
+              </a:rPr>
+              <a:t>Filters allow users to select time period, location and incident type. </a:t>
+            </a:r>
+          </a:p>
+          <a:p>
+            <a:pPr marL="342900" lvl="0" indent="-342900">
+              <a:buFont typeface="Arial" panose="020B0604020202020204" pitchFamily="34" charset="0"/>
+              <a:buChar char="•"/>
+            </a:pPr>
+            <a:r>
+              <a:rPr lang="en-IN" dirty="0">
+                <a:latin typeface="Times New Roman" panose="02020603050405020304" pitchFamily="18" charset="0"/>
+                <a:cs typeface="Times New Roman" panose="02020603050405020304" pitchFamily="18" charset="0"/>
+              </a:rPr>
+              <a:t>Potential high-risk zones can be highlighted using repeated reported-data patterns. </a:t>
+            </a:r>
+          </a:p>
+          <a:p>
+            <a:pPr marL="342900" lvl="0" indent="-342900">
+              <a:buFont typeface="Arial" panose="020B0604020202020204" pitchFamily="34" charset="0"/>
+              <a:buChar char="•"/>
+            </a:pPr>
+            <a:r>
+              <a:rPr lang="en-IN" dirty="0">
+                <a:latin typeface="Times New Roman" panose="02020603050405020304" pitchFamily="18" charset="0"/>
+                <a:cs typeface="Times New Roman" panose="02020603050405020304" pitchFamily="18" charset="0"/>
+              </a:rPr>
+              <a:t>The dashboard makes the project results easier for users and mentors to understand</a:t>
+            </a:r>
+          </a:p>
+        </p:txBody>
+      </p:sp>
+      <p:sp>
+        <p:nvSpPr>
+          <p:cNvPr id="8" name="Rectangle 7">
+            <a:extLst>
+              <a:ext uri="{FF2B5EF4-FFF2-40B4-BE49-F238E27FC236}">
+                <a16:creationId xmlns:a16="http://schemas.microsoft.com/office/drawing/2014/main" id="{DD5141F9-3E12-8C2A-BDCF-BE211958B304}"/>
+              </a:ext>
+            </a:extLst>
+          </p:cNvPr>
+          <p:cNvSpPr/>
+          <p:nvPr/>
+        </p:nvSpPr>
+        <p:spPr>
+          <a:xfrm>
+            <a:off x="8662220" y="392945"/>
+            <a:ext cx="2654709" cy="1592826"/>
+          </a:xfrm>
+          <a:prstGeom prst="rect">
+            <a:avLst/>
+          </a:prstGeom>
+        </p:spPr>
+        <p:style>
+          <a:lnRef idx="2">
+            <a:schemeClr val="accent2">
+              <a:shade val="15000"/>
+            </a:schemeClr>
+          </a:lnRef>
+          <a:fillRef idx="1">
+            <a:schemeClr val="accent2"/>
+          </a:fillRef>
+          <a:effectRef idx="0">
+            <a:schemeClr val="accent2"/>
+          </a:effectRef>
+          <a:fontRef idx="minor">
+            <a:schemeClr val="lt1"/>
+          </a:fontRef>
+        </p:style>
+        <p:txBody>
+          <a:bodyPr rtlCol="0" anchor="ctr"/>
+          <a:lstStyle/>
+          <a:p>
+            <a:pPr algn="ctr"/>
+            <a:r>
+              <a:rPr lang="en-IN" dirty="0"/>
+              <a:t>Positive</a:t>
+            </a:r>
+            <a:br>
+              <a:rPr lang="en-IN" dirty="0"/>
+            </a:br>
+            <a:r>
+              <a:rPr lang="en-IN" dirty="0"/>
+              <a:t>Negative</a:t>
+            </a:r>
+            <a:br>
+              <a:rPr lang="en-IN" dirty="0"/>
+            </a:br>
+            <a:r>
+              <a:rPr lang="en-IN" dirty="0"/>
+              <a:t>Neutral</a:t>
+            </a:r>
+          </a:p>
+        </p:txBody>
+      </p:sp>
+      <p:sp>
+        <p:nvSpPr>
+          <p:cNvPr id="10" name="Rectangle 9">
+            <a:extLst>
+              <a:ext uri="{FF2B5EF4-FFF2-40B4-BE49-F238E27FC236}">
+                <a16:creationId xmlns:a16="http://schemas.microsoft.com/office/drawing/2014/main" id="{96522731-CD31-F1E1-BEB3-4B2AA00879A7}"/>
+              </a:ext>
+            </a:extLst>
+          </p:cNvPr>
+          <p:cNvSpPr/>
+          <p:nvPr/>
+        </p:nvSpPr>
+        <p:spPr>
+          <a:xfrm>
+            <a:off x="8662221" y="3252043"/>
+            <a:ext cx="2654709" cy="796413"/>
+          </a:xfrm>
+          <a:prstGeom prst="rect">
+            <a:avLst/>
+          </a:prstGeom>
+        </p:spPr>
+        <p:style>
+          <a:lnRef idx="2">
+            <a:schemeClr val="accent2">
+              <a:shade val="15000"/>
+            </a:schemeClr>
+          </a:lnRef>
+          <a:fillRef idx="1">
+            <a:schemeClr val="accent2"/>
+          </a:fillRef>
+          <a:effectRef idx="0">
+            <a:schemeClr val="accent2"/>
+          </a:effectRef>
+          <a:fontRef idx="minor">
+            <a:schemeClr val="lt1"/>
+          </a:fontRef>
+        </p:style>
+        <p:txBody>
+          <a:bodyPr rtlCol="0" anchor="ctr"/>
+          <a:lstStyle/>
+          <a:p>
+            <a:pPr algn="ctr"/>
+            <a:r>
+              <a:rPr lang="en-IN"/>
+              <a:t>INCIDENT ANALYSIS</a:t>
+            </a:r>
+            <a:endParaRPr lang="en-IN" dirty="0"/>
+          </a:p>
+        </p:txBody>
+      </p:sp>
+      <p:sp>
+        <p:nvSpPr>
+          <p:cNvPr id="12" name="Rectangle 11">
+            <a:extLst>
+              <a:ext uri="{FF2B5EF4-FFF2-40B4-BE49-F238E27FC236}">
+                <a16:creationId xmlns:a16="http://schemas.microsoft.com/office/drawing/2014/main" id="{6FBF8FC7-2DDA-ED44-0322-ADC78A542545}"/>
+              </a:ext>
+            </a:extLst>
+          </p:cNvPr>
+          <p:cNvSpPr/>
+          <p:nvPr/>
+        </p:nvSpPr>
+        <p:spPr>
+          <a:xfrm>
+            <a:off x="8716297" y="5476567"/>
+            <a:ext cx="2654709" cy="634919"/>
+          </a:xfrm>
+          <a:prstGeom prst="rect">
+            <a:avLst/>
+          </a:prstGeom>
+        </p:spPr>
+        <p:style>
+          <a:lnRef idx="2">
+            <a:schemeClr val="accent2">
+              <a:shade val="15000"/>
+            </a:schemeClr>
+          </a:lnRef>
+          <a:fillRef idx="1">
+            <a:schemeClr val="accent2"/>
+          </a:fillRef>
+          <a:effectRef idx="0">
+            <a:schemeClr val="accent2"/>
+          </a:effectRef>
+          <a:fontRef idx="minor">
+            <a:schemeClr val="lt1"/>
+          </a:fontRef>
+        </p:style>
+        <p:txBody>
+          <a:bodyPr rtlCol="0" anchor="ctr"/>
+          <a:lstStyle/>
+          <a:p>
+            <a:pPr algn="ctr"/>
+            <a:r>
+              <a:rPr lang="en-IN" dirty="0"/>
+              <a:t>LOCATION / MAP</a:t>
+            </a:r>
+          </a:p>
+        </p:txBody>
+      </p:sp>
+      <p:sp>
+        <p:nvSpPr>
+          <p:cNvPr id="13" name="Arrow: Down 12">
+            <a:extLst>
+              <a:ext uri="{FF2B5EF4-FFF2-40B4-BE49-F238E27FC236}">
+                <a16:creationId xmlns:a16="http://schemas.microsoft.com/office/drawing/2014/main" id="{696C1DD2-873C-F3F7-9A7B-28864274E8DB}"/>
+              </a:ext>
+            </a:extLst>
+          </p:cNvPr>
+          <p:cNvSpPr/>
+          <p:nvPr/>
+        </p:nvSpPr>
+        <p:spPr>
+          <a:xfrm>
+            <a:off x="9886335" y="2139781"/>
+            <a:ext cx="314632" cy="796413"/>
+          </a:xfrm>
+          <a:prstGeom prst="downArrow">
+            <a:avLst/>
+          </a:prstGeom>
+        </p:spPr>
+        <p:style>
+          <a:lnRef idx="2">
+            <a:schemeClr val="accent1">
+              <a:shade val="15000"/>
+            </a:schemeClr>
+          </a:lnRef>
+          <a:fillRef idx="1">
+            <a:schemeClr val="accent1"/>
+          </a:fillRef>
+          <a:effectRef idx="0">
+            <a:schemeClr val="accent1"/>
+          </a:effectRef>
+          <a:fontRef idx="minor">
+            <a:schemeClr val="lt1"/>
+          </a:fontRef>
+        </p:style>
+        <p:txBody>
+          <a:bodyPr rtlCol="0" anchor="ctr"/>
+          <a:lstStyle/>
+          <a:p>
+            <a:pPr algn="ctr"/>
+            <a:endParaRPr lang="en-IN"/>
+          </a:p>
+        </p:txBody>
+      </p:sp>
+      <p:sp>
+        <p:nvSpPr>
+          <p:cNvPr id="15" name="Arrow: Down 14">
+            <a:extLst>
+              <a:ext uri="{FF2B5EF4-FFF2-40B4-BE49-F238E27FC236}">
+                <a16:creationId xmlns:a16="http://schemas.microsoft.com/office/drawing/2014/main" id="{4B6D6AEB-0C41-5429-827C-85BA15069F58}"/>
+              </a:ext>
+            </a:extLst>
+          </p:cNvPr>
+          <p:cNvSpPr/>
+          <p:nvPr/>
+        </p:nvSpPr>
+        <p:spPr>
+          <a:xfrm>
+            <a:off x="9861754" y="4364305"/>
+            <a:ext cx="314632" cy="796413"/>
+          </a:xfrm>
+          <a:prstGeom prst="downArrow">
+            <a:avLst/>
+          </a:prstGeom>
+        </p:spPr>
+        <p:style>
+          <a:lnRef idx="2">
+            <a:schemeClr val="accent1">
+              <a:shade val="15000"/>
+            </a:schemeClr>
+          </a:lnRef>
+          <a:fillRef idx="1">
+            <a:schemeClr val="accent1"/>
+          </a:fillRef>
+          <a:effectRef idx="0">
+            <a:schemeClr val="accent1"/>
+          </a:effectRef>
+          <a:fontRef idx="minor">
+            <a:schemeClr val="lt1"/>
+          </a:fontRef>
+        </p:style>
+        <p:txBody>
+          <a:bodyPr rtlCol="0" anchor="ctr"/>
+          <a:lstStyle/>
+          <a:p>
+            <a:pPr algn="ctr"/>
+            <a:endParaRPr lang="en-IN"/>
+          </a:p>
+        </p:txBody>
+      </p:sp>
+    </p:spTree>
+    <p:extLst>
+      <p:ext uri="{BB962C8B-B14F-4D97-AF65-F5344CB8AC3E}">
+        <p14:creationId xmlns:p14="http://schemas.microsoft.com/office/powerpoint/2010/main" val="1117982374"/>
       </p:ext>
     </p:extLst>
   </p:cSld>
@@ -4941,7 +6882,7 @@
         <p:spPr>
           <a:xfrm>
             <a:off x="747252" y="585398"/>
-            <a:ext cx="8691716" cy="3277820"/>
+            <a:ext cx="11444748" cy="6340197"/>
           </a:xfrm>
           <a:prstGeom prst="rect">
             <a:avLst/>
@@ -4955,117 +6896,216 @@
           <a:lstStyle/>
           <a:p>
             <a:r>
-              <a:rPr lang="en-IN" sz="2300" dirty="0">
+              <a:rPr lang="en-IN" sz="2000" dirty="0">
                 <a:latin typeface="Times New Roman" panose="02020603050405020304" pitchFamily="18" charset="0"/>
                 <a:cs typeface="Times New Roman" panose="02020603050405020304" pitchFamily="18" charset="0"/>
               </a:rPr>
               <a:t>We are currently studying existing research related to women’s safety.</a:t>
             </a:r>
             <a:br>
-              <a:rPr lang="en-IN" sz="2300" dirty="0">
+              <a:rPr lang="en-IN" sz="2000" dirty="0">
                 <a:latin typeface="Times New Roman" panose="02020603050405020304" pitchFamily="18" charset="0"/>
                 <a:cs typeface="Times New Roman" panose="02020603050405020304" pitchFamily="18" charset="0"/>
               </a:rPr>
             </a:br>
             <a:r>
-              <a:rPr lang="en-IN" sz="2300" dirty="0">
+              <a:rPr lang="en-IN" sz="2000" dirty="0">
                 <a:latin typeface="Times New Roman" panose="02020603050405020304" pitchFamily="18" charset="0"/>
                 <a:cs typeface="Times New Roman" panose="02020603050405020304" pitchFamily="18" charset="0"/>
               </a:rPr>
               <a:t>• Previous studies use social-media data for sentiment analysis.</a:t>
             </a:r>
             <a:br>
-              <a:rPr lang="en-IN" sz="2300" dirty="0">
+              <a:rPr lang="en-IN" sz="2000" dirty="0">
                 <a:latin typeface="Times New Roman" panose="02020603050405020304" pitchFamily="18" charset="0"/>
                 <a:cs typeface="Times New Roman" panose="02020603050405020304" pitchFamily="18" charset="0"/>
               </a:rPr>
             </a:br>
             <a:r>
-              <a:rPr lang="en-IN" sz="2300" dirty="0">
+              <a:rPr lang="en-IN" sz="2000" dirty="0">
                 <a:latin typeface="Times New Roman" panose="02020603050405020304" pitchFamily="18" charset="0"/>
                 <a:cs typeface="Times New Roman" panose="02020603050405020304" pitchFamily="18" charset="0"/>
               </a:rPr>
               <a:t>• NLP techniques are commonly used for processing social-media text.</a:t>
             </a:r>
             <a:br>
-              <a:rPr lang="en-IN" sz="2300" dirty="0">
+              <a:rPr lang="en-IN" sz="2000" dirty="0">
                 <a:latin typeface="Times New Roman" panose="02020603050405020304" pitchFamily="18" charset="0"/>
                 <a:cs typeface="Times New Roman" panose="02020603050405020304" pitchFamily="18" charset="0"/>
               </a:rPr>
             </a:br>
             <a:r>
-              <a:rPr lang="en-IN" sz="2300" dirty="0">
+              <a:rPr lang="en-IN" sz="2000" dirty="0">
                 <a:latin typeface="Times New Roman" panose="02020603050405020304" pitchFamily="18" charset="0"/>
                 <a:cs typeface="Times New Roman" panose="02020603050405020304" pitchFamily="18" charset="0"/>
               </a:rPr>
               <a:t>• Machine-learning methods are used for text classification.</a:t>
             </a:r>
             <a:br>
-              <a:rPr lang="en-IN" sz="2300" dirty="0">
+              <a:rPr lang="en-IN" sz="2000" dirty="0">
                 <a:latin typeface="Times New Roman" panose="02020603050405020304" pitchFamily="18" charset="0"/>
                 <a:cs typeface="Times New Roman" panose="02020603050405020304" pitchFamily="18" charset="0"/>
               </a:rPr>
             </a:br>
             <a:r>
-              <a:rPr lang="en-IN" sz="2300" dirty="0">
+              <a:rPr lang="en-IN" sz="2000" dirty="0">
                 <a:latin typeface="Times New Roman" panose="02020603050405020304" pitchFamily="18" charset="0"/>
                 <a:cs typeface="Times New Roman" panose="02020603050405020304" pitchFamily="18" charset="0"/>
               </a:rPr>
               <a:t>• Some studies </a:t>
             </a:r>
             <a:r>
-              <a:rPr lang="en-IN" sz="2300" dirty="0" err="1">
+              <a:rPr lang="en-IN" sz="2000" dirty="0" err="1">
                 <a:latin typeface="Times New Roman" panose="02020603050405020304" pitchFamily="18" charset="0"/>
                 <a:cs typeface="Times New Roman" panose="02020603050405020304" pitchFamily="18" charset="0"/>
               </a:rPr>
               <a:t>analyze</a:t>
             </a:r>
             <a:r>
-              <a:rPr lang="en-IN" sz="2300" dirty="0">
+              <a:rPr lang="en-IN" sz="2000" dirty="0">
                 <a:latin typeface="Times New Roman" panose="02020603050405020304" pitchFamily="18" charset="0"/>
                 <a:cs typeface="Times New Roman" panose="02020603050405020304" pitchFamily="18" charset="0"/>
               </a:rPr>
               <a:t> safety concerns based on location or incident type.</a:t>
             </a:r>
             <a:br>
-              <a:rPr lang="en-IN" sz="2300" dirty="0">
+              <a:rPr lang="en-IN" sz="2000" dirty="0">
                 <a:latin typeface="Times New Roman" panose="02020603050405020304" pitchFamily="18" charset="0"/>
                 <a:cs typeface="Times New Roman" panose="02020603050405020304" pitchFamily="18" charset="0"/>
               </a:rPr>
             </a:br>
             <a:r>
-              <a:rPr lang="en-IN" sz="2300" dirty="0">
+              <a:rPr lang="en-IN" sz="2000" dirty="0">
                 <a:latin typeface="Times New Roman" panose="02020603050405020304" pitchFamily="18" charset="0"/>
                 <a:cs typeface="Times New Roman" panose="02020603050405020304" pitchFamily="18" charset="0"/>
               </a:rPr>
               <a:t>• Research also explores visualization of social-media analysis results.</a:t>
             </a:r>
             <a:br>
-              <a:rPr lang="en-IN" sz="2300" dirty="0">
+              <a:rPr lang="en-IN" sz="2000" dirty="0">
                 <a:latin typeface="Times New Roman" panose="02020603050405020304" pitchFamily="18" charset="0"/>
                 <a:cs typeface="Times New Roman" panose="02020603050405020304" pitchFamily="18" charset="0"/>
               </a:rPr>
             </a:br>
             <a:r>
-              <a:rPr lang="en-IN" sz="2300" dirty="0">
+              <a:rPr lang="en-IN" sz="2000" dirty="0">
                 <a:latin typeface="Times New Roman" panose="02020603050405020304" pitchFamily="18" charset="0"/>
                 <a:cs typeface="Times New Roman" panose="02020603050405020304" pitchFamily="18" charset="0"/>
               </a:rPr>
               <a:t>• These studies help us understand suitable methods for our project.</a:t>
             </a:r>
             <a:br>
-              <a:rPr lang="en-IN" sz="2300" dirty="0">
+              <a:rPr lang="en-IN" sz="2000" dirty="0">
                 <a:latin typeface="Times New Roman" panose="02020603050405020304" pitchFamily="18" charset="0"/>
                 <a:cs typeface="Times New Roman" panose="02020603050405020304" pitchFamily="18" charset="0"/>
               </a:rPr>
             </a:br>
             <a:r>
-              <a:rPr lang="en-IN" sz="2300" dirty="0">
+              <a:rPr lang="en-IN" sz="2000" dirty="0">
                 <a:latin typeface="Times New Roman" panose="02020603050405020304" pitchFamily="18" charset="0"/>
                 <a:cs typeface="Times New Roman" panose="02020603050405020304" pitchFamily="18" charset="0"/>
               </a:rPr>
               <a:t>• The literature survey will help us finalize our project methodology.</a:t>
             </a:r>
+            <a:endParaRPr lang="en-IN" sz="2000" b="1" u="sng" dirty="0">
+              <a:solidFill>
+                <a:schemeClr val="accent6">
+                  <a:lumMod val="75000"/>
+                </a:schemeClr>
+              </a:solidFill>
+              <a:latin typeface="Times New Roman" panose="02020603050405020304" pitchFamily="18" charset="0"/>
+              <a:cs typeface="Times New Roman" panose="02020603050405020304" pitchFamily="18" charset="0"/>
+            </a:endParaRPr>
+          </a:p>
+          <a:p>
+            <a:endParaRPr lang="en-IN" sz="2000" b="1" u="sng" dirty="0">
+              <a:solidFill>
+                <a:schemeClr val="accent6">
+                  <a:lumMod val="75000"/>
+                </a:schemeClr>
+              </a:solidFill>
+              <a:latin typeface="Times New Roman" panose="02020603050405020304" pitchFamily="18" charset="0"/>
+              <a:cs typeface="Times New Roman" panose="02020603050405020304" pitchFamily="18" charset="0"/>
+            </a:endParaRPr>
+          </a:p>
+          <a:p>
+            <a:r>
+              <a:rPr lang="en-IN" sz="2000" b="1" u="sng" dirty="0">
+                <a:solidFill>
+                  <a:schemeClr val="accent6">
+                    <a:lumMod val="75000"/>
+                  </a:schemeClr>
+                </a:solidFill>
+                <a:latin typeface="Times New Roman" panose="02020603050405020304" pitchFamily="18" charset="0"/>
+                <a:cs typeface="Times New Roman" panose="02020603050405020304" pitchFamily="18" charset="0"/>
+              </a:rPr>
+              <a:t>AUTHORS:- </a:t>
+            </a:r>
+          </a:p>
+          <a:p>
+            <a:endParaRPr lang="en-IN" sz="2300" b="1" u="sng" dirty="0">
+              <a:solidFill>
+                <a:schemeClr val="accent6">
+                  <a:lumMod val="75000"/>
+                </a:schemeClr>
+              </a:solidFill>
+              <a:latin typeface="Times New Roman" panose="02020603050405020304" pitchFamily="18" charset="0"/>
+              <a:cs typeface="Times New Roman" panose="02020603050405020304" pitchFamily="18" charset="0"/>
+            </a:endParaRPr>
+          </a:p>
+          <a:p>
+            <a:pPr marL="342900" indent="-342900">
+              <a:buAutoNum type="arabicPeriod"/>
+            </a:pPr>
+            <a:r>
+              <a:rPr lang="en-IN" sz="2000" b="1" dirty="0">
+                <a:latin typeface="Times New Roman" panose="02020603050405020304" pitchFamily="18" charset="0"/>
+                <a:cs typeface="Times New Roman" panose="02020603050405020304" pitchFamily="18" charset="0"/>
+              </a:rPr>
+              <a:t>Sanjay Kumar et al. (2021)</a:t>
+            </a:r>
+            <a:br>
+              <a:rPr lang="en-IN" sz="2000" b="1" dirty="0">
+                <a:latin typeface="Times New Roman" panose="02020603050405020304" pitchFamily="18" charset="0"/>
+                <a:cs typeface="Times New Roman" panose="02020603050405020304" pitchFamily="18" charset="0"/>
+              </a:rPr>
+            </a:br>
+            <a:r>
+              <a:rPr lang="en-IN" sz="2000" i="1" dirty="0">
+                <a:latin typeface="Times New Roman" panose="02020603050405020304" pitchFamily="18" charset="0"/>
+                <a:cs typeface="Times New Roman" panose="02020603050405020304" pitchFamily="18" charset="0"/>
+              </a:rPr>
+              <a:t>Research: Empowering Women Safety: Innovative App Leveraging Machine Learning and Flutter for Emergency</a:t>
+            </a:r>
+            <a:br>
+              <a:rPr lang="en-IN" sz="2000" dirty="0">
+                <a:latin typeface="Times New Roman" panose="02020603050405020304" pitchFamily="18" charset="0"/>
+                <a:cs typeface="Times New Roman" panose="02020603050405020304" pitchFamily="18" charset="0"/>
+              </a:rPr>
+            </a:br>
+            <a:r>
+              <a:rPr lang="en-IN" sz="2000" dirty="0">
+                <a:latin typeface="Times New Roman" panose="02020603050405020304" pitchFamily="18" charset="0"/>
+                <a:cs typeface="Times New Roman" panose="02020603050405020304" pitchFamily="18" charset="0"/>
+              </a:rPr>
+              <a:t>They proposed a mobile-based women's safety application using Machine Learning and Flutter. The system focuses on emergency assistance, live location sharing, emergency contacts and crime-related prediction. This work shows how ML and mobile technology can provide quick assistance during dangerous situations</a:t>
+            </a:r>
+            <a:r>
+              <a:rPr lang="en-IN" sz="2000" dirty="0"/>
+              <a:t>.</a:t>
+            </a:r>
+          </a:p>
+          <a:p>
+            <a:pPr marL="342900" indent="-342900">
+              <a:buAutoNum type="arabicPeriod"/>
+            </a:pPr>
+            <a:endParaRPr lang="en-IN" sz="2000" dirty="0"/>
+          </a:p>
+          <a:p>
+            <a:endParaRPr lang="en-IN" sz="2300" dirty="0">
+              <a:latin typeface="Times New Roman" panose="02020603050405020304" pitchFamily="18" charset="0"/>
+              <a:cs typeface="Times New Roman" panose="02020603050405020304" pitchFamily="18" charset="0"/>
+            </a:endParaRPr>
           </a:p>
         </p:txBody>
       </p:sp>
@@ -5145,7 +7185,7 @@
           <p:cNvPr id="3" name="TextBox 2">
             <a:extLst>
               <a:ext uri="{FF2B5EF4-FFF2-40B4-BE49-F238E27FC236}">
-                <a16:creationId xmlns:a16="http://schemas.microsoft.com/office/drawing/2014/main" id="{55B0F6D4-31D6-38EA-33D4-DA2B12E21675}"/>
+                <a16:creationId xmlns:a16="http://schemas.microsoft.com/office/drawing/2014/main" id="{C90C84EC-FDE0-7AE6-363E-A28DC9A275B2}"/>
               </a:ext>
             </a:extLst>
           </p:cNvPr>
@@ -5154,8 +7194,8 @@
         </p:nvSpPr>
         <p:spPr>
           <a:xfrm>
-            <a:off x="3274142" y="6581001"/>
-            <a:ext cx="6096000" cy="276999"/>
+            <a:off x="344129" y="457481"/>
+            <a:ext cx="11031794" cy="6217087"/>
           </a:xfrm>
           <a:prstGeom prst="rect">
             <a:avLst/>
@@ -5169,225 +7209,145 @@
           <a:lstStyle/>
           <a:p>
             <a:r>
-              <a:rPr lang="en-IN" sz="1200" dirty="0">
-                <a:solidFill>
-                  <a:schemeClr val="accent5">
-                    <a:lumMod val="75000"/>
-                  </a:schemeClr>
-                </a:solidFill>
-              </a:rPr>
-              <a:t>KL University | Department of Computer Science and Engineering  | Academic Year 2026–27</a:t>
-            </a:r>
-          </a:p>
-        </p:txBody>
-      </p:sp>
-      <p:sp>
-        <p:nvSpPr>
-          <p:cNvPr id="7" name="TextBox 6">
-            <a:extLst>
-              <a:ext uri="{FF2B5EF4-FFF2-40B4-BE49-F238E27FC236}">
-                <a16:creationId xmlns:a16="http://schemas.microsoft.com/office/drawing/2014/main" id="{7727D33F-463A-B844-7B83-A1C633423ED2}"/>
-              </a:ext>
-            </a:extLst>
-          </p:cNvPr>
-          <p:cNvSpPr txBox="1"/>
-          <p:nvPr/>
-        </p:nvSpPr>
-        <p:spPr>
-          <a:xfrm>
-            <a:off x="698090" y="1193881"/>
-            <a:ext cx="8672051" cy="2923877"/>
-          </a:xfrm>
-          <a:prstGeom prst="rect">
-            <a:avLst/>
-          </a:prstGeom>
-          <a:noFill/>
-        </p:spPr>
-        <p:txBody>
-          <a:bodyPr wrap="square">
-            <a:spAutoFit/>
-          </a:bodyPr>
-          <a:lstStyle/>
-          <a:p>
-            <a:pPr lvl="0"/>
+              <a:rPr lang="en-IN" sz="2000" b="1" dirty="0">
+                <a:latin typeface="Times New Roman" panose="02020603050405020304" pitchFamily="18" charset="0"/>
+                <a:cs typeface="Times New Roman" panose="02020603050405020304" pitchFamily="18" charset="0"/>
+              </a:rPr>
+              <a:t>3. S. Gokulakrishnan et al. (2022)</a:t>
+            </a:r>
+            <a:br>
+              <a:rPr lang="en-IN" sz="2000" b="1" dirty="0">
+                <a:latin typeface="Times New Roman" panose="02020603050405020304" pitchFamily="18" charset="0"/>
+                <a:cs typeface="Times New Roman" panose="02020603050405020304" pitchFamily="18" charset="0"/>
+              </a:rPr>
+            </a:br>
+            <a:r>
+              <a:rPr lang="en-IN" sz="2000" i="1" dirty="0">
+                <a:latin typeface="Times New Roman" panose="02020603050405020304" pitchFamily="18" charset="0"/>
+                <a:cs typeface="Times New Roman" panose="02020603050405020304" pitchFamily="18" charset="0"/>
+              </a:rPr>
+              <a:t>Research: Machine Learning of Twitter Feeds and Women Safety in Indian Cities</a:t>
+            </a:r>
+            <a:br>
+              <a:rPr lang="en-IN" sz="2000" dirty="0">
+                <a:latin typeface="Times New Roman" panose="02020603050405020304" pitchFamily="18" charset="0"/>
+                <a:cs typeface="Times New Roman" panose="02020603050405020304" pitchFamily="18" charset="0"/>
+              </a:rPr>
+            </a:br>
+            <a:r>
+              <a:rPr lang="en-IN" sz="2000" dirty="0">
+                <a:latin typeface="Times New Roman" panose="02020603050405020304" pitchFamily="18" charset="0"/>
+                <a:cs typeface="Times New Roman" panose="02020603050405020304" pitchFamily="18" charset="0"/>
+              </a:rPr>
+              <a:t>The researchers used Machine Learning and Twitter/social-media data to study women's safety in Indian cities. Social-media information can help identify safety-related incidents, harassment and public concerns. This approach demonstrates how ML can analyse large amounts of online data for safety applications</a:t>
+            </a:r>
             <a:r>
               <a:rPr lang="en-IN" sz="2000" dirty="0"/>
-              <a:t>• </a:t>
-            </a:r>
-            <a:r>
-              <a:rPr lang="en-IN" sz="2300" dirty="0">
-                <a:latin typeface="Times New Roman" panose="02020603050405020304" pitchFamily="18" charset="0"/>
-                <a:cs typeface="Times New Roman" panose="02020603050405020304" pitchFamily="18" charset="0"/>
-              </a:rPr>
-              <a:t>Collect relevant social-media data related to women’s safety.</a:t>
+              <a:t>.</a:t>
+            </a:r>
+          </a:p>
+          <a:p>
+            <a:endParaRPr lang="en-IN" sz="2000" dirty="0"/>
+          </a:p>
+          <a:p>
+            <a:r>
+              <a:rPr lang="en-IN" sz="2000" b="1" dirty="0">
+                <a:latin typeface="Times New Roman" panose="02020603050405020304" pitchFamily="18" charset="0"/>
+                <a:cs typeface="Times New Roman" panose="02020603050405020304" pitchFamily="18" charset="0"/>
+              </a:rPr>
+              <a:t>4. Ameelia Roseline </a:t>
+            </a:r>
+            <a:r>
+              <a:rPr lang="en-IN" sz="2000" b="1" dirty="0" err="1">
+                <a:latin typeface="Times New Roman" panose="02020603050405020304" pitchFamily="18" charset="0"/>
+                <a:cs typeface="Times New Roman" panose="02020603050405020304" pitchFamily="18" charset="0"/>
+              </a:rPr>
+              <a:t>Arundhuswamy</a:t>
+            </a:r>
+            <a:r>
+              <a:rPr lang="en-IN" sz="2000" b="1" dirty="0">
+                <a:latin typeface="Times New Roman" panose="02020603050405020304" pitchFamily="18" charset="0"/>
+                <a:cs typeface="Times New Roman" panose="02020603050405020304" pitchFamily="18" charset="0"/>
+              </a:rPr>
+              <a:t> et al. (2023)</a:t>
             </a:r>
             <a:br>
-              <a:rPr lang="en-IN" sz="2300" dirty="0">
+              <a:rPr lang="en-IN" sz="2000" dirty="0">
                 <a:latin typeface="Times New Roman" panose="02020603050405020304" pitchFamily="18" charset="0"/>
                 <a:cs typeface="Times New Roman" panose="02020603050405020304" pitchFamily="18" charset="0"/>
               </a:rPr>
             </a:br>
             <a:r>
-              <a:rPr lang="en-IN" sz="2300" dirty="0">
-                <a:latin typeface="Times New Roman" panose="02020603050405020304" pitchFamily="18" charset="0"/>
-                <a:cs typeface="Times New Roman" panose="02020603050405020304" pitchFamily="18" charset="0"/>
-              </a:rPr>
-              <a:t>• Clean and preprocess the collected text.</a:t>
+              <a:rPr lang="en-IN" sz="2000" i="1" dirty="0">
+                <a:latin typeface="Times New Roman" panose="02020603050405020304" pitchFamily="18" charset="0"/>
+                <a:cs typeface="Times New Roman" panose="02020603050405020304" pitchFamily="18" charset="0"/>
+              </a:rPr>
+              <a:t>Research: GIZMO COP – An Intelligent Security Device for Women Safety with Machine Learning</a:t>
             </a:r>
             <a:br>
-              <a:rPr lang="en-IN" sz="2300" dirty="0">
+              <a:rPr lang="en-IN" sz="2000" dirty="0">
                 <a:latin typeface="Times New Roman" panose="02020603050405020304" pitchFamily="18" charset="0"/>
                 <a:cs typeface="Times New Roman" panose="02020603050405020304" pitchFamily="18" charset="0"/>
               </a:rPr>
             </a:br>
             <a:r>
-              <a:rPr lang="en-IN" sz="2300" dirty="0">
-                <a:latin typeface="Times New Roman" panose="02020603050405020304" pitchFamily="18" charset="0"/>
-                <a:cs typeface="Times New Roman" panose="02020603050405020304" pitchFamily="18" charset="0"/>
-              </a:rPr>
-              <a:t>• </a:t>
-            </a:r>
-            <a:r>
-              <a:rPr lang="en-IN" sz="2300" dirty="0" err="1">
-                <a:latin typeface="Times New Roman" panose="02020603050405020304" pitchFamily="18" charset="0"/>
-                <a:cs typeface="Times New Roman" panose="02020603050405020304" pitchFamily="18" charset="0"/>
-              </a:rPr>
-              <a:t>Analyze</a:t>
-            </a:r>
-            <a:r>
-              <a:rPr lang="en-IN" sz="2300" dirty="0">
-                <a:latin typeface="Times New Roman" panose="02020603050405020304" pitchFamily="18" charset="0"/>
-                <a:cs typeface="Times New Roman" panose="02020603050405020304" pitchFamily="18" charset="0"/>
-              </a:rPr>
-              <a:t> the sentiment of the posts using NLP techniques.</a:t>
+              <a:rPr lang="en-IN" sz="2000" dirty="0">
+                <a:latin typeface="Times New Roman" panose="02020603050405020304" pitchFamily="18" charset="0"/>
+                <a:cs typeface="Times New Roman" panose="02020603050405020304" pitchFamily="18" charset="0"/>
+              </a:rPr>
+              <a:t>The researchers developed an intelligent safety device using Machine Learning. The proposed system includes technologies such as GPS/GSM, panic-button functionality and physiological sensors. It demonstrates how wearable and intelligent devices can automatically assist women during emergency situations.</a:t>
+            </a:r>
+          </a:p>
+          <a:p>
+            <a:endParaRPr lang="en-IN" sz="2000" dirty="0">
+              <a:latin typeface="Times New Roman" panose="02020603050405020304" pitchFamily="18" charset="0"/>
+              <a:cs typeface="Times New Roman" panose="02020603050405020304" pitchFamily="18" charset="0"/>
+            </a:endParaRPr>
+          </a:p>
+          <a:p>
+            <a:r>
+              <a:rPr lang="en-IN" sz="2000" b="1" dirty="0">
+                <a:latin typeface="Times New Roman" panose="02020603050405020304" pitchFamily="18" charset="0"/>
+                <a:cs typeface="Times New Roman" panose="02020603050405020304" pitchFamily="18" charset="0"/>
+              </a:rPr>
+              <a:t>5. Farha Parveen et al. (2023)</a:t>
             </a:r>
             <a:br>
-              <a:rPr lang="en-IN" sz="2300" dirty="0">
+              <a:rPr lang="en-IN" sz="2000" b="1" dirty="0">
                 <a:latin typeface="Times New Roman" panose="02020603050405020304" pitchFamily="18" charset="0"/>
                 <a:cs typeface="Times New Roman" panose="02020603050405020304" pitchFamily="18" charset="0"/>
               </a:rPr>
             </a:br>
             <a:r>
-              <a:rPr lang="en-IN" sz="2300" dirty="0">
-                <a:latin typeface="Times New Roman" panose="02020603050405020304" pitchFamily="18" charset="0"/>
-                <a:cs typeface="Times New Roman" panose="02020603050405020304" pitchFamily="18" charset="0"/>
-              </a:rPr>
-              <a:t>• Classify posts based on the type of safety-related incident.</a:t>
+              <a:rPr lang="en-IN" sz="2000" i="1" dirty="0">
+                <a:latin typeface="Times New Roman" panose="02020603050405020304" pitchFamily="18" charset="0"/>
+                <a:cs typeface="Times New Roman" panose="02020603050405020304" pitchFamily="18" charset="0"/>
+              </a:rPr>
+              <a:t>Research: Analysis of Women Safety in Public Places Using Machine Learning on Tweets</a:t>
             </a:r>
             <a:br>
-              <a:rPr lang="en-IN" sz="2300" dirty="0">
+              <a:rPr lang="en-IN" sz="2000" dirty="0">
                 <a:latin typeface="Times New Roman" panose="02020603050405020304" pitchFamily="18" charset="0"/>
                 <a:cs typeface="Times New Roman" panose="02020603050405020304" pitchFamily="18" charset="0"/>
               </a:rPr>
             </a:br>
             <a:r>
-              <a:rPr lang="en-IN" sz="2300" dirty="0">
-                <a:latin typeface="Times New Roman" panose="02020603050405020304" pitchFamily="18" charset="0"/>
-                <a:cs typeface="Times New Roman" panose="02020603050405020304" pitchFamily="18" charset="0"/>
-              </a:rPr>
-              <a:t>• Study patterns based on time and available location information.</a:t>
-            </a:r>
-            <a:br>
-              <a:rPr lang="en-IN" sz="2300" dirty="0">
-                <a:latin typeface="Times New Roman" panose="02020603050405020304" pitchFamily="18" charset="0"/>
-                <a:cs typeface="Times New Roman" panose="02020603050405020304" pitchFamily="18" charset="0"/>
-              </a:rPr>
-            </a:br>
-            <a:r>
-              <a:rPr lang="en-IN" sz="2300" dirty="0">
-                <a:latin typeface="Times New Roman" panose="02020603050405020304" pitchFamily="18" charset="0"/>
-                <a:cs typeface="Times New Roman" panose="02020603050405020304" pitchFamily="18" charset="0"/>
-              </a:rPr>
-              <a:t>• Present the </a:t>
-            </a:r>
-            <a:r>
-              <a:rPr lang="en-IN" sz="2300" dirty="0" err="1">
-                <a:latin typeface="Times New Roman" panose="02020603050405020304" pitchFamily="18" charset="0"/>
-                <a:cs typeface="Times New Roman" panose="02020603050405020304" pitchFamily="18" charset="0"/>
-              </a:rPr>
-              <a:t>analyzed</a:t>
-            </a:r>
-            <a:r>
-              <a:rPr lang="en-IN" sz="2300" dirty="0">
-                <a:latin typeface="Times New Roman" panose="02020603050405020304" pitchFamily="18" charset="0"/>
-                <a:cs typeface="Times New Roman" panose="02020603050405020304" pitchFamily="18" charset="0"/>
-              </a:rPr>
-              <a:t> information through a simple dashboard.</a:t>
-            </a:r>
-            <a:br>
-              <a:rPr lang="en-IN" sz="2300" dirty="0">
-                <a:latin typeface="Times New Roman" panose="02020603050405020304" pitchFamily="18" charset="0"/>
-                <a:cs typeface="Times New Roman" panose="02020603050405020304" pitchFamily="18" charset="0"/>
-              </a:rPr>
-            </a:br>
-            <a:r>
-              <a:rPr lang="en-IN" sz="2300" dirty="0">
-                <a:latin typeface="Times New Roman" panose="02020603050405020304" pitchFamily="18" charset="0"/>
-                <a:cs typeface="Times New Roman" panose="02020603050405020304" pitchFamily="18" charset="0"/>
-              </a:rPr>
-              <a:t>• Explore potential risk-zone visualization based on available data.</a:t>
-            </a:r>
-            <a:br>
-              <a:rPr lang="en-IN" sz="2300" dirty="0">
-                <a:latin typeface="Times New Roman" panose="02020603050405020304" pitchFamily="18" charset="0"/>
-                <a:cs typeface="Times New Roman" panose="02020603050405020304" pitchFamily="18" charset="0"/>
-              </a:rPr>
-            </a:br>
-            <a:r>
-              <a:rPr lang="en-IN" sz="2300" dirty="0">
-                <a:latin typeface="Times New Roman" panose="02020603050405020304" pitchFamily="18" charset="0"/>
-                <a:cs typeface="Times New Roman" panose="02020603050405020304" pitchFamily="18" charset="0"/>
-              </a:rPr>
-              <a:t>• Study the possibility of adding an IoT-based SOS wearable.</a:t>
-            </a:r>
-          </a:p>
-        </p:txBody>
-      </p:sp>
-      <p:sp>
-        <p:nvSpPr>
-          <p:cNvPr id="4" name="TextBox 3">
-            <a:extLst>
-              <a:ext uri="{FF2B5EF4-FFF2-40B4-BE49-F238E27FC236}">
-                <a16:creationId xmlns:a16="http://schemas.microsoft.com/office/drawing/2014/main" id="{2CA8C1DD-F97A-C66C-EDD7-4CB0E19777DB}"/>
-              </a:ext>
-            </a:extLst>
-          </p:cNvPr>
-          <p:cNvSpPr txBox="1"/>
-          <p:nvPr/>
-        </p:nvSpPr>
-        <p:spPr>
-          <a:xfrm>
-            <a:off x="408039" y="166843"/>
-            <a:ext cx="6096000" cy="477054"/>
-          </a:xfrm>
-          <a:prstGeom prst="rect">
-            <a:avLst/>
-          </a:prstGeom>
-          <a:noFill/>
-        </p:spPr>
-        <p:txBody>
-          <a:bodyPr wrap="square">
-            <a:spAutoFit/>
-          </a:bodyPr>
-          <a:lstStyle/>
-          <a:p>
-            <a:r>
-              <a:rPr lang="en-IN" sz="2500" b="1" dirty="0">
-                <a:solidFill>
-                  <a:schemeClr val="accent1"/>
-                </a:solidFill>
-                <a:latin typeface="Times New Roman" panose="02020603050405020304" pitchFamily="18" charset="0"/>
-                <a:cs typeface="Times New Roman" panose="02020603050405020304" pitchFamily="18" charset="0"/>
-              </a:rPr>
-              <a:t>PROPOSED IDEA</a:t>
-            </a:r>
+              <a:rPr lang="en-IN" sz="2000" dirty="0">
+                <a:latin typeface="Times New Roman" panose="02020603050405020304" pitchFamily="18" charset="0"/>
+                <a:cs typeface="Times New Roman" panose="02020603050405020304" pitchFamily="18" charset="0"/>
+              </a:rPr>
+              <a:t>The researchers applied Machine Learning to Twitter data to analyse women's safety in public places. The system uses social-media information to understand safety concerns and public experiences. This research is useful for developing data-driven safety analysis systems.</a:t>
+            </a:r>
+          </a:p>
+          <a:p>
+            <a:endParaRPr lang="en-IN" dirty="0"/>
           </a:p>
         </p:txBody>
       </p:sp>
     </p:spTree>
     <p:extLst>
       <p:ext uri="{BB962C8B-B14F-4D97-AF65-F5344CB8AC3E}">
-        <p14:creationId xmlns:p14="http://schemas.microsoft.com/office/powerpoint/2010/main" val="1414042401"/>
+        <p14:creationId xmlns:p14="http://schemas.microsoft.com/office/powerpoint/2010/main" val="1802552178"/>
       </p:ext>
     </p:extLst>
   </p:cSld>
@@ -5416,10 +7376,10 @@
       </p:grpSpPr>
       <p:sp>
         <p:nvSpPr>
-          <p:cNvPr id="4" name="TextBox 3">
-            <a:extLst>
-              <a:ext uri="{FF2B5EF4-FFF2-40B4-BE49-F238E27FC236}">
-                <a16:creationId xmlns:a16="http://schemas.microsoft.com/office/drawing/2014/main" id="{34DDFEF5-3DB7-C616-B42C-9A15429EE7D5}"/>
+          <p:cNvPr id="3" name="TextBox 2">
+            <a:extLst>
+              <a:ext uri="{FF2B5EF4-FFF2-40B4-BE49-F238E27FC236}">
+                <a16:creationId xmlns:a16="http://schemas.microsoft.com/office/drawing/2014/main" id="{44253DDB-60C2-9C95-669C-2A1DE8CBE066}"/>
               </a:ext>
             </a:extLst>
           </p:cNvPr>
@@ -5428,8 +7388,8 @@
         </p:nvSpPr>
         <p:spPr>
           <a:xfrm>
-            <a:off x="294968" y="208624"/>
-            <a:ext cx="6096000" cy="492443"/>
+            <a:off x="324465" y="325801"/>
+            <a:ext cx="9920748" cy="6247864"/>
           </a:xfrm>
           <a:prstGeom prst="rect">
             <a:avLst/>
@@ -5443,387 +7403,161 @@
           <a:lstStyle/>
           <a:p>
             <a:r>
-              <a:rPr lang="en-IN" sz="2600" b="1" dirty="0">
-                <a:solidFill>
-                  <a:schemeClr val="accent1"/>
-                </a:solidFill>
-                <a:latin typeface="Times New Roman" panose="02020603050405020304" pitchFamily="18" charset="0"/>
-                <a:cs typeface="Times New Roman" panose="02020603050405020304" pitchFamily="18" charset="0"/>
-              </a:rPr>
-              <a:t>PROPOSED DASHBOARD PROCESS</a:t>
-            </a:r>
-          </a:p>
-        </p:txBody>
-      </p:sp>
-      <p:sp>
-        <p:nvSpPr>
-          <p:cNvPr id="9" name="TextBox 8">
-            <a:extLst>
-              <a:ext uri="{FF2B5EF4-FFF2-40B4-BE49-F238E27FC236}">
-                <a16:creationId xmlns:a16="http://schemas.microsoft.com/office/drawing/2014/main" id="{4EAA24E3-AF11-DDD5-2FAF-D46B8DF850C1}"/>
-              </a:ext>
-            </a:extLst>
-          </p:cNvPr>
-          <p:cNvSpPr txBox="1"/>
-          <p:nvPr/>
-        </p:nvSpPr>
-        <p:spPr>
-          <a:xfrm>
-            <a:off x="975852" y="701067"/>
-            <a:ext cx="10805651" cy="5632311"/>
-          </a:xfrm>
-          <a:prstGeom prst="rect">
-            <a:avLst/>
-          </a:prstGeom>
-        </p:spPr>
-        <p:style>
-          <a:lnRef idx="1">
-            <a:schemeClr val="accent4"/>
-          </a:lnRef>
-          <a:fillRef idx="2">
-            <a:schemeClr val="accent4"/>
-          </a:fillRef>
-          <a:effectRef idx="1">
-            <a:schemeClr val="accent4"/>
-          </a:effectRef>
-          <a:fontRef idx="minor">
-            <a:schemeClr val="dk1"/>
-          </a:fontRef>
-        </p:style>
-        <p:txBody>
-          <a:bodyPr wrap="square">
-            <a:spAutoFit/>
-          </a:bodyPr>
-          <a:lstStyle/>
-          <a:p>
-            <a:pPr>
-              <a:buNone/>
-            </a:pPr>
-            <a:r>
-              <a:rPr lang="en-IN" b="1" dirty="0">
-                <a:latin typeface="Lucida Bright" panose="02040602050505020304" pitchFamily="18" charset="0"/>
-              </a:rPr>
-              <a:t>DATA</a:t>
+              <a:rPr lang="en-IN" sz="2000" b="1" dirty="0">
+                <a:latin typeface="Times New Roman" panose="02020603050405020304" pitchFamily="18" charset="0"/>
+                <a:cs typeface="Times New Roman" panose="02020603050405020304" pitchFamily="18" charset="0"/>
+              </a:rPr>
+              <a:t>6. Mohd Naved et al. (2022)</a:t>
             </a:r>
             <a:br>
-              <a:rPr lang="en-IN" dirty="0"/>
+              <a:rPr lang="en-IN" sz="2000" b="1" dirty="0">
+                <a:latin typeface="Times New Roman" panose="02020603050405020304" pitchFamily="18" charset="0"/>
+                <a:cs typeface="Times New Roman" panose="02020603050405020304" pitchFamily="18" charset="0"/>
+              </a:rPr>
             </a:br>
             <a:r>
-              <a:rPr lang="en-IN" dirty="0">
-                <a:latin typeface="Times New Roman" panose="02020603050405020304" pitchFamily="18" charset="0"/>
-                <a:cs typeface="Times New Roman" panose="02020603050405020304" pitchFamily="18" charset="0"/>
-              </a:rPr>
-              <a:t>Collection of relevant social-media posts or a suitable dataset related to women’s safety.</a:t>
-            </a:r>
-          </a:p>
-          <a:p>
-            <a:pPr>
-              <a:buNone/>
-            </a:pPr>
-            <a:r>
-              <a:rPr lang="en-IN" dirty="0">
-                <a:latin typeface="Times New Roman" panose="02020603050405020304" pitchFamily="18" charset="0"/>
-                <a:cs typeface="Times New Roman" panose="02020603050405020304" pitchFamily="18" charset="0"/>
-              </a:rPr>
-              <a:t>         </a:t>
-            </a:r>
-            <a:r>
-              <a:rPr lang="en-IN" i="1" dirty="0">
-                <a:latin typeface="Times New Roman" panose="02020603050405020304" pitchFamily="18" charset="0"/>
-                <a:cs typeface="Times New Roman" panose="02020603050405020304" pitchFamily="18" charset="0"/>
-              </a:rPr>
-              <a:t>↓</a:t>
-            </a:r>
-          </a:p>
-          <a:p>
-            <a:pPr>
-              <a:buNone/>
-            </a:pPr>
-            <a:r>
-              <a:rPr lang="en-IN" b="1" dirty="0">
-                <a:latin typeface="Lucida Bright" panose="02040602050505020304" pitchFamily="18" charset="0"/>
-                <a:cs typeface="Times New Roman" panose="02020603050405020304" pitchFamily="18" charset="0"/>
-              </a:rPr>
-              <a:t>DATA CLEANING</a:t>
+              <a:rPr lang="en-IN" sz="2000" i="1" dirty="0">
+                <a:latin typeface="Times New Roman" panose="02020603050405020304" pitchFamily="18" charset="0"/>
+                <a:cs typeface="Times New Roman" panose="02020603050405020304" pitchFamily="18" charset="0"/>
+              </a:rPr>
+              <a:t>Research: Artificial Intelligence Based Women Security and Safety Measure System</a:t>
             </a:r>
             <a:br>
-              <a:rPr lang="en-IN" dirty="0">
+              <a:rPr lang="en-IN" sz="2000" dirty="0">
                 <a:latin typeface="Times New Roman" panose="02020603050405020304" pitchFamily="18" charset="0"/>
                 <a:cs typeface="Times New Roman" panose="02020603050405020304" pitchFamily="18" charset="0"/>
               </a:rPr>
             </a:br>
             <a:r>
-              <a:rPr lang="en-IN" dirty="0">
-                <a:latin typeface="Times New Roman" panose="02020603050405020304" pitchFamily="18" charset="0"/>
-                <a:cs typeface="Times New Roman" panose="02020603050405020304" pitchFamily="18" charset="0"/>
-              </a:rPr>
-              <a:t>Remove unwanted characters, duplicate posts, links and unnecessary information from the data.</a:t>
-            </a:r>
-          </a:p>
-          <a:p>
-            <a:pPr>
-              <a:buNone/>
-            </a:pPr>
-            <a:r>
-              <a:rPr lang="en-IN" dirty="0">
-                <a:latin typeface="Times New Roman" panose="02020603050405020304" pitchFamily="18" charset="0"/>
-                <a:cs typeface="Times New Roman" panose="02020603050405020304" pitchFamily="18" charset="0"/>
-              </a:rPr>
-              <a:t>         </a:t>
-            </a:r>
-            <a:r>
-              <a:rPr lang="en-IN" i="1" dirty="0">
-                <a:latin typeface="Times New Roman" panose="02020603050405020304" pitchFamily="18" charset="0"/>
-                <a:cs typeface="Times New Roman" panose="02020603050405020304" pitchFamily="18" charset="0"/>
-              </a:rPr>
-              <a:t>↓</a:t>
-            </a:r>
-          </a:p>
-          <a:p>
-            <a:pPr>
-              <a:buNone/>
-            </a:pPr>
-            <a:r>
-              <a:rPr lang="en-IN" b="1" dirty="0">
-                <a:latin typeface="Lucida Bright" panose="02040602050505020304" pitchFamily="18" charset="0"/>
-                <a:cs typeface="Times New Roman" panose="02020603050405020304" pitchFamily="18" charset="0"/>
-              </a:rPr>
-              <a:t>NLP ANALYSIS</a:t>
+              <a:rPr lang="en-IN" sz="2000" dirty="0">
+                <a:latin typeface="Times New Roman" panose="02020603050405020304" pitchFamily="18" charset="0"/>
+                <a:cs typeface="Times New Roman" panose="02020603050405020304" pitchFamily="18" charset="0"/>
+              </a:rPr>
+              <a:t>The researchers proposed an AI-based security system for women's safety. Technologies such as GPS, GSM and intelligent monitoring can be used to identify emergencies and provide timely assistance. The research demonstrates the role of AI in improving traditional safety mechanisms.</a:t>
+            </a:r>
+          </a:p>
+          <a:p>
+            <a:endParaRPr lang="en-IN" sz="2000" dirty="0">
+              <a:latin typeface="Times New Roman" panose="02020603050405020304" pitchFamily="18" charset="0"/>
+              <a:cs typeface="Times New Roman" panose="02020603050405020304" pitchFamily="18" charset="0"/>
+            </a:endParaRPr>
+          </a:p>
+          <a:p>
+            <a:r>
+              <a:rPr lang="en-IN" sz="2000" b="1" dirty="0">
+                <a:latin typeface="Times New Roman" panose="02020603050405020304" pitchFamily="18" charset="0"/>
+                <a:cs typeface="Times New Roman" panose="02020603050405020304" pitchFamily="18" charset="0"/>
+              </a:rPr>
+              <a:t>7. Harshali Patil et al. (2023)</a:t>
             </a:r>
             <a:br>
-              <a:rPr lang="en-IN" dirty="0">
+              <a:rPr lang="en-IN" sz="2000" b="1" dirty="0">
                 <a:latin typeface="Times New Roman" panose="02020603050405020304" pitchFamily="18" charset="0"/>
                 <a:cs typeface="Times New Roman" panose="02020603050405020304" pitchFamily="18" charset="0"/>
               </a:rPr>
             </a:br>
             <a:r>
-              <a:rPr lang="en-IN" dirty="0">
-                <a:latin typeface="Times New Roman" panose="02020603050405020304" pitchFamily="18" charset="0"/>
-                <a:cs typeface="Times New Roman" panose="02020603050405020304" pitchFamily="18" charset="0"/>
-              </a:rPr>
-              <a:t>Process the text using Natural Language Processing techniques to understand the content.</a:t>
-            </a:r>
-          </a:p>
-          <a:p>
-            <a:pPr>
-              <a:buNone/>
-            </a:pPr>
-            <a:r>
-              <a:rPr lang="en-IN" dirty="0">
-                <a:latin typeface="Times New Roman" panose="02020603050405020304" pitchFamily="18" charset="0"/>
-                <a:cs typeface="Times New Roman" panose="02020603050405020304" pitchFamily="18" charset="0"/>
-              </a:rPr>
-              <a:t>         ↓</a:t>
-            </a:r>
-          </a:p>
-          <a:p>
-            <a:pPr>
-              <a:buNone/>
-            </a:pPr>
-            <a:r>
-              <a:rPr lang="en-IN" b="1" dirty="0">
-                <a:latin typeface="Lucida Bright" panose="02040602050505020304" pitchFamily="18" charset="0"/>
-                <a:cs typeface="Times New Roman" panose="02020603050405020304" pitchFamily="18" charset="0"/>
-              </a:rPr>
-              <a:t>SENTIMENT &amp; INCIDENT CLASSIFICATION</a:t>
+              <a:rPr lang="en-IN" sz="2000" i="1" dirty="0">
+                <a:latin typeface="Times New Roman" panose="02020603050405020304" pitchFamily="18" charset="0"/>
+                <a:cs typeface="Times New Roman" panose="02020603050405020304" pitchFamily="18" charset="0"/>
+              </a:rPr>
+              <a:t>Research: Role of Information Technology in Strengthening Women’s Safety in India</a:t>
             </a:r>
             <a:br>
-              <a:rPr lang="en-IN" dirty="0">
+              <a:rPr lang="en-IN" sz="2000" dirty="0">
                 <a:latin typeface="Times New Roman" panose="02020603050405020304" pitchFamily="18" charset="0"/>
                 <a:cs typeface="Times New Roman" panose="02020603050405020304" pitchFamily="18" charset="0"/>
               </a:rPr>
             </a:br>
             <a:r>
-              <a:rPr lang="en-IN" dirty="0">
-                <a:latin typeface="Times New Roman" panose="02020603050405020304" pitchFamily="18" charset="0"/>
-                <a:cs typeface="Times New Roman" panose="02020603050405020304" pitchFamily="18" charset="0"/>
-              </a:rPr>
-              <a:t>Identify the sentiment and classify posts according to the type of safety-related incident.</a:t>
-            </a:r>
-          </a:p>
-          <a:p>
-            <a:pPr>
-              <a:buNone/>
-            </a:pPr>
-            <a:r>
-              <a:rPr lang="en-IN" dirty="0">
-                <a:latin typeface="Times New Roman" panose="02020603050405020304" pitchFamily="18" charset="0"/>
-                <a:cs typeface="Times New Roman" panose="02020603050405020304" pitchFamily="18" charset="0"/>
-              </a:rPr>
-              <a:t>         ↓</a:t>
-            </a:r>
-          </a:p>
-          <a:p>
-            <a:pPr>
-              <a:buNone/>
-            </a:pPr>
-            <a:r>
-              <a:rPr lang="en-IN" b="1" dirty="0">
-                <a:latin typeface="Lucida Bright" panose="02040602050505020304" pitchFamily="18" charset="0"/>
-                <a:cs typeface="Times New Roman" panose="02020603050405020304" pitchFamily="18" charset="0"/>
-              </a:rPr>
-              <a:t>TREND ANALYSIS</a:t>
+              <a:rPr lang="en-IN" sz="2000" dirty="0">
+                <a:latin typeface="Times New Roman" panose="02020603050405020304" pitchFamily="18" charset="0"/>
+                <a:cs typeface="Times New Roman" panose="02020603050405020304" pitchFamily="18" charset="0"/>
+              </a:rPr>
+              <a:t>The researchers studied technologies including Artificial Intelligence, IoT, surveillance systems, mobile applications and cybersecurity. Their work shows that women's safety can be improved by integrating multiple technologies rather than depending on a single system.</a:t>
+            </a:r>
+          </a:p>
+          <a:p>
+            <a:endParaRPr lang="en-IN" sz="2000" dirty="0">
+              <a:latin typeface="Times New Roman" panose="02020603050405020304" pitchFamily="18" charset="0"/>
+              <a:cs typeface="Times New Roman" panose="02020603050405020304" pitchFamily="18" charset="0"/>
+            </a:endParaRPr>
+          </a:p>
+          <a:p>
+            <a:r>
+              <a:rPr lang="en-IN" sz="2000" b="1" dirty="0">
+                <a:latin typeface="Times New Roman" panose="02020603050405020304" pitchFamily="18" charset="0"/>
+                <a:cs typeface="Times New Roman" panose="02020603050405020304" pitchFamily="18" charset="0"/>
+              </a:rPr>
+              <a:t>8. M. </a:t>
+            </a:r>
+            <a:r>
+              <a:rPr lang="en-IN" sz="2000" b="1" dirty="0" err="1">
+                <a:latin typeface="Times New Roman" panose="02020603050405020304" pitchFamily="18" charset="0"/>
+                <a:cs typeface="Times New Roman" panose="02020603050405020304" pitchFamily="18" charset="0"/>
+              </a:rPr>
+              <a:t>Navaneethakrishnan</a:t>
+            </a:r>
+            <a:r>
+              <a:rPr lang="en-IN" sz="2000" b="1" dirty="0">
+                <a:latin typeface="Times New Roman" panose="02020603050405020304" pitchFamily="18" charset="0"/>
+                <a:cs typeface="Times New Roman" panose="02020603050405020304" pitchFamily="18" charset="0"/>
+              </a:rPr>
+              <a:t> et al. (2023)</a:t>
             </a:r>
             <a:br>
-              <a:rPr lang="en-IN" dirty="0">
+              <a:rPr lang="en-IN" sz="2000" dirty="0">
                 <a:latin typeface="Times New Roman" panose="02020603050405020304" pitchFamily="18" charset="0"/>
                 <a:cs typeface="Times New Roman" panose="02020603050405020304" pitchFamily="18" charset="0"/>
               </a:rPr>
             </a:br>
             <a:r>
-              <a:rPr lang="en-IN" dirty="0">
-                <a:latin typeface="Times New Roman" panose="02020603050405020304" pitchFamily="18" charset="0"/>
-                <a:cs typeface="Times New Roman" panose="02020603050405020304" pitchFamily="18" charset="0"/>
-              </a:rPr>
-              <a:t>Study the frequency and changes in safety-related posts over different time periods.</a:t>
-            </a:r>
-          </a:p>
-          <a:p>
-            <a:pPr>
-              <a:buNone/>
-            </a:pPr>
-            <a:r>
-              <a:rPr lang="en-IN" dirty="0">
-                <a:latin typeface="Times New Roman" panose="02020603050405020304" pitchFamily="18" charset="0"/>
-                <a:cs typeface="Times New Roman" panose="02020603050405020304" pitchFamily="18" charset="0"/>
-              </a:rPr>
-              <a:t>         ↓</a:t>
-            </a:r>
-          </a:p>
-          <a:p>
-            <a:pPr>
-              <a:buNone/>
-            </a:pPr>
-            <a:r>
-              <a:rPr lang="en-IN" b="1" dirty="0">
-                <a:latin typeface="Lucida Bright" panose="02040602050505020304" pitchFamily="18" charset="0"/>
-                <a:cs typeface="Times New Roman" panose="02020603050405020304" pitchFamily="18" charset="0"/>
-              </a:rPr>
-              <a:t>LOCATION ANALYSIS</a:t>
+              <a:rPr lang="en-IN" sz="2000" i="1" dirty="0">
+                <a:latin typeface="Times New Roman" panose="02020603050405020304" pitchFamily="18" charset="0"/>
+                <a:cs typeface="Times New Roman" panose="02020603050405020304" pitchFamily="18" charset="0"/>
+              </a:rPr>
+              <a:t>Research: </a:t>
+            </a:r>
+            <a:r>
+              <a:rPr lang="en-IN" sz="2000" i="1" dirty="0" err="1">
+                <a:latin typeface="Times New Roman" panose="02020603050405020304" pitchFamily="18" charset="0"/>
+                <a:cs typeface="Times New Roman" panose="02020603050405020304" pitchFamily="18" charset="0"/>
+              </a:rPr>
+              <a:t>WoExP</a:t>
+            </a:r>
+            <a:r>
+              <a:rPr lang="en-IN" sz="2000" i="1" dirty="0">
+                <a:latin typeface="Times New Roman" panose="02020603050405020304" pitchFamily="18" charset="0"/>
+                <a:cs typeface="Times New Roman" panose="02020603050405020304" pitchFamily="18" charset="0"/>
+              </a:rPr>
+              <a:t> – Women Express: Artificial Intelligence Based Women Security and Safety System</a:t>
             </a:r>
             <a:br>
-              <a:rPr lang="en-IN" dirty="0">
+              <a:rPr lang="en-IN" sz="2000" dirty="0">
                 <a:latin typeface="Times New Roman" panose="02020603050405020304" pitchFamily="18" charset="0"/>
                 <a:cs typeface="Times New Roman" panose="02020603050405020304" pitchFamily="18" charset="0"/>
               </a:rPr>
             </a:br>
             <a:r>
-              <a:rPr lang="en-IN" dirty="0" err="1">
-                <a:latin typeface="Times New Roman" panose="02020603050405020304" pitchFamily="18" charset="0"/>
-                <a:cs typeface="Times New Roman" panose="02020603050405020304" pitchFamily="18" charset="0"/>
-              </a:rPr>
-              <a:t>Analyze</a:t>
-            </a:r>
-            <a:r>
-              <a:rPr lang="en-IN" dirty="0">
-                <a:latin typeface="Times New Roman" panose="02020603050405020304" pitchFamily="18" charset="0"/>
-                <a:cs typeface="Times New Roman" panose="02020603050405020304" pitchFamily="18" charset="0"/>
-              </a:rPr>
-              <a:t> available location information to identify areas with repeated safety-related reports.</a:t>
-            </a:r>
-          </a:p>
-          <a:p>
-            <a:pPr>
-              <a:buNone/>
-            </a:pPr>
-            <a:r>
-              <a:rPr lang="en-IN" dirty="0">
-                <a:latin typeface="Times New Roman" panose="02020603050405020304" pitchFamily="18" charset="0"/>
-                <a:cs typeface="Times New Roman" panose="02020603050405020304" pitchFamily="18" charset="0"/>
-              </a:rPr>
-              <a:t>         ↓</a:t>
-            </a:r>
-          </a:p>
-          <a:p>
-            <a:pPr>
-              <a:buNone/>
-            </a:pPr>
-            <a:r>
-              <a:rPr lang="en-IN" b="1" dirty="0">
-                <a:latin typeface="Lucida Bright" panose="02040602050505020304" pitchFamily="18" charset="0"/>
-                <a:cs typeface="Times New Roman" panose="02020603050405020304" pitchFamily="18" charset="0"/>
-              </a:rPr>
-              <a:t>DASHBOARD</a:t>
-            </a:r>
-            <a:br>
-              <a:rPr lang="en-IN" dirty="0">
-                <a:latin typeface="Times New Roman" panose="02020603050405020304" pitchFamily="18" charset="0"/>
-                <a:cs typeface="Times New Roman" panose="02020603050405020304" pitchFamily="18" charset="0"/>
-              </a:rPr>
-            </a:br>
-            <a:r>
-              <a:rPr lang="en-IN" dirty="0">
-                <a:latin typeface="Times New Roman" panose="02020603050405020304" pitchFamily="18" charset="0"/>
-                <a:cs typeface="Times New Roman" panose="02020603050405020304" pitchFamily="18" charset="0"/>
-              </a:rPr>
-              <a:t>Present the </a:t>
-            </a:r>
-            <a:r>
-              <a:rPr lang="en-IN" dirty="0" err="1">
-                <a:latin typeface="Times New Roman" panose="02020603050405020304" pitchFamily="18" charset="0"/>
-                <a:cs typeface="Times New Roman" panose="02020603050405020304" pitchFamily="18" charset="0"/>
-              </a:rPr>
-              <a:t>analyzed</a:t>
-            </a:r>
-            <a:r>
-              <a:rPr lang="en-IN" dirty="0">
-                <a:latin typeface="Times New Roman" panose="02020603050405020304" pitchFamily="18" charset="0"/>
-                <a:cs typeface="Times New Roman" panose="02020603050405020304" pitchFamily="18" charset="0"/>
-              </a:rPr>
-              <a:t> information using charts, filters, trends and a map for easy understanding</a:t>
-            </a:r>
-            <a:r>
-              <a:rPr lang="en-IN" dirty="0"/>
-              <a:t>.</a:t>
-            </a:r>
-          </a:p>
-        </p:txBody>
-      </p:sp>
-      <p:sp>
-        <p:nvSpPr>
-          <p:cNvPr id="14" name="TextBox 13">
-            <a:extLst>
-              <a:ext uri="{FF2B5EF4-FFF2-40B4-BE49-F238E27FC236}">
-                <a16:creationId xmlns:a16="http://schemas.microsoft.com/office/drawing/2014/main" id="{04EA64A3-2585-DDE4-12C7-FB2460F69701}"/>
-              </a:ext>
-            </a:extLst>
-          </p:cNvPr>
-          <p:cNvSpPr txBox="1"/>
-          <p:nvPr/>
-        </p:nvSpPr>
-        <p:spPr>
-          <a:xfrm>
-            <a:off x="3048000" y="6581001"/>
-            <a:ext cx="6096000" cy="276999"/>
-          </a:xfrm>
-          <a:prstGeom prst="rect">
-            <a:avLst/>
-          </a:prstGeom>
-          <a:noFill/>
-        </p:spPr>
-        <p:txBody>
-          <a:bodyPr wrap="square">
-            <a:spAutoFit/>
-          </a:bodyPr>
-          <a:lstStyle/>
-          <a:p>
-            <a:r>
-              <a:rPr lang="en-IN" sz="1200" dirty="0">
-                <a:solidFill>
-                  <a:schemeClr val="accent5">
-                    <a:lumMod val="75000"/>
-                  </a:schemeClr>
-                </a:solidFill>
-              </a:rPr>
-              <a:t>KL University | Department of Computer Science and Engineering  | Academic Year 2026–27</a:t>
-            </a:r>
+              <a:rPr lang="en-IN" sz="2000" dirty="0">
+                <a:latin typeface="Times New Roman" panose="02020603050405020304" pitchFamily="18" charset="0"/>
+                <a:cs typeface="Times New Roman" panose="02020603050405020304" pitchFamily="18" charset="0"/>
+              </a:rPr>
+              <a:t>They proposed an AI-based women's security platform designed to help women report problems and obtain assistance. The system connects technology with emergency support and communication, showing how AI can help create a more responsive safety ecosystem.</a:t>
+            </a:r>
+          </a:p>
+          <a:p>
+            <a:endParaRPr lang="en-IN" sz="2000" dirty="0">
+              <a:latin typeface="Times New Roman" panose="02020603050405020304" pitchFamily="18" charset="0"/>
+              <a:cs typeface="Times New Roman" panose="02020603050405020304" pitchFamily="18" charset="0"/>
+            </a:endParaRPr>
           </a:p>
         </p:txBody>
       </p:sp>
     </p:spTree>
     <p:extLst>
       <p:ext uri="{BB962C8B-B14F-4D97-AF65-F5344CB8AC3E}">
-        <p14:creationId xmlns:p14="http://schemas.microsoft.com/office/powerpoint/2010/main" val="3456078867"/>
+        <p14:creationId xmlns:p14="http://schemas.microsoft.com/office/powerpoint/2010/main" val="3575089311"/>
       </p:ext>
     </p:extLst>
   </p:cSld>
@@ -5855,7 +7589,7 @@
           <p:cNvPr id="3" name="TextBox 2">
             <a:extLst>
               <a:ext uri="{FF2B5EF4-FFF2-40B4-BE49-F238E27FC236}">
-                <a16:creationId xmlns:a16="http://schemas.microsoft.com/office/drawing/2014/main" id="{B0624FCB-5E4B-1576-C12C-584945FF0519}"/>
+                <a16:creationId xmlns:a16="http://schemas.microsoft.com/office/drawing/2014/main" id="{7887A8E9-9BED-009B-82D6-104440E10689}"/>
               </a:ext>
             </a:extLst>
           </p:cNvPr>
@@ -5864,8 +7598,8 @@
         </p:nvSpPr>
         <p:spPr>
           <a:xfrm>
-            <a:off x="196645" y="235974"/>
-            <a:ext cx="6096000" cy="415498"/>
+            <a:off x="334296" y="369838"/>
+            <a:ext cx="9724104" cy="2031325"/>
           </a:xfrm>
           <a:prstGeom prst="rect">
             <a:avLst/>
@@ -5879,655 +7613,38 @@
           <a:lstStyle/>
           <a:p>
             <a:r>
-              <a:rPr lang="en-IN" sz="2100" b="1" dirty="0">
-                <a:solidFill>
-                  <a:srgbClr val="0070C0"/>
-                </a:solidFill>
-                <a:latin typeface="Lucida Bright" panose="02040602050505020304" pitchFamily="18" charset="0"/>
-              </a:rPr>
-              <a:t>Project Cost Estimation</a:t>
-            </a:r>
-          </a:p>
-        </p:txBody>
-      </p:sp>
-      <p:sp>
-        <p:nvSpPr>
-          <p:cNvPr id="5" name="TextBox 4">
-            <a:extLst>
-              <a:ext uri="{FF2B5EF4-FFF2-40B4-BE49-F238E27FC236}">
-                <a16:creationId xmlns:a16="http://schemas.microsoft.com/office/drawing/2014/main" id="{AF42C48D-3171-96F8-2E9E-58703D8CD746}"/>
-              </a:ext>
-            </a:extLst>
-          </p:cNvPr>
-          <p:cNvSpPr txBox="1"/>
-          <p:nvPr/>
-        </p:nvSpPr>
-        <p:spPr>
-          <a:xfrm>
-            <a:off x="786580" y="836699"/>
-            <a:ext cx="8672052" cy="2862322"/>
-          </a:xfrm>
-          <a:prstGeom prst="rect">
-            <a:avLst/>
-          </a:prstGeom>
-          <a:noFill/>
-        </p:spPr>
-        <p:txBody>
-          <a:bodyPr wrap="square">
-            <a:spAutoFit/>
-          </a:bodyPr>
-          <a:lstStyle/>
-          <a:p>
-            <a:pPr marL="342900" lvl="0" indent="-342900">
-              <a:buFont typeface="Arial" panose="020B0604020202020204" pitchFamily="34" charset="0"/>
-              <a:buChar char="•"/>
-            </a:pPr>
-            <a:r>
+              <a:rPr lang="en-IN" b="1" dirty="0">
+                <a:latin typeface="Times New Roman" panose="02020603050405020304" pitchFamily="18" charset="0"/>
+                <a:cs typeface="Times New Roman" panose="02020603050405020304" pitchFamily="18" charset="0"/>
+              </a:rPr>
+              <a:t>8. Udipta Boro et al. (2024)</a:t>
+            </a:r>
+            <a:br>
+              <a:rPr lang="en-IN" dirty="0"/>
+            </a:br>
+            <a:r>
+              <a:rPr lang="en-IN" i="1" dirty="0">
+                <a:latin typeface="Times New Roman" panose="02020603050405020304" pitchFamily="18" charset="0"/>
+                <a:cs typeface="Times New Roman" panose="02020603050405020304" pitchFamily="18" charset="0"/>
+              </a:rPr>
+              <a:t>Research: Data-intensive Technology Systems for Women Safety: Lessons from Bengaluru’s AI-powered CCTV Network</a:t>
+            </a:r>
+            <a:br>
               <a:rPr lang="en-IN" dirty="0">
                 <a:latin typeface="Times New Roman" panose="02020603050405020304" pitchFamily="18" charset="0"/>
                 <a:cs typeface="Times New Roman" panose="02020603050405020304" pitchFamily="18" charset="0"/>
               </a:rPr>
-              <a:t>The proposed project is designed to be cost-effective for a final-year </a:t>
-            </a:r>
-            <a:r>
-              <a:rPr lang="en-IN" dirty="0" err="1">
-                <a:latin typeface="Times New Roman" panose="02020603050405020304" pitchFamily="18" charset="0"/>
-                <a:cs typeface="Times New Roman" panose="02020603050405020304" pitchFamily="18" charset="0"/>
-              </a:rPr>
-              <a:t>B.Tech</a:t>
-            </a:r>
+            </a:br>
             <a:r>
               <a:rPr lang="en-IN" dirty="0">
                 <a:latin typeface="Times New Roman" panose="02020603050405020304" pitchFamily="18" charset="0"/>
                 <a:cs typeface="Times New Roman" panose="02020603050405020304" pitchFamily="18" charset="0"/>
               </a:rPr>
-              <a:t> prototype. </a:t>
-            </a:r>
-          </a:p>
-          <a:p>
-            <a:pPr marL="342900" lvl="0" indent="-342900">
-              <a:buFont typeface="Arial" panose="020B0604020202020204" pitchFamily="34" charset="0"/>
-              <a:buChar char="•"/>
-            </a:pPr>
-            <a:r>
-              <a:rPr lang="en-IN" dirty="0">
-                <a:latin typeface="Times New Roman" panose="02020603050405020304" pitchFamily="18" charset="0"/>
-                <a:cs typeface="Times New Roman" panose="02020603050405020304" pitchFamily="18" charset="0"/>
-              </a:rPr>
-              <a:t>Most of the software tools used in the project are free and open-source. </a:t>
-            </a:r>
-          </a:p>
-          <a:p>
-            <a:pPr marL="342900" lvl="0" indent="-342900">
-              <a:buFont typeface="Arial" panose="020B0604020202020204" pitchFamily="34" charset="0"/>
-              <a:buChar char="•"/>
-            </a:pPr>
-            <a:r>
-              <a:rPr lang="en-IN" dirty="0">
-                <a:latin typeface="Times New Roman" panose="02020603050405020304" pitchFamily="18" charset="0"/>
-                <a:cs typeface="Times New Roman" panose="02020603050405020304" pitchFamily="18" charset="0"/>
-              </a:rPr>
-              <a:t>The main expense is for the IoT-based wearable safety prototype. </a:t>
-            </a:r>
-          </a:p>
-          <a:p>
-            <a:pPr marL="342900" lvl="0" indent="-342900">
-              <a:buFont typeface="Arial" panose="020B0604020202020204" pitchFamily="34" charset="0"/>
-              <a:buChar char="•"/>
-            </a:pPr>
-            <a:r>
-              <a:rPr lang="en-IN" dirty="0">
-                <a:latin typeface="Times New Roman" panose="02020603050405020304" pitchFamily="18" charset="0"/>
-                <a:cs typeface="Times New Roman" panose="02020603050405020304" pitchFamily="18" charset="0"/>
-              </a:rPr>
-              <a:t>The hardware includes ESP32, GPS module, SOS button, buzzer, battery and basic components. </a:t>
-            </a:r>
-          </a:p>
-          <a:p>
-            <a:pPr marL="342900" lvl="0" indent="-342900">
-              <a:buFont typeface="Arial" panose="020B0604020202020204" pitchFamily="34" charset="0"/>
-              <a:buChar char="•"/>
-            </a:pPr>
-            <a:r>
-              <a:rPr lang="en-IN" dirty="0">
-                <a:latin typeface="Times New Roman" panose="02020603050405020304" pitchFamily="18" charset="0"/>
-                <a:cs typeface="Times New Roman" panose="02020603050405020304" pitchFamily="18" charset="0"/>
-              </a:rPr>
-              <a:t>The estimated hardware cost is approximately </a:t>
-            </a:r>
-            <a:r>
-              <a:rPr lang="en-IN" b="1" dirty="0">
-                <a:latin typeface="Times New Roman" panose="02020603050405020304" pitchFamily="18" charset="0"/>
-                <a:cs typeface="Times New Roman" panose="02020603050405020304" pitchFamily="18" charset="0"/>
-              </a:rPr>
-              <a:t>₹1,900</a:t>
-            </a:r>
-            <a:r>
-              <a:rPr lang="en-IN" dirty="0">
-                <a:latin typeface="Times New Roman" panose="02020603050405020304" pitchFamily="18" charset="0"/>
-                <a:cs typeface="Times New Roman" panose="02020603050405020304" pitchFamily="18" charset="0"/>
-              </a:rPr>
-              <a:t>. </a:t>
-            </a:r>
-          </a:p>
-          <a:p>
-            <a:pPr marL="342900" lvl="0" indent="-342900">
-              <a:buFont typeface="Arial" panose="020B0604020202020204" pitchFamily="34" charset="0"/>
-              <a:buChar char="•"/>
-            </a:pPr>
-            <a:r>
-              <a:rPr lang="en-IN" dirty="0">
-                <a:latin typeface="Times New Roman" panose="02020603050405020304" pitchFamily="18" charset="0"/>
-                <a:cs typeface="Times New Roman" panose="02020603050405020304" pitchFamily="18" charset="0"/>
-              </a:rPr>
-              <a:t>Depending on additional components, the total cost may range between </a:t>
-            </a:r>
-            <a:r>
-              <a:rPr lang="en-IN" b="1" dirty="0">
-                <a:latin typeface="Times New Roman" panose="02020603050405020304" pitchFamily="18" charset="0"/>
-                <a:cs typeface="Times New Roman" panose="02020603050405020304" pitchFamily="18" charset="0"/>
-              </a:rPr>
-              <a:t>₹1,900 and ₹2,500</a:t>
-            </a:r>
-            <a:r>
-              <a:rPr lang="en-IN" dirty="0">
-                <a:latin typeface="Times New Roman" panose="02020603050405020304" pitchFamily="18" charset="0"/>
-                <a:cs typeface="Times New Roman" panose="02020603050405020304" pitchFamily="18" charset="0"/>
-              </a:rPr>
-              <a:t>. </a:t>
-            </a:r>
-          </a:p>
-          <a:p>
-            <a:pPr marL="342900" lvl="0" indent="-342900">
-              <a:buFont typeface="Arial" panose="020B0604020202020204" pitchFamily="34" charset="0"/>
-              <a:buChar char="•"/>
-            </a:pPr>
-            <a:r>
-              <a:rPr lang="en-IN" dirty="0">
-                <a:latin typeface="Times New Roman" panose="02020603050405020304" pitchFamily="18" charset="0"/>
-                <a:cs typeface="Times New Roman" panose="02020603050405020304" pitchFamily="18" charset="0"/>
-              </a:rPr>
-              <a:t>No major software licensing cost is expected during development. </a:t>
-            </a:r>
-          </a:p>
-          <a:p>
-            <a:pPr marL="342900" lvl="0" indent="-342900">
-              <a:buFont typeface="Arial" panose="020B0604020202020204" pitchFamily="34" charset="0"/>
-              <a:buChar char="•"/>
-            </a:pPr>
-            <a:r>
-              <a:rPr lang="en-IN" b="1" dirty="0">
-                <a:latin typeface="Times New Roman" panose="02020603050405020304" pitchFamily="18" charset="0"/>
-                <a:cs typeface="Times New Roman" panose="02020603050405020304" pitchFamily="18" charset="0"/>
-              </a:rPr>
-              <a:t>Estimated overall project budget: ₹1,900–₹2,500.</a:t>
-            </a:r>
-            <a:endParaRPr lang="en-IN" dirty="0">
-              <a:latin typeface="Times New Roman" panose="02020603050405020304" pitchFamily="18" charset="0"/>
-              <a:cs typeface="Times New Roman" panose="02020603050405020304" pitchFamily="18" charset="0"/>
-            </a:endParaRPr>
-          </a:p>
-        </p:txBody>
-      </p:sp>
-      <p:pic>
-        <p:nvPicPr>
-          <p:cNvPr id="7" name="Picture 6">
-            <a:extLst>
-              <a:ext uri="{FF2B5EF4-FFF2-40B4-BE49-F238E27FC236}">
-                <a16:creationId xmlns:a16="http://schemas.microsoft.com/office/drawing/2014/main" id="{2A2DE980-3D57-BDD8-C47B-0FD922ED5A2B}"/>
-              </a:ext>
-            </a:extLst>
-          </p:cNvPr>
-          <p:cNvPicPr>
-            <a:picLocks noChangeAspect="1"/>
-          </p:cNvPicPr>
-          <p:nvPr/>
-        </p:nvPicPr>
-        <p:blipFill>
-          <a:blip r:embed="rId2">
-            <a:extLst>
-              <a:ext uri="{28A0092B-C50C-407E-A947-70E740481C1C}">
-                <a14:useLocalDpi xmlns:a14="http://schemas.microsoft.com/office/drawing/2010/main" val="0"/>
-              </a:ext>
-            </a:extLst>
-          </a:blip>
-          <a:stretch>
-            <a:fillRect/>
-          </a:stretch>
-        </p:blipFill>
-        <p:spPr>
-          <a:xfrm rot="16200000">
-            <a:off x="447476" y="3528910"/>
-            <a:ext cx="1995731" cy="2229161"/>
-          </a:xfrm>
-          <a:prstGeom prst="rect">
-            <a:avLst/>
-          </a:prstGeom>
-        </p:spPr>
-      </p:pic>
-      <p:pic>
-        <p:nvPicPr>
-          <p:cNvPr id="9" name="Picture 8">
-            <a:extLst>
-              <a:ext uri="{FF2B5EF4-FFF2-40B4-BE49-F238E27FC236}">
-                <a16:creationId xmlns:a16="http://schemas.microsoft.com/office/drawing/2014/main" id="{FF51E24A-DB63-1C95-1EE1-64F3BA47FC0D}"/>
-              </a:ext>
-            </a:extLst>
-          </p:cNvPr>
-          <p:cNvPicPr>
-            <a:picLocks noChangeAspect="1"/>
-          </p:cNvPicPr>
-          <p:nvPr/>
-        </p:nvPicPr>
-        <p:blipFill>
-          <a:blip r:embed="rId3"/>
-          <a:stretch>
-            <a:fillRect/>
-          </a:stretch>
-        </p:blipFill>
-        <p:spPr>
-          <a:xfrm>
-            <a:off x="3133186" y="3677938"/>
-            <a:ext cx="2720311" cy="1995732"/>
-          </a:xfrm>
-          <a:prstGeom prst="rect">
-            <a:avLst/>
-          </a:prstGeom>
-        </p:spPr>
-      </p:pic>
-      <p:sp>
-        <p:nvSpPr>
-          <p:cNvPr id="10" name="Rectangle: Rounded Corners 9">
-            <a:extLst>
-              <a:ext uri="{FF2B5EF4-FFF2-40B4-BE49-F238E27FC236}">
-                <a16:creationId xmlns:a16="http://schemas.microsoft.com/office/drawing/2014/main" id="{DF62361B-141B-C590-9732-AFAF3B05D041}"/>
-              </a:ext>
-            </a:extLst>
-          </p:cNvPr>
-          <p:cNvSpPr/>
-          <p:nvPr/>
-        </p:nvSpPr>
-        <p:spPr>
-          <a:xfrm>
-            <a:off x="196645" y="5638574"/>
-            <a:ext cx="2497394" cy="884903"/>
-          </a:xfrm>
-          <a:prstGeom prst="roundRect">
-            <a:avLst/>
-          </a:prstGeom>
-        </p:spPr>
-        <p:style>
-          <a:lnRef idx="2">
-            <a:schemeClr val="accent1">
-              <a:shade val="15000"/>
-            </a:schemeClr>
-          </a:lnRef>
-          <a:fillRef idx="1">
-            <a:schemeClr val="accent1"/>
-          </a:fillRef>
-          <a:effectRef idx="0">
-            <a:schemeClr val="accent1"/>
-          </a:effectRef>
-          <a:fontRef idx="minor">
-            <a:schemeClr val="lt1"/>
-          </a:fontRef>
-        </p:style>
-        <p:txBody>
-          <a:bodyPr rtlCol="0" anchor="ctr"/>
-          <a:lstStyle/>
-          <a:p>
-            <a:pPr algn="ctr"/>
+              <a:t>The researchers examined AI-powered CCTV surveillance in Bengaluru. Their work discusses how intelligent surveillance can contribute to women's safety while also highlighting concerns such as privacy, surveillance, bias and discrimination. This is particularly relevant to an AI-based CCTV project</a:t>
+            </a:r>
             <a:r>
               <a:rPr lang="en-IN" dirty="0"/>
-              <a:t>ESP-32 Development Board</a:t>
-            </a:r>
-          </a:p>
-          <a:p>
-            <a:pPr algn="ctr"/>
-            <a:r>
-              <a:rPr lang="en-IN" dirty="0"/>
-              <a:t>COST : ₹500</a:t>
-            </a:r>
-          </a:p>
-        </p:txBody>
-      </p:sp>
-      <p:sp>
-        <p:nvSpPr>
-          <p:cNvPr id="12" name="Rectangle: Rounded Corners 11">
-            <a:extLst>
-              <a:ext uri="{FF2B5EF4-FFF2-40B4-BE49-F238E27FC236}">
-                <a16:creationId xmlns:a16="http://schemas.microsoft.com/office/drawing/2014/main" id="{1FCC8CC5-E897-D51F-9FD4-667E0EDBAEA2}"/>
-              </a:ext>
-            </a:extLst>
-          </p:cNvPr>
-          <p:cNvSpPr/>
-          <p:nvPr/>
-        </p:nvSpPr>
-        <p:spPr>
-          <a:xfrm>
-            <a:off x="3356103" y="5673670"/>
-            <a:ext cx="2497394" cy="884903"/>
-          </a:xfrm>
-          <a:prstGeom prst="roundRect">
-            <a:avLst/>
-          </a:prstGeom>
-        </p:spPr>
-        <p:style>
-          <a:lnRef idx="2">
-            <a:schemeClr val="accent1">
-              <a:shade val="15000"/>
-            </a:schemeClr>
-          </a:lnRef>
-          <a:fillRef idx="1">
-            <a:schemeClr val="accent1"/>
-          </a:fillRef>
-          <a:effectRef idx="0">
-            <a:schemeClr val="accent1"/>
-          </a:effectRef>
-          <a:fontRef idx="minor">
-            <a:schemeClr val="lt1"/>
-          </a:fontRef>
-        </p:style>
-        <p:txBody>
-          <a:bodyPr rtlCol="0" anchor="ctr"/>
-          <a:lstStyle/>
-          <a:p>
-            <a:pPr algn="ctr"/>
-            <a:r>
-              <a:rPr lang="en-IN" dirty="0"/>
-              <a:t>GPS Module (NEO-6M)</a:t>
-            </a:r>
-          </a:p>
-          <a:p>
-            <a:pPr algn="ctr"/>
-            <a:r>
-              <a:rPr lang="en-IN" dirty="0"/>
-              <a:t>COST : ₹600</a:t>
-            </a:r>
-          </a:p>
-        </p:txBody>
-      </p:sp>
-      <p:pic>
-        <p:nvPicPr>
-          <p:cNvPr id="14" name="Picture 13">
-            <a:extLst>
-              <a:ext uri="{FF2B5EF4-FFF2-40B4-BE49-F238E27FC236}">
-                <a16:creationId xmlns:a16="http://schemas.microsoft.com/office/drawing/2014/main" id="{A760C07D-DC10-C26B-C464-6571587B92DC}"/>
-              </a:ext>
-            </a:extLst>
-          </p:cNvPr>
-          <p:cNvPicPr>
-            <a:picLocks noChangeAspect="1"/>
-          </p:cNvPicPr>
-          <p:nvPr/>
-        </p:nvPicPr>
-        <p:blipFill>
-          <a:blip r:embed="rId4"/>
-          <a:stretch>
-            <a:fillRect/>
-          </a:stretch>
-        </p:blipFill>
-        <p:spPr>
-          <a:xfrm>
-            <a:off x="6600826" y="3904730"/>
-            <a:ext cx="1971776" cy="1542148"/>
-          </a:xfrm>
-          <a:prstGeom prst="rect">
-            <a:avLst/>
-          </a:prstGeom>
-        </p:spPr>
-      </p:pic>
-      <p:sp>
-        <p:nvSpPr>
-          <p:cNvPr id="20" name="Rectangle: Rounded Corners 19">
-            <a:extLst>
-              <a:ext uri="{FF2B5EF4-FFF2-40B4-BE49-F238E27FC236}">
-                <a16:creationId xmlns:a16="http://schemas.microsoft.com/office/drawing/2014/main" id="{114C31D1-65A8-61F1-BDCD-A14C9453932A}"/>
-              </a:ext>
-            </a:extLst>
-          </p:cNvPr>
-          <p:cNvSpPr/>
-          <p:nvPr/>
-        </p:nvSpPr>
-        <p:spPr>
-          <a:xfrm>
-            <a:off x="6600826" y="5578849"/>
-            <a:ext cx="2266335" cy="884903"/>
-          </a:xfrm>
-          <a:prstGeom prst="roundRect">
-            <a:avLst/>
-          </a:prstGeom>
-        </p:spPr>
-        <p:style>
-          <a:lnRef idx="2">
-            <a:schemeClr val="accent1">
-              <a:shade val="15000"/>
-            </a:schemeClr>
-          </a:lnRef>
-          <a:fillRef idx="1">
-            <a:schemeClr val="accent1"/>
-          </a:fillRef>
-          <a:effectRef idx="0">
-            <a:schemeClr val="accent1"/>
-          </a:effectRef>
-          <a:fontRef idx="minor">
-            <a:schemeClr val="lt1"/>
-          </a:fontRef>
-        </p:style>
-        <p:txBody>
-          <a:bodyPr rtlCol="0" anchor="ctr"/>
-          <a:lstStyle/>
-          <a:p>
-            <a:pPr algn="ctr"/>
-            <a:r>
-              <a:rPr lang="en-IN" dirty="0"/>
-              <a:t>BUZZER COST : ₹60</a:t>
-            </a:r>
-          </a:p>
-        </p:txBody>
-      </p:sp>
-      <p:sp>
-        <p:nvSpPr>
-          <p:cNvPr id="27" name="TextBox 26">
-            <a:extLst>
-              <a:ext uri="{FF2B5EF4-FFF2-40B4-BE49-F238E27FC236}">
-                <a16:creationId xmlns:a16="http://schemas.microsoft.com/office/drawing/2014/main" id="{1776BA0A-45E9-C700-1C9E-D783FFE13B1A}"/>
-              </a:ext>
-            </a:extLst>
-          </p:cNvPr>
-          <p:cNvSpPr txBox="1"/>
-          <p:nvPr/>
-        </p:nvSpPr>
-        <p:spPr>
-          <a:xfrm>
-            <a:off x="3244645" y="6595723"/>
-            <a:ext cx="6096000" cy="276999"/>
-          </a:xfrm>
-          <a:prstGeom prst="rect">
-            <a:avLst/>
-          </a:prstGeom>
-          <a:noFill/>
-        </p:spPr>
-        <p:txBody>
-          <a:bodyPr wrap="square">
-            <a:spAutoFit/>
-          </a:bodyPr>
-          <a:lstStyle/>
-          <a:p>
-            <a:r>
-              <a:rPr lang="en-IN" sz="1200" dirty="0">
-                <a:solidFill>
-                  <a:schemeClr val="accent5">
-                    <a:lumMod val="75000"/>
-                  </a:schemeClr>
-                </a:solidFill>
-              </a:rPr>
-              <a:t>KL University | Department of Computer Science and Engineering  | Academic Year 2026–27</a:t>
-            </a:r>
-          </a:p>
-        </p:txBody>
-      </p:sp>
-      <p:pic>
-        <p:nvPicPr>
-          <p:cNvPr id="4" name="Picture 3">
-            <a:extLst>
-              <a:ext uri="{FF2B5EF4-FFF2-40B4-BE49-F238E27FC236}">
-                <a16:creationId xmlns:a16="http://schemas.microsoft.com/office/drawing/2014/main" id="{C3496091-989C-4C4A-B6DD-CABDF7DBE027}"/>
-              </a:ext>
-            </a:extLst>
-          </p:cNvPr>
-          <p:cNvPicPr>
-            <a:picLocks noChangeAspect="1"/>
-          </p:cNvPicPr>
-          <p:nvPr/>
-        </p:nvPicPr>
-        <p:blipFill>
-          <a:blip r:embed="rId5"/>
-          <a:stretch>
-            <a:fillRect/>
-          </a:stretch>
-        </p:blipFill>
-        <p:spPr>
-          <a:xfrm>
-            <a:off x="9176258" y="3645625"/>
-            <a:ext cx="2229162" cy="1740578"/>
-          </a:xfrm>
-          <a:prstGeom prst="rect">
-            <a:avLst/>
-          </a:prstGeom>
-        </p:spPr>
-      </p:pic>
-      <p:sp>
-        <p:nvSpPr>
-          <p:cNvPr id="16" name="Rectangle: Rounded Corners 15">
-            <a:extLst>
-              <a:ext uri="{FF2B5EF4-FFF2-40B4-BE49-F238E27FC236}">
-                <a16:creationId xmlns:a16="http://schemas.microsoft.com/office/drawing/2014/main" id="{9F945DA8-959F-B799-2CA5-FC9324F980A5}"/>
-              </a:ext>
-            </a:extLst>
-          </p:cNvPr>
-          <p:cNvSpPr/>
-          <p:nvPr/>
-        </p:nvSpPr>
-        <p:spPr>
-          <a:xfrm>
-            <a:off x="9176258" y="5638574"/>
-            <a:ext cx="2497394" cy="884903"/>
-          </a:xfrm>
-          <a:prstGeom prst="roundRect">
-            <a:avLst/>
-          </a:prstGeom>
-        </p:spPr>
-        <p:style>
-          <a:lnRef idx="2">
-            <a:schemeClr val="accent1">
-              <a:shade val="15000"/>
-            </a:schemeClr>
-          </a:lnRef>
-          <a:fillRef idx="1">
-            <a:schemeClr val="accent1"/>
-          </a:fillRef>
-          <a:effectRef idx="0">
-            <a:schemeClr val="accent1"/>
-          </a:effectRef>
-          <a:fontRef idx="minor">
-            <a:schemeClr val="lt1"/>
-          </a:fontRef>
-        </p:style>
-        <p:txBody>
-          <a:bodyPr rtlCol="0" anchor="ctr"/>
-          <a:lstStyle/>
-          <a:p>
-            <a:pPr algn="ctr"/>
-            <a:r>
-              <a:rPr lang="en-IN" dirty="0"/>
-              <a:t> SOS BUTTON</a:t>
-            </a:r>
-          </a:p>
-          <a:p>
-            <a:pPr algn="ctr"/>
-            <a:r>
-              <a:rPr lang="en-IN" dirty="0"/>
-              <a:t>COST : ₹250</a:t>
-            </a:r>
-          </a:p>
-        </p:txBody>
-      </p:sp>
-      <p:pic>
-        <p:nvPicPr>
-          <p:cNvPr id="18" name="Picture 17">
-            <a:extLst>
-              <a:ext uri="{FF2B5EF4-FFF2-40B4-BE49-F238E27FC236}">
-                <a16:creationId xmlns:a16="http://schemas.microsoft.com/office/drawing/2014/main" id="{DD55A570-C791-E8C8-1DE9-91574CF61CD3}"/>
-              </a:ext>
-            </a:extLst>
-          </p:cNvPr>
-          <p:cNvPicPr>
-            <a:picLocks noChangeAspect="1"/>
-          </p:cNvPicPr>
-          <p:nvPr/>
-        </p:nvPicPr>
-        <p:blipFill>
-          <a:blip r:embed="rId6"/>
-          <a:stretch>
-            <a:fillRect/>
-          </a:stretch>
-        </p:blipFill>
-        <p:spPr>
-          <a:xfrm>
-            <a:off x="9485562" y="105383"/>
-            <a:ext cx="2706438" cy="2162477"/>
-          </a:xfrm>
-          <a:prstGeom prst="rect">
-            <a:avLst/>
-          </a:prstGeom>
-        </p:spPr>
-      </p:pic>
-      <p:sp>
-        <p:nvSpPr>
-          <p:cNvPr id="21" name="Rectangle: Rounded Corners 20">
-            <a:extLst>
-              <a:ext uri="{FF2B5EF4-FFF2-40B4-BE49-F238E27FC236}">
-                <a16:creationId xmlns:a16="http://schemas.microsoft.com/office/drawing/2014/main" id="{A7BF93BE-B41B-25F0-814A-9FEFD0947945}"/>
-              </a:ext>
-            </a:extLst>
-          </p:cNvPr>
-          <p:cNvSpPr/>
-          <p:nvPr/>
-        </p:nvSpPr>
-        <p:spPr>
-          <a:xfrm>
-            <a:off x="9801226" y="2267860"/>
-            <a:ext cx="2266335" cy="884903"/>
-          </a:xfrm>
-          <a:prstGeom prst="roundRect">
-            <a:avLst/>
-          </a:prstGeom>
-        </p:spPr>
-        <p:style>
-          <a:lnRef idx="2">
-            <a:schemeClr val="accent1">
-              <a:shade val="15000"/>
-            </a:schemeClr>
-          </a:lnRef>
-          <a:fillRef idx="1">
-            <a:schemeClr val="accent1"/>
-          </a:fillRef>
-          <a:effectRef idx="0">
-            <a:schemeClr val="accent1"/>
-          </a:effectRef>
-          <a:fontRef idx="minor">
-            <a:schemeClr val="lt1"/>
-          </a:fontRef>
-        </p:style>
-        <p:txBody>
-          <a:bodyPr rtlCol="0" anchor="ctr"/>
-          <a:lstStyle/>
-          <a:p>
-            <a:pPr algn="ctr"/>
-            <a:r>
-              <a:rPr lang="en-IN" dirty="0"/>
-              <a:t>WIRE KIT COST: ₹300</a:t>
+              <a:t>.</a:t>
             </a:r>
           </a:p>
         </p:txBody>
@@ -6535,7 +7652,7 @@
     </p:spTree>
     <p:extLst>
       <p:ext uri="{BB962C8B-B14F-4D97-AF65-F5344CB8AC3E}">
-        <p14:creationId xmlns:p14="http://schemas.microsoft.com/office/powerpoint/2010/main" val="539521928"/>
+        <p14:creationId xmlns:p14="http://schemas.microsoft.com/office/powerpoint/2010/main" val="60451247"/>
       </p:ext>
     </p:extLst>
   </p:cSld>
@@ -6567,7 +7684,7 @@
           <p:cNvPr id="3" name="TextBox 2">
             <a:extLst>
               <a:ext uri="{FF2B5EF4-FFF2-40B4-BE49-F238E27FC236}">
-                <a16:creationId xmlns:a16="http://schemas.microsoft.com/office/drawing/2014/main" id="{386FFF22-B3B9-90ED-3DA4-8B26CABF9FBE}"/>
+                <a16:creationId xmlns:a16="http://schemas.microsoft.com/office/drawing/2014/main" id="{55B0F6D4-31D6-38EA-33D4-DA2B12E21675}"/>
               </a:ext>
             </a:extLst>
           </p:cNvPr>
@@ -6576,7 +7693,7 @@
         </p:nvSpPr>
         <p:spPr>
           <a:xfrm>
-            <a:off x="3156155" y="6581001"/>
+            <a:off x="3274142" y="6581001"/>
             <a:ext cx="6096000" cy="276999"/>
           </a:xfrm>
           <a:prstGeom prst="rect">
@@ -6598,17 +7715,17 @@
                   </a:schemeClr>
                 </a:solidFill>
               </a:rPr>
-              <a:t>KL University | Department of Computer Science and Engineering | Academic Year 2026–27</a:t>
-            </a:r>
-          </a:p>
-        </p:txBody>
-      </p:sp>
-      <p:sp>
-        <p:nvSpPr>
-          <p:cNvPr id="5" name="TextBox 4">
-            <a:extLst>
-              <a:ext uri="{FF2B5EF4-FFF2-40B4-BE49-F238E27FC236}">
-                <a16:creationId xmlns:a16="http://schemas.microsoft.com/office/drawing/2014/main" id="{A4724C24-5259-AC59-408D-C91F6710C363}"/>
+              <a:t>KL University | Department of Computer Science and Engineering  | Academic Year 2026–27</a:t>
+            </a:r>
+          </a:p>
+        </p:txBody>
+      </p:sp>
+      <p:sp>
+        <p:nvSpPr>
+          <p:cNvPr id="7" name="TextBox 6">
+            <a:extLst>
+              <a:ext uri="{FF2B5EF4-FFF2-40B4-BE49-F238E27FC236}">
+                <a16:creationId xmlns:a16="http://schemas.microsoft.com/office/drawing/2014/main" id="{7727D33F-463A-B844-7B83-A1C633423ED2}"/>
               </a:ext>
             </a:extLst>
           </p:cNvPr>
@@ -6617,8 +7734,8 @@
         </p:nvSpPr>
         <p:spPr>
           <a:xfrm>
-            <a:off x="108155" y="193876"/>
-            <a:ext cx="6096000" cy="415498"/>
+            <a:off x="698090" y="1193881"/>
+            <a:ext cx="8672051" cy="2923877"/>
           </a:xfrm>
           <a:prstGeom prst="rect">
             <a:avLst/>
@@ -6631,26 +7748,146 @@
           </a:bodyPr>
           <a:lstStyle/>
           <a:p>
-            <a:r>
-              <a:rPr lang="en-IN" sz="2100" b="1" dirty="0">
-                <a:solidFill>
-                  <a:schemeClr val="accent1">
-                    <a:lumMod val="75000"/>
-                  </a:schemeClr>
-                </a:solidFill>
-                <a:latin typeface="Lucida Bright" panose="02040602050505020304" pitchFamily="18" charset="0"/>
-              </a:rPr>
-              <a:t>    IoT WEARABLE AND SOS</a:t>
-            </a:r>
-          </a:p>
-        </p:txBody>
-      </p:sp>
-      <p:sp>
-        <p:nvSpPr>
-          <p:cNvPr id="7" name="TextBox 6">
-            <a:extLst>
-              <a:ext uri="{FF2B5EF4-FFF2-40B4-BE49-F238E27FC236}">
-                <a16:creationId xmlns:a16="http://schemas.microsoft.com/office/drawing/2014/main" id="{FADCDF61-3B95-2D81-DC67-DDA7596BB594}"/>
+            <a:pPr lvl="0"/>
+            <a:r>
+              <a:rPr lang="en-IN" sz="2000" dirty="0"/>
+              <a:t>• </a:t>
+            </a:r>
+            <a:r>
+              <a:rPr lang="en-IN" sz="2300" dirty="0">
+                <a:latin typeface="Times New Roman" panose="02020603050405020304" pitchFamily="18" charset="0"/>
+                <a:cs typeface="Times New Roman" panose="02020603050405020304" pitchFamily="18" charset="0"/>
+              </a:rPr>
+              <a:t>Collect relevant social-media data related to women’s safety.</a:t>
+            </a:r>
+            <a:br>
+              <a:rPr lang="en-IN" sz="2300" dirty="0">
+                <a:latin typeface="Times New Roman" panose="02020603050405020304" pitchFamily="18" charset="0"/>
+                <a:cs typeface="Times New Roman" panose="02020603050405020304" pitchFamily="18" charset="0"/>
+              </a:rPr>
+            </a:br>
+            <a:r>
+              <a:rPr lang="en-IN" sz="2300" dirty="0">
+                <a:latin typeface="Times New Roman" panose="02020603050405020304" pitchFamily="18" charset="0"/>
+                <a:cs typeface="Times New Roman" panose="02020603050405020304" pitchFamily="18" charset="0"/>
+              </a:rPr>
+              <a:t>• Clean and preprocess the collected text.</a:t>
+            </a:r>
+            <a:br>
+              <a:rPr lang="en-IN" sz="2300" dirty="0">
+                <a:latin typeface="Times New Roman" panose="02020603050405020304" pitchFamily="18" charset="0"/>
+                <a:cs typeface="Times New Roman" panose="02020603050405020304" pitchFamily="18" charset="0"/>
+              </a:rPr>
+            </a:br>
+            <a:r>
+              <a:rPr lang="en-IN" sz="2300" dirty="0">
+                <a:latin typeface="Times New Roman" panose="02020603050405020304" pitchFamily="18" charset="0"/>
+                <a:cs typeface="Times New Roman" panose="02020603050405020304" pitchFamily="18" charset="0"/>
+              </a:rPr>
+              <a:t>• </a:t>
+            </a:r>
+            <a:r>
+              <a:rPr lang="en-IN" sz="2300" dirty="0" err="1">
+                <a:latin typeface="Times New Roman" panose="02020603050405020304" pitchFamily="18" charset="0"/>
+                <a:cs typeface="Times New Roman" panose="02020603050405020304" pitchFamily="18" charset="0"/>
+              </a:rPr>
+              <a:t>Analyze</a:t>
+            </a:r>
+            <a:r>
+              <a:rPr lang="en-IN" sz="2300" dirty="0">
+                <a:latin typeface="Times New Roman" panose="02020603050405020304" pitchFamily="18" charset="0"/>
+                <a:cs typeface="Times New Roman" panose="02020603050405020304" pitchFamily="18" charset="0"/>
+              </a:rPr>
+              <a:t> the sentiment of the posts using NLP techniques.</a:t>
+            </a:r>
+            <a:br>
+              <a:rPr lang="en-IN" sz="2300" dirty="0">
+                <a:latin typeface="Times New Roman" panose="02020603050405020304" pitchFamily="18" charset="0"/>
+                <a:cs typeface="Times New Roman" panose="02020603050405020304" pitchFamily="18" charset="0"/>
+              </a:rPr>
+            </a:br>
+            <a:r>
+              <a:rPr lang="en-IN" sz="2300" dirty="0">
+                <a:latin typeface="Times New Roman" panose="02020603050405020304" pitchFamily="18" charset="0"/>
+                <a:cs typeface="Times New Roman" panose="02020603050405020304" pitchFamily="18" charset="0"/>
+              </a:rPr>
+              <a:t>• Classify posts based on the type of safety-related incident.</a:t>
+            </a:r>
+            <a:br>
+              <a:rPr lang="en-IN" sz="2300" dirty="0">
+                <a:latin typeface="Times New Roman" panose="02020603050405020304" pitchFamily="18" charset="0"/>
+                <a:cs typeface="Times New Roman" panose="02020603050405020304" pitchFamily="18" charset="0"/>
+              </a:rPr>
+            </a:br>
+            <a:r>
+              <a:rPr lang="en-IN" sz="2300" dirty="0">
+                <a:latin typeface="Times New Roman" panose="02020603050405020304" pitchFamily="18" charset="0"/>
+                <a:cs typeface="Times New Roman" panose="02020603050405020304" pitchFamily="18" charset="0"/>
+              </a:rPr>
+              <a:t>• Study patterns based on time and available location information.</a:t>
+            </a:r>
+            <a:br>
+              <a:rPr lang="en-IN" sz="2300" dirty="0">
+                <a:latin typeface="Times New Roman" panose="02020603050405020304" pitchFamily="18" charset="0"/>
+                <a:cs typeface="Times New Roman" panose="02020603050405020304" pitchFamily="18" charset="0"/>
+              </a:rPr>
+            </a:br>
+            <a:r>
+              <a:rPr lang="en-IN" sz="2300" dirty="0">
+                <a:latin typeface="Times New Roman" panose="02020603050405020304" pitchFamily="18" charset="0"/>
+                <a:cs typeface="Times New Roman" panose="02020603050405020304" pitchFamily="18" charset="0"/>
+              </a:rPr>
+              <a:t>• Present the </a:t>
+            </a:r>
+            <a:r>
+              <a:rPr lang="en-IN" sz="2300" dirty="0" err="1">
+                <a:latin typeface="Times New Roman" panose="02020603050405020304" pitchFamily="18" charset="0"/>
+                <a:cs typeface="Times New Roman" panose="02020603050405020304" pitchFamily="18" charset="0"/>
+              </a:rPr>
+              <a:t>analyzed</a:t>
+            </a:r>
+            <a:r>
+              <a:rPr lang="en-IN" sz="2300" dirty="0">
+                <a:latin typeface="Times New Roman" panose="02020603050405020304" pitchFamily="18" charset="0"/>
+                <a:cs typeface="Times New Roman" panose="02020603050405020304" pitchFamily="18" charset="0"/>
+              </a:rPr>
+              <a:t> information through a simple dashboard.</a:t>
+            </a:r>
+            <a:br>
+              <a:rPr lang="en-IN" sz="2300" dirty="0">
+                <a:latin typeface="Times New Roman" panose="02020603050405020304" pitchFamily="18" charset="0"/>
+                <a:cs typeface="Times New Roman" panose="02020603050405020304" pitchFamily="18" charset="0"/>
+              </a:rPr>
+            </a:br>
+            <a:r>
+              <a:rPr lang="en-IN" sz="2300" dirty="0">
+                <a:latin typeface="Times New Roman" panose="02020603050405020304" pitchFamily="18" charset="0"/>
+                <a:cs typeface="Times New Roman" panose="02020603050405020304" pitchFamily="18" charset="0"/>
+              </a:rPr>
+              <a:t>• Explore potential risk-zone visualization based on available data.</a:t>
+            </a:r>
+            <a:br>
+              <a:rPr lang="en-IN" sz="2300" dirty="0">
+                <a:latin typeface="Times New Roman" panose="02020603050405020304" pitchFamily="18" charset="0"/>
+                <a:cs typeface="Times New Roman" panose="02020603050405020304" pitchFamily="18" charset="0"/>
+              </a:rPr>
+            </a:br>
+            <a:r>
+              <a:rPr lang="en-IN" sz="2300" dirty="0">
+                <a:latin typeface="Times New Roman" panose="02020603050405020304" pitchFamily="18" charset="0"/>
+                <a:cs typeface="Times New Roman" panose="02020603050405020304" pitchFamily="18" charset="0"/>
+              </a:rPr>
+              <a:t>• Study the possibility of adding an IoT-based SOS wearable.</a:t>
+            </a:r>
+          </a:p>
+        </p:txBody>
+      </p:sp>
+      <p:sp>
+        <p:nvSpPr>
+          <p:cNvPr id="4" name="TextBox 3">
+            <a:extLst>
+              <a:ext uri="{FF2B5EF4-FFF2-40B4-BE49-F238E27FC236}">
+                <a16:creationId xmlns:a16="http://schemas.microsoft.com/office/drawing/2014/main" id="{2CA8C1DD-F97A-C66C-EDD7-4CB0E19777DB}"/>
               </a:ext>
             </a:extLst>
           </p:cNvPr>
@@ -6659,8 +7896,8 @@
         </p:nvSpPr>
         <p:spPr>
           <a:xfrm>
-            <a:off x="648929" y="731765"/>
-            <a:ext cx="6469626" cy="4247317"/>
+            <a:off x="408039" y="166843"/>
+            <a:ext cx="6096000" cy="477054"/>
           </a:xfrm>
           <a:prstGeom prst="rect">
             <a:avLst/>
@@ -6673,228 +7910,15 @@
           </a:bodyPr>
           <a:lstStyle/>
           <a:p>
-            <a:pPr marL="342900" lvl="0" indent="-342900">
-              <a:buFont typeface="Arial" panose="020B0604020202020204" pitchFamily="34" charset="0"/>
-              <a:buChar char="•"/>
-            </a:pPr>
-            <a:r>
-              <a:rPr lang="en-IN" dirty="0">
-                <a:latin typeface="Times New Roman" panose="02020603050405020304" pitchFamily="18" charset="0"/>
-                <a:cs typeface="Times New Roman" panose="02020603050405020304" pitchFamily="18" charset="0"/>
-              </a:rPr>
-              <a:t>ESP32 is used as the main controller for the proposed wearable prototype. </a:t>
-            </a:r>
-          </a:p>
-          <a:p>
-            <a:pPr marL="342900" lvl="0" indent="-342900">
-              <a:buFont typeface="Arial" panose="020B0604020202020204" pitchFamily="34" charset="0"/>
-              <a:buChar char="•"/>
-            </a:pPr>
-            <a:r>
-              <a:rPr lang="en-IN" dirty="0">
-                <a:latin typeface="Times New Roman" panose="02020603050405020304" pitchFamily="18" charset="0"/>
-                <a:cs typeface="Times New Roman" panose="02020603050405020304" pitchFamily="18" charset="0"/>
-              </a:rPr>
-              <a:t>A GPS module provides the approximate location of the user. </a:t>
-            </a:r>
-          </a:p>
-          <a:p>
-            <a:pPr marL="342900" lvl="0" indent="-342900">
-              <a:buFont typeface="Arial" panose="020B0604020202020204" pitchFamily="34" charset="0"/>
-              <a:buChar char="•"/>
-            </a:pPr>
-            <a:r>
-              <a:rPr lang="en-IN" dirty="0">
-                <a:latin typeface="Times New Roman" panose="02020603050405020304" pitchFamily="18" charset="0"/>
-                <a:cs typeface="Times New Roman" panose="02020603050405020304" pitchFamily="18" charset="0"/>
-              </a:rPr>
-              <a:t>The current location can be compared with selected potential risk zones. </a:t>
-            </a:r>
-          </a:p>
-          <a:p>
-            <a:pPr marL="342900" lvl="0" indent="-342900">
-              <a:buFont typeface="Arial" panose="020B0604020202020204" pitchFamily="34" charset="0"/>
-              <a:buChar char="•"/>
-            </a:pPr>
-            <a:r>
-              <a:rPr lang="en-IN" dirty="0">
-                <a:latin typeface="Times New Roman" panose="02020603050405020304" pitchFamily="18" charset="0"/>
-                <a:cs typeface="Times New Roman" panose="02020603050405020304" pitchFamily="18" charset="0"/>
-              </a:rPr>
-              <a:t>An alert can be generated when the user enters a designated risk area. </a:t>
-            </a:r>
-          </a:p>
-          <a:p>
-            <a:pPr marL="342900" lvl="0" indent="-342900">
-              <a:buFont typeface="Arial" panose="020B0604020202020204" pitchFamily="34" charset="0"/>
-              <a:buChar char="•"/>
-            </a:pPr>
-            <a:r>
-              <a:rPr lang="en-IN" dirty="0">
-                <a:latin typeface="Times New Roman" panose="02020603050405020304" pitchFamily="18" charset="0"/>
-                <a:cs typeface="Times New Roman" panose="02020603050405020304" pitchFamily="18" charset="0"/>
-              </a:rPr>
-              <a:t>A physical SOS button can create an emergency event in the prototype. </a:t>
-            </a:r>
-          </a:p>
-          <a:p>
-            <a:pPr marL="342900" lvl="0" indent="-342900">
-              <a:buFont typeface="Arial" panose="020B0604020202020204" pitchFamily="34" charset="0"/>
-              <a:buChar char="•"/>
-            </a:pPr>
-            <a:r>
-              <a:rPr lang="en-IN" dirty="0">
-                <a:latin typeface="Times New Roman" panose="02020603050405020304" pitchFamily="18" charset="0"/>
-                <a:cs typeface="Times New Roman" panose="02020603050405020304" pitchFamily="18" charset="0"/>
-              </a:rPr>
-              <a:t>A buzzer or vibration motor can provide a local warning to the user. </a:t>
-            </a:r>
-          </a:p>
-          <a:p>
-            <a:pPr marL="342900" lvl="0" indent="-342900">
-              <a:buFont typeface="Arial" panose="020B0604020202020204" pitchFamily="34" charset="0"/>
-              <a:buChar char="•"/>
-            </a:pPr>
-            <a:r>
-              <a:rPr lang="en-IN" dirty="0">
-                <a:latin typeface="Times New Roman" panose="02020603050405020304" pitchFamily="18" charset="0"/>
-                <a:cs typeface="Times New Roman" panose="02020603050405020304" pitchFamily="18" charset="0"/>
-              </a:rPr>
-              <a:t>Wi-Fi can be used for the initial prototype, with GSM or LTE as a future extension. </a:t>
-            </a:r>
-          </a:p>
-          <a:p>
-            <a:pPr marL="342900" lvl="0" indent="-342900">
-              <a:buFont typeface="Arial" panose="020B0604020202020204" pitchFamily="34" charset="0"/>
-              <a:buChar char="•"/>
-            </a:pPr>
-            <a:r>
-              <a:rPr lang="en-IN" dirty="0">
-                <a:latin typeface="Times New Roman" panose="02020603050405020304" pitchFamily="18" charset="0"/>
-                <a:cs typeface="Times New Roman" panose="02020603050405020304" pitchFamily="18" charset="0"/>
-              </a:rPr>
-              <a:t>The wearable connects the project’s data analysis with a practical safety-assistance feature.</a:t>
-            </a:r>
-          </a:p>
-        </p:txBody>
-      </p:sp>
-      <p:sp>
-        <p:nvSpPr>
-          <p:cNvPr id="9" name="Rectangle: Folded Corner 8">
-            <a:extLst>
-              <a:ext uri="{FF2B5EF4-FFF2-40B4-BE49-F238E27FC236}">
-                <a16:creationId xmlns:a16="http://schemas.microsoft.com/office/drawing/2014/main" id="{29F35040-B62A-BC91-B0E0-75E777DF72DE}"/>
-              </a:ext>
-            </a:extLst>
-          </p:cNvPr>
-          <p:cNvSpPr/>
-          <p:nvPr/>
-        </p:nvSpPr>
-        <p:spPr>
-          <a:xfrm>
-            <a:off x="7855974" y="609374"/>
-            <a:ext cx="3913239" cy="4631220"/>
-          </a:xfrm>
-          <a:prstGeom prst="foldedCorner">
-            <a:avLst/>
-          </a:prstGeom>
-        </p:spPr>
-        <p:style>
-          <a:lnRef idx="1">
-            <a:schemeClr val="accent4"/>
-          </a:lnRef>
-          <a:fillRef idx="2">
-            <a:schemeClr val="accent4"/>
-          </a:fillRef>
-          <a:effectRef idx="1">
-            <a:schemeClr val="accent4"/>
-          </a:effectRef>
-          <a:fontRef idx="minor">
-            <a:schemeClr val="dk1"/>
-          </a:fontRef>
-        </p:style>
-        <p:txBody>
-          <a:bodyPr rtlCol="0" anchor="ctr"/>
-          <a:lstStyle/>
-          <a:p>
-            <a:pPr algn="ctr"/>
-            <a:r>
-              <a:rPr lang="en-IN" dirty="0"/>
-              <a:t> </a:t>
-            </a:r>
-            <a:r>
-              <a:rPr lang="en-IN" b="1" dirty="0">
+            <a:r>
+              <a:rPr lang="en-IN" sz="2500" b="1" dirty="0">
                 <a:solidFill>
                   <a:schemeClr val="accent1"/>
                 </a:solidFill>
-              </a:rPr>
-              <a:t>GPS</a:t>
-            </a:r>
-          </a:p>
-          <a:p>
-            <a:pPr algn="ctr"/>
-            <a:r>
-              <a:rPr lang="en-IN" b="1" dirty="0">
-                <a:solidFill>
-                  <a:schemeClr val="accent1"/>
-                </a:solidFill>
-              </a:rPr>
-              <a:t>  ↓</a:t>
-            </a:r>
-          </a:p>
-          <a:p>
-            <a:pPr algn="ctr"/>
-            <a:r>
-              <a:rPr lang="en-IN" b="1" dirty="0">
-                <a:solidFill>
-                  <a:schemeClr val="accent1"/>
-                </a:solidFill>
-              </a:rPr>
-              <a:t>   ESP32</a:t>
-            </a:r>
-          </a:p>
-          <a:p>
-            <a:pPr algn="ctr"/>
-            <a:r>
-              <a:rPr lang="en-IN" b="1" dirty="0">
-                <a:solidFill>
-                  <a:schemeClr val="accent1"/>
-                </a:solidFill>
-              </a:rPr>
-              <a:t> ↙     ↘</a:t>
-            </a:r>
-          </a:p>
-          <a:p>
-            <a:pPr algn="ctr"/>
-            <a:r>
-              <a:rPr lang="en-IN" b="1" dirty="0">
-                <a:solidFill>
-                  <a:schemeClr val="accent1"/>
-                </a:solidFill>
-              </a:rPr>
-              <a:t>        BUZZER               SOS BUTTON</a:t>
-            </a:r>
-          </a:p>
-          <a:p>
-            <a:pPr algn="ctr"/>
-            <a:r>
-              <a:rPr lang="en-IN" b="1" dirty="0">
-                <a:solidFill>
-                  <a:schemeClr val="accent1"/>
-                </a:solidFill>
-              </a:rPr>
-              <a:t>  ↓                             ↓</a:t>
-            </a:r>
-          </a:p>
-          <a:p>
-            <a:pPr algn="ctr"/>
-            <a:r>
-              <a:rPr lang="en-IN" b="1" dirty="0">
-                <a:solidFill>
-                  <a:schemeClr val="accent1"/>
-                </a:solidFill>
-              </a:rPr>
-              <a:t>         ALERT                  EMERGENCY</a:t>
+                <a:latin typeface="Times New Roman" panose="02020603050405020304" pitchFamily="18" charset="0"/>
+                <a:cs typeface="Times New Roman" panose="02020603050405020304" pitchFamily="18" charset="0"/>
+              </a:rPr>
+              <a:t>PROPOSED IDEA</a:t>
             </a:r>
           </a:p>
         </p:txBody>
@@ -6902,7 +7926,7 @@
     </p:spTree>
     <p:extLst>
       <p:ext uri="{BB962C8B-B14F-4D97-AF65-F5344CB8AC3E}">
-        <p14:creationId xmlns:p14="http://schemas.microsoft.com/office/powerpoint/2010/main" val="3552089556"/>
+        <p14:creationId xmlns:p14="http://schemas.microsoft.com/office/powerpoint/2010/main" val="1414042401"/>
       </p:ext>
     </p:extLst>
   </p:cSld>
@@ -6931,10 +7955,10 @@
       </p:grpSpPr>
       <p:sp>
         <p:nvSpPr>
-          <p:cNvPr id="3" name="TextBox 2">
-            <a:extLst>
-              <a:ext uri="{FF2B5EF4-FFF2-40B4-BE49-F238E27FC236}">
-                <a16:creationId xmlns:a16="http://schemas.microsoft.com/office/drawing/2014/main" id="{B6F22D28-F95D-CBEC-3D64-7EE8F6A986E1}"/>
+          <p:cNvPr id="4" name="TextBox 3">
+            <a:extLst>
+              <a:ext uri="{FF2B5EF4-FFF2-40B4-BE49-F238E27FC236}">
+                <a16:creationId xmlns:a16="http://schemas.microsoft.com/office/drawing/2014/main" id="{34DDFEF5-3DB7-C616-B42C-9A15429EE7D5}"/>
               </a:ext>
             </a:extLst>
           </p:cNvPr>
@@ -6943,7 +7967,380 @@
         </p:nvSpPr>
         <p:spPr>
           <a:xfrm>
-            <a:off x="3175819" y="6581001"/>
+            <a:off x="294968" y="208624"/>
+            <a:ext cx="6096000" cy="492443"/>
+          </a:xfrm>
+          <a:prstGeom prst="rect">
+            <a:avLst/>
+          </a:prstGeom>
+          <a:noFill/>
+        </p:spPr>
+        <p:txBody>
+          <a:bodyPr wrap="square">
+            <a:spAutoFit/>
+          </a:bodyPr>
+          <a:lstStyle/>
+          <a:p>
+            <a:r>
+              <a:rPr lang="en-IN" sz="2600" b="1" dirty="0">
+                <a:solidFill>
+                  <a:schemeClr val="accent1"/>
+                </a:solidFill>
+                <a:latin typeface="Times New Roman" panose="02020603050405020304" pitchFamily="18" charset="0"/>
+                <a:cs typeface="Times New Roman" panose="02020603050405020304" pitchFamily="18" charset="0"/>
+              </a:rPr>
+              <a:t>PROPOSED DASHBOARD PROCESS</a:t>
+            </a:r>
+          </a:p>
+        </p:txBody>
+      </p:sp>
+      <p:sp>
+        <p:nvSpPr>
+          <p:cNvPr id="9" name="TextBox 8">
+            <a:extLst>
+              <a:ext uri="{FF2B5EF4-FFF2-40B4-BE49-F238E27FC236}">
+                <a16:creationId xmlns:a16="http://schemas.microsoft.com/office/drawing/2014/main" id="{4EAA24E3-AF11-DDD5-2FAF-D46B8DF850C1}"/>
+              </a:ext>
+            </a:extLst>
+          </p:cNvPr>
+          <p:cNvSpPr txBox="1"/>
+          <p:nvPr/>
+        </p:nvSpPr>
+        <p:spPr>
+          <a:xfrm>
+            <a:off x="975852" y="701067"/>
+            <a:ext cx="10805651" cy="5632311"/>
+          </a:xfrm>
+          <a:prstGeom prst="rect">
+            <a:avLst/>
+          </a:prstGeom>
+          <a:solidFill>
+            <a:schemeClr val="bg2"/>
+          </a:solidFill>
+          <a:ln>
+            <a:solidFill>
+              <a:schemeClr val="bg1"/>
+            </a:solidFill>
+          </a:ln>
+        </p:spPr>
+        <p:style>
+          <a:lnRef idx="1">
+            <a:schemeClr val="accent4"/>
+          </a:lnRef>
+          <a:fillRef idx="2">
+            <a:schemeClr val="accent4"/>
+          </a:fillRef>
+          <a:effectRef idx="1">
+            <a:schemeClr val="accent4"/>
+          </a:effectRef>
+          <a:fontRef idx="minor">
+            <a:schemeClr val="dk1"/>
+          </a:fontRef>
+        </p:style>
+        <p:txBody>
+          <a:bodyPr wrap="square">
+            <a:spAutoFit/>
+          </a:bodyPr>
+          <a:lstStyle/>
+          <a:p>
+            <a:pPr>
+              <a:buNone/>
+            </a:pPr>
+            <a:r>
+              <a:rPr lang="en-IN" b="1" dirty="0">
+                <a:latin typeface="Lucida Bright" panose="02040602050505020304" pitchFamily="18" charset="0"/>
+              </a:rPr>
+              <a:t>DATA</a:t>
+            </a:r>
+            <a:br>
+              <a:rPr lang="en-IN" dirty="0"/>
+            </a:br>
+            <a:r>
+              <a:rPr lang="en-IN" dirty="0">
+                <a:latin typeface="Times New Roman" panose="02020603050405020304" pitchFamily="18" charset="0"/>
+                <a:cs typeface="Times New Roman" panose="02020603050405020304" pitchFamily="18" charset="0"/>
+              </a:rPr>
+              <a:t>Collection of relevant social-media posts or a suitable dataset related to women’s safety.</a:t>
+            </a:r>
+          </a:p>
+          <a:p>
+            <a:pPr>
+              <a:buNone/>
+            </a:pPr>
+            <a:r>
+              <a:rPr lang="en-IN" dirty="0">
+                <a:latin typeface="Times New Roman" panose="02020603050405020304" pitchFamily="18" charset="0"/>
+                <a:cs typeface="Times New Roman" panose="02020603050405020304" pitchFamily="18" charset="0"/>
+              </a:rPr>
+              <a:t>         </a:t>
+            </a:r>
+            <a:r>
+              <a:rPr lang="en-IN" i="1" dirty="0">
+                <a:latin typeface="Times New Roman" panose="02020603050405020304" pitchFamily="18" charset="0"/>
+                <a:cs typeface="Times New Roman" panose="02020603050405020304" pitchFamily="18" charset="0"/>
+              </a:rPr>
+              <a:t>↓</a:t>
+            </a:r>
+          </a:p>
+          <a:p>
+            <a:pPr>
+              <a:buNone/>
+            </a:pPr>
+            <a:r>
+              <a:rPr lang="en-IN" b="1" dirty="0">
+                <a:latin typeface="Lucida Bright" panose="02040602050505020304" pitchFamily="18" charset="0"/>
+                <a:cs typeface="Times New Roman" panose="02020603050405020304" pitchFamily="18" charset="0"/>
+              </a:rPr>
+              <a:t>DATA CLEANING</a:t>
+            </a:r>
+            <a:br>
+              <a:rPr lang="en-IN" dirty="0">
+                <a:latin typeface="Times New Roman" panose="02020603050405020304" pitchFamily="18" charset="0"/>
+                <a:cs typeface="Times New Roman" panose="02020603050405020304" pitchFamily="18" charset="0"/>
+              </a:rPr>
+            </a:br>
+            <a:r>
+              <a:rPr lang="en-IN" dirty="0">
+                <a:latin typeface="Times New Roman" panose="02020603050405020304" pitchFamily="18" charset="0"/>
+                <a:cs typeface="Times New Roman" panose="02020603050405020304" pitchFamily="18" charset="0"/>
+              </a:rPr>
+              <a:t>Remove unwanted characters, duplicate posts, links and unnecessary information from the data.</a:t>
+            </a:r>
+          </a:p>
+          <a:p>
+            <a:pPr>
+              <a:buNone/>
+            </a:pPr>
+            <a:r>
+              <a:rPr lang="en-IN" dirty="0">
+                <a:latin typeface="Times New Roman" panose="02020603050405020304" pitchFamily="18" charset="0"/>
+                <a:cs typeface="Times New Roman" panose="02020603050405020304" pitchFamily="18" charset="0"/>
+              </a:rPr>
+              <a:t>         </a:t>
+            </a:r>
+            <a:r>
+              <a:rPr lang="en-IN" i="1" dirty="0">
+                <a:latin typeface="Times New Roman" panose="02020603050405020304" pitchFamily="18" charset="0"/>
+                <a:cs typeface="Times New Roman" panose="02020603050405020304" pitchFamily="18" charset="0"/>
+              </a:rPr>
+              <a:t>↓</a:t>
+            </a:r>
+          </a:p>
+          <a:p>
+            <a:pPr>
+              <a:buNone/>
+            </a:pPr>
+            <a:r>
+              <a:rPr lang="en-IN" b="1" dirty="0">
+                <a:latin typeface="Lucida Bright" panose="02040602050505020304" pitchFamily="18" charset="0"/>
+                <a:cs typeface="Times New Roman" panose="02020603050405020304" pitchFamily="18" charset="0"/>
+              </a:rPr>
+              <a:t>NLP ANALYSIS</a:t>
+            </a:r>
+            <a:br>
+              <a:rPr lang="en-IN" dirty="0">
+                <a:latin typeface="Times New Roman" panose="02020603050405020304" pitchFamily="18" charset="0"/>
+                <a:cs typeface="Times New Roman" panose="02020603050405020304" pitchFamily="18" charset="0"/>
+              </a:rPr>
+            </a:br>
+            <a:r>
+              <a:rPr lang="en-IN" dirty="0">
+                <a:latin typeface="Times New Roman" panose="02020603050405020304" pitchFamily="18" charset="0"/>
+                <a:cs typeface="Times New Roman" panose="02020603050405020304" pitchFamily="18" charset="0"/>
+              </a:rPr>
+              <a:t>Process the text using Natural Language Processing techniques to understand the content.</a:t>
+            </a:r>
+          </a:p>
+          <a:p>
+            <a:pPr>
+              <a:buNone/>
+            </a:pPr>
+            <a:r>
+              <a:rPr lang="en-IN" dirty="0">
+                <a:latin typeface="Times New Roman" panose="02020603050405020304" pitchFamily="18" charset="0"/>
+                <a:cs typeface="Times New Roman" panose="02020603050405020304" pitchFamily="18" charset="0"/>
+              </a:rPr>
+              <a:t>         ↓</a:t>
+            </a:r>
+          </a:p>
+          <a:p>
+            <a:pPr>
+              <a:buNone/>
+            </a:pPr>
+            <a:r>
+              <a:rPr lang="en-IN" b="1" dirty="0">
+                <a:latin typeface="Lucida Bright" panose="02040602050505020304" pitchFamily="18" charset="0"/>
+                <a:cs typeface="Times New Roman" panose="02020603050405020304" pitchFamily="18" charset="0"/>
+              </a:rPr>
+              <a:t>SENTIMENT &amp; INCIDENT CLASSIFICATION</a:t>
+            </a:r>
+            <a:br>
+              <a:rPr lang="en-IN" dirty="0">
+                <a:latin typeface="Times New Roman" panose="02020603050405020304" pitchFamily="18" charset="0"/>
+                <a:cs typeface="Times New Roman" panose="02020603050405020304" pitchFamily="18" charset="0"/>
+              </a:rPr>
+            </a:br>
+            <a:r>
+              <a:rPr lang="en-IN" dirty="0">
+                <a:latin typeface="Times New Roman" panose="02020603050405020304" pitchFamily="18" charset="0"/>
+                <a:cs typeface="Times New Roman" panose="02020603050405020304" pitchFamily="18" charset="0"/>
+              </a:rPr>
+              <a:t>Identify the sentiment and classify posts according to the type of safety-related incident.</a:t>
+            </a:r>
+          </a:p>
+          <a:p>
+            <a:pPr>
+              <a:buNone/>
+            </a:pPr>
+            <a:r>
+              <a:rPr lang="en-IN" dirty="0">
+                <a:latin typeface="Times New Roman" panose="02020603050405020304" pitchFamily="18" charset="0"/>
+                <a:cs typeface="Times New Roman" panose="02020603050405020304" pitchFamily="18" charset="0"/>
+              </a:rPr>
+              <a:t>         ↓</a:t>
+            </a:r>
+          </a:p>
+          <a:p>
+            <a:pPr>
+              <a:buNone/>
+            </a:pPr>
+            <a:r>
+              <a:rPr lang="en-IN" b="1" dirty="0">
+                <a:latin typeface="Lucida Bright" panose="02040602050505020304" pitchFamily="18" charset="0"/>
+                <a:cs typeface="Times New Roman" panose="02020603050405020304" pitchFamily="18" charset="0"/>
+              </a:rPr>
+              <a:t>TREND ANALYSIS</a:t>
+            </a:r>
+            <a:br>
+              <a:rPr lang="en-IN" dirty="0">
+                <a:latin typeface="Times New Roman" panose="02020603050405020304" pitchFamily="18" charset="0"/>
+                <a:cs typeface="Times New Roman" panose="02020603050405020304" pitchFamily="18" charset="0"/>
+              </a:rPr>
+            </a:br>
+            <a:r>
+              <a:rPr lang="en-IN" dirty="0">
+                <a:latin typeface="Times New Roman" panose="02020603050405020304" pitchFamily="18" charset="0"/>
+                <a:cs typeface="Times New Roman" panose="02020603050405020304" pitchFamily="18" charset="0"/>
+              </a:rPr>
+              <a:t>Study the frequency and changes in safety-related posts over different time periods.</a:t>
+            </a:r>
+          </a:p>
+          <a:p>
+            <a:pPr>
+              <a:buNone/>
+            </a:pPr>
+            <a:r>
+              <a:rPr lang="en-IN" dirty="0">
+                <a:latin typeface="Times New Roman" panose="02020603050405020304" pitchFamily="18" charset="0"/>
+                <a:cs typeface="Times New Roman" panose="02020603050405020304" pitchFamily="18" charset="0"/>
+              </a:rPr>
+              <a:t>         ↓</a:t>
+            </a:r>
+          </a:p>
+          <a:p>
+            <a:pPr>
+              <a:buNone/>
+            </a:pPr>
+            <a:r>
+              <a:rPr lang="en-IN" b="1" dirty="0">
+                <a:latin typeface="Lucida Bright" panose="02040602050505020304" pitchFamily="18" charset="0"/>
+                <a:cs typeface="Times New Roman" panose="02020603050405020304" pitchFamily="18" charset="0"/>
+              </a:rPr>
+              <a:t>LOCATION ANALYSIS</a:t>
+            </a:r>
+            <a:br>
+              <a:rPr lang="en-IN" dirty="0">
+                <a:latin typeface="Times New Roman" panose="02020603050405020304" pitchFamily="18" charset="0"/>
+                <a:cs typeface="Times New Roman" panose="02020603050405020304" pitchFamily="18" charset="0"/>
+              </a:rPr>
+            </a:br>
+            <a:r>
+              <a:rPr lang="en-IN" dirty="0" err="1">
+                <a:latin typeface="Times New Roman" panose="02020603050405020304" pitchFamily="18" charset="0"/>
+                <a:cs typeface="Times New Roman" panose="02020603050405020304" pitchFamily="18" charset="0"/>
+              </a:rPr>
+              <a:t>Analyze</a:t>
+            </a:r>
+            <a:r>
+              <a:rPr lang="en-IN" dirty="0">
+                <a:latin typeface="Times New Roman" panose="02020603050405020304" pitchFamily="18" charset="0"/>
+                <a:cs typeface="Times New Roman" panose="02020603050405020304" pitchFamily="18" charset="0"/>
+              </a:rPr>
+              <a:t> available location information to identify areas with repeated safety-related reports.</a:t>
+            </a:r>
+          </a:p>
+          <a:p>
+            <a:pPr>
+              <a:buNone/>
+            </a:pPr>
+            <a:r>
+              <a:rPr lang="en-IN" dirty="0">
+                <a:latin typeface="Times New Roman" panose="02020603050405020304" pitchFamily="18" charset="0"/>
+                <a:cs typeface="Times New Roman" panose="02020603050405020304" pitchFamily="18" charset="0"/>
+              </a:rPr>
+              <a:t>         ↓</a:t>
+            </a:r>
+          </a:p>
+          <a:p>
+            <a:pPr>
+              <a:buNone/>
+            </a:pPr>
+            <a:r>
+              <a:rPr lang="en-IN" b="1" dirty="0">
+                <a:latin typeface="Lucida Bright" panose="02040602050505020304" pitchFamily="18" charset="0"/>
+                <a:cs typeface="Times New Roman" panose="02020603050405020304" pitchFamily="18" charset="0"/>
+              </a:rPr>
+              <a:t>DASHBOARD</a:t>
+            </a:r>
+            <a:br>
+              <a:rPr lang="en-IN" dirty="0">
+                <a:latin typeface="Times New Roman" panose="02020603050405020304" pitchFamily="18" charset="0"/>
+                <a:cs typeface="Times New Roman" panose="02020603050405020304" pitchFamily="18" charset="0"/>
+              </a:rPr>
+            </a:br>
+            <a:r>
+              <a:rPr lang="en-IN" dirty="0">
+                <a:latin typeface="Times New Roman" panose="02020603050405020304" pitchFamily="18" charset="0"/>
+                <a:cs typeface="Times New Roman" panose="02020603050405020304" pitchFamily="18" charset="0"/>
+              </a:rPr>
+              <a:t>Present the </a:t>
+            </a:r>
+            <a:r>
+              <a:rPr lang="en-IN" dirty="0" err="1">
+                <a:latin typeface="Times New Roman" panose="02020603050405020304" pitchFamily="18" charset="0"/>
+                <a:cs typeface="Times New Roman" panose="02020603050405020304" pitchFamily="18" charset="0"/>
+              </a:rPr>
+              <a:t>analyzed</a:t>
+            </a:r>
+            <a:r>
+              <a:rPr lang="en-IN" dirty="0">
+                <a:latin typeface="Times New Roman" panose="02020603050405020304" pitchFamily="18" charset="0"/>
+                <a:cs typeface="Times New Roman" panose="02020603050405020304" pitchFamily="18" charset="0"/>
+              </a:rPr>
+              <a:t> information using charts, filters, trends and a map for easy understanding</a:t>
+            </a:r>
+            <a:r>
+              <a:rPr lang="en-IN" dirty="0"/>
+              <a:t>.</a:t>
+            </a:r>
+          </a:p>
+        </p:txBody>
+      </p:sp>
+      <p:sp>
+        <p:nvSpPr>
+          <p:cNvPr id="14" name="TextBox 13">
+            <a:extLst>
+              <a:ext uri="{FF2B5EF4-FFF2-40B4-BE49-F238E27FC236}">
+                <a16:creationId xmlns:a16="http://schemas.microsoft.com/office/drawing/2014/main" id="{04EA64A3-2585-DDE4-12C7-FB2460F69701}"/>
+              </a:ext>
+            </a:extLst>
+          </p:cNvPr>
+          <p:cNvSpPr txBox="1"/>
+          <p:nvPr/>
+        </p:nvSpPr>
+        <p:spPr>
+          <a:xfrm>
+            <a:off x="3048000" y="6581001"/>
             <a:ext cx="6096000" cy="276999"/>
           </a:xfrm>
           <a:prstGeom prst="rect">
@@ -6970,467 +8367,10 @@
           </a:p>
         </p:txBody>
       </p:sp>
-      <p:sp>
-        <p:nvSpPr>
-          <p:cNvPr id="5" name="TextBox 4">
-            <a:extLst>
-              <a:ext uri="{FF2B5EF4-FFF2-40B4-BE49-F238E27FC236}">
-                <a16:creationId xmlns:a16="http://schemas.microsoft.com/office/drawing/2014/main" id="{B18FF67D-A539-B955-911D-BD8CDB4919A5}"/>
-              </a:ext>
-            </a:extLst>
-          </p:cNvPr>
-          <p:cNvSpPr txBox="1"/>
-          <p:nvPr/>
-        </p:nvSpPr>
-        <p:spPr>
-          <a:xfrm>
-            <a:off x="294968" y="243036"/>
-            <a:ext cx="6096000" cy="415498"/>
-          </a:xfrm>
-          <a:prstGeom prst="rect">
-            <a:avLst/>
-          </a:prstGeom>
-          <a:noFill/>
-        </p:spPr>
-        <p:txBody>
-          <a:bodyPr wrap="square">
-            <a:spAutoFit/>
-          </a:bodyPr>
-          <a:lstStyle/>
-          <a:p>
-            <a:r>
-              <a:rPr lang="en-IN" sz="2100" b="1" dirty="0">
-                <a:solidFill>
-                  <a:schemeClr val="accent1">
-                    <a:lumMod val="75000"/>
-                  </a:schemeClr>
-                </a:solidFill>
-                <a:latin typeface="Lucida Bright" panose="02040602050505020304" pitchFamily="18" charset="0"/>
-              </a:rPr>
-              <a:t>DASHBOARD AND POTENTIAL RISK ZONES</a:t>
-            </a:r>
-          </a:p>
-        </p:txBody>
-      </p:sp>
-      <p:sp>
-        <p:nvSpPr>
-          <p:cNvPr id="7" name="TextBox 6">
-            <a:extLst>
-              <a:ext uri="{FF2B5EF4-FFF2-40B4-BE49-F238E27FC236}">
-                <a16:creationId xmlns:a16="http://schemas.microsoft.com/office/drawing/2014/main" id="{E40B13E5-ABEE-ADC7-8793-CF1D6191AA61}"/>
-              </a:ext>
-            </a:extLst>
-          </p:cNvPr>
-          <p:cNvSpPr txBox="1"/>
-          <p:nvPr/>
-        </p:nvSpPr>
-        <p:spPr>
-          <a:xfrm>
-            <a:off x="875070" y="790759"/>
-            <a:ext cx="6587613" cy="4524315"/>
-          </a:xfrm>
-          <a:prstGeom prst="rect">
-            <a:avLst/>
-          </a:prstGeom>
-          <a:noFill/>
-        </p:spPr>
-        <p:txBody>
-          <a:bodyPr wrap="square">
-            <a:spAutoFit/>
-          </a:bodyPr>
-          <a:lstStyle/>
-          <a:p>
-            <a:pPr marL="342900" lvl="0" indent="-342900">
-              <a:buFont typeface="Arial" panose="020B0604020202020204" pitchFamily="34" charset="0"/>
-              <a:buChar char="•"/>
-            </a:pPr>
-            <a:r>
-              <a:rPr lang="en-IN" dirty="0">
-                <a:latin typeface="Times New Roman" panose="02020603050405020304" pitchFamily="18" charset="0"/>
-                <a:cs typeface="Times New Roman" panose="02020603050405020304" pitchFamily="18" charset="0"/>
-              </a:rPr>
-              <a:t>The dashboard provides a simple overview of the </a:t>
-            </a:r>
-            <a:r>
-              <a:rPr lang="en-IN" dirty="0" err="1">
-                <a:latin typeface="Times New Roman" panose="02020603050405020304" pitchFamily="18" charset="0"/>
-                <a:cs typeface="Times New Roman" panose="02020603050405020304" pitchFamily="18" charset="0"/>
-              </a:rPr>
-              <a:t>analyzed</a:t>
-            </a:r>
-            <a:r>
-              <a:rPr lang="en-IN" dirty="0">
-                <a:latin typeface="Times New Roman" panose="02020603050405020304" pitchFamily="18" charset="0"/>
-                <a:cs typeface="Times New Roman" panose="02020603050405020304" pitchFamily="18" charset="0"/>
-              </a:rPr>
-              <a:t> safety-related information. </a:t>
-            </a:r>
-          </a:p>
-          <a:p>
-            <a:pPr marL="342900" lvl="0" indent="-342900">
-              <a:buFont typeface="Arial" panose="020B0604020202020204" pitchFamily="34" charset="0"/>
-              <a:buChar char="•"/>
-            </a:pPr>
-            <a:r>
-              <a:rPr lang="en-IN" dirty="0">
-                <a:latin typeface="Times New Roman" panose="02020603050405020304" pitchFamily="18" charset="0"/>
-                <a:cs typeface="Times New Roman" panose="02020603050405020304" pitchFamily="18" charset="0"/>
-              </a:rPr>
-              <a:t>Sentiment charts show positive, negative and neutral distributions. </a:t>
-            </a:r>
-          </a:p>
-          <a:p>
-            <a:pPr marL="342900" lvl="0" indent="-342900">
-              <a:buFont typeface="Arial" panose="020B0604020202020204" pitchFamily="34" charset="0"/>
-              <a:buChar char="•"/>
-            </a:pPr>
-            <a:r>
-              <a:rPr lang="en-IN" dirty="0">
-                <a:latin typeface="Times New Roman" panose="02020603050405020304" pitchFamily="18" charset="0"/>
-                <a:cs typeface="Times New Roman" panose="02020603050405020304" pitchFamily="18" charset="0"/>
-              </a:rPr>
-              <a:t>Incident charts compare different types of reported safety concerns. </a:t>
-            </a:r>
-          </a:p>
-          <a:p>
-            <a:pPr marL="342900" lvl="0" indent="-342900">
-              <a:buFont typeface="Arial" panose="020B0604020202020204" pitchFamily="34" charset="0"/>
-              <a:buChar char="•"/>
-            </a:pPr>
-            <a:r>
-              <a:rPr lang="en-IN" dirty="0">
-                <a:latin typeface="Times New Roman" panose="02020603050405020304" pitchFamily="18" charset="0"/>
-                <a:cs typeface="Times New Roman" panose="02020603050405020304" pitchFamily="18" charset="0"/>
-              </a:rPr>
-              <a:t>Time-based graphs show how reports change during selected periods. </a:t>
-            </a:r>
-          </a:p>
-          <a:p>
-            <a:pPr marL="342900" lvl="0" indent="-342900">
-              <a:buFont typeface="Arial" panose="020B0604020202020204" pitchFamily="34" charset="0"/>
-              <a:buChar char="•"/>
-            </a:pPr>
-            <a:r>
-              <a:rPr lang="en-IN" dirty="0">
-                <a:latin typeface="Times New Roman" panose="02020603050405020304" pitchFamily="18" charset="0"/>
-                <a:cs typeface="Times New Roman" panose="02020603050405020304" pitchFamily="18" charset="0"/>
-              </a:rPr>
-              <a:t>A map view can display the geographic concentration of </a:t>
-            </a:r>
-            <a:r>
-              <a:rPr lang="en-IN" dirty="0" err="1">
-                <a:latin typeface="Times New Roman" panose="02020603050405020304" pitchFamily="18" charset="0"/>
-                <a:cs typeface="Times New Roman" panose="02020603050405020304" pitchFamily="18" charset="0"/>
-              </a:rPr>
-              <a:t>analyzed</a:t>
-            </a:r>
-            <a:r>
-              <a:rPr lang="en-IN" dirty="0">
-                <a:latin typeface="Times New Roman" panose="02020603050405020304" pitchFamily="18" charset="0"/>
-                <a:cs typeface="Times New Roman" panose="02020603050405020304" pitchFamily="18" charset="0"/>
-              </a:rPr>
-              <a:t> reports. </a:t>
-            </a:r>
-          </a:p>
-          <a:p>
-            <a:pPr marL="342900" lvl="0" indent="-342900">
-              <a:buFont typeface="Arial" panose="020B0604020202020204" pitchFamily="34" charset="0"/>
-              <a:buChar char="•"/>
-            </a:pPr>
-            <a:r>
-              <a:rPr lang="en-IN" dirty="0">
-                <a:latin typeface="Times New Roman" panose="02020603050405020304" pitchFamily="18" charset="0"/>
-                <a:cs typeface="Times New Roman" panose="02020603050405020304" pitchFamily="18" charset="0"/>
-              </a:rPr>
-              <a:t>Filters allow users to select time period, location and incident type. </a:t>
-            </a:r>
-          </a:p>
-          <a:p>
-            <a:pPr marL="342900" lvl="0" indent="-342900">
-              <a:buFont typeface="Arial" panose="020B0604020202020204" pitchFamily="34" charset="0"/>
-              <a:buChar char="•"/>
-            </a:pPr>
-            <a:r>
-              <a:rPr lang="en-IN" dirty="0">
-                <a:latin typeface="Times New Roman" panose="02020603050405020304" pitchFamily="18" charset="0"/>
-                <a:cs typeface="Times New Roman" panose="02020603050405020304" pitchFamily="18" charset="0"/>
-              </a:rPr>
-              <a:t>Potential high-risk zones can be highlighted using repeated reported-data patterns. </a:t>
-            </a:r>
-          </a:p>
-          <a:p>
-            <a:pPr marL="342900" lvl="0" indent="-342900">
-              <a:buFont typeface="Arial" panose="020B0604020202020204" pitchFamily="34" charset="0"/>
-              <a:buChar char="•"/>
-            </a:pPr>
-            <a:r>
-              <a:rPr lang="en-IN" dirty="0">
-                <a:latin typeface="Times New Roman" panose="02020603050405020304" pitchFamily="18" charset="0"/>
-                <a:cs typeface="Times New Roman" panose="02020603050405020304" pitchFamily="18" charset="0"/>
-              </a:rPr>
-              <a:t>The dashboard makes the project results easier for users and mentors to understand</a:t>
-            </a:r>
-          </a:p>
-        </p:txBody>
-      </p:sp>
-      <p:sp>
-        <p:nvSpPr>
-          <p:cNvPr id="8" name="Rectangle 7">
-            <a:extLst>
-              <a:ext uri="{FF2B5EF4-FFF2-40B4-BE49-F238E27FC236}">
-                <a16:creationId xmlns:a16="http://schemas.microsoft.com/office/drawing/2014/main" id="{DD5141F9-3E12-8C2A-BDCF-BE211958B304}"/>
-              </a:ext>
-            </a:extLst>
-          </p:cNvPr>
-          <p:cNvSpPr/>
-          <p:nvPr/>
-        </p:nvSpPr>
-        <p:spPr>
-          <a:xfrm>
-            <a:off x="8662220" y="392945"/>
-            <a:ext cx="2654709" cy="1592826"/>
-          </a:xfrm>
-          <a:prstGeom prst="rect">
-            <a:avLst/>
-          </a:prstGeom>
-        </p:spPr>
-        <p:style>
-          <a:lnRef idx="2">
-            <a:schemeClr val="accent2">
-              <a:shade val="15000"/>
-            </a:schemeClr>
-          </a:lnRef>
-          <a:fillRef idx="1">
-            <a:schemeClr val="accent2"/>
-          </a:fillRef>
-          <a:effectRef idx="0">
-            <a:schemeClr val="accent2"/>
-          </a:effectRef>
-          <a:fontRef idx="minor">
-            <a:schemeClr val="lt1"/>
-          </a:fontRef>
-        </p:style>
-        <p:txBody>
-          <a:bodyPr rtlCol="0" anchor="ctr"/>
-          <a:lstStyle/>
-          <a:p>
-            <a:pPr algn="ctr"/>
-            <a:r>
-              <a:rPr lang="en-IN" dirty="0"/>
-              <a:t>Positive</a:t>
-            </a:r>
-            <a:br>
-              <a:rPr lang="en-IN" dirty="0"/>
-            </a:br>
-            <a:r>
-              <a:rPr lang="en-IN" dirty="0"/>
-              <a:t>Negative</a:t>
-            </a:r>
-            <a:br>
-              <a:rPr lang="en-IN" dirty="0"/>
-            </a:br>
-            <a:r>
-              <a:rPr lang="en-IN" dirty="0"/>
-              <a:t>Neutral</a:t>
-            </a:r>
-          </a:p>
-        </p:txBody>
-      </p:sp>
-      <p:sp>
-        <p:nvSpPr>
-          <p:cNvPr id="10" name="Rectangle 9">
-            <a:extLst>
-              <a:ext uri="{FF2B5EF4-FFF2-40B4-BE49-F238E27FC236}">
-                <a16:creationId xmlns:a16="http://schemas.microsoft.com/office/drawing/2014/main" id="{96522731-CD31-F1E1-BEB3-4B2AA00879A7}"/>
-              </a:ext>
-            </a:extLst>
-          </p:cNvPr>
-          <p:cNvSpPr/>
-          <p:nvPr/>
-        </p:nvSpPr>
-        <p:spPr>
-          <a:xfrm>
-            <a:off x="8662221" y="3252043"/>
-            <a:ext cx="2654709" cy="796413"/>
-          </a:xfrm>
-          <a:prstGeom prst="rect">
-            <a:avLst/>
-          </a:prstGeom>
-        </p:spPr>
-        <p:style>
-          <a:lnRef idx="2">
-            <a:schemeClr val="accent2">
-              <a:shade val="15000"/>
-            </a:schemeClr>
-          </a:lnRef>
-          <a:fillRef idx="1">
-            <a:schemeClr val="accent2"/>
-          </a:fillRef>
-          <a:effectRef idx="0">
-            <a:schemeClr val="accent2"/>
-          </a:effectRef>
-          <a:fontRef idx="minor">
-            <a:schemeClr val="lt1"/>
-          </a:fontRef>
-        </p:style>
-        <p:txBody>
-          <a:bodyPr rtlCol="0" anchor="ctr"/>
-          <a:lstStyle/>
-          <a:p>
-            <a:pPr algn="ctr"/>
-            <a:r>
-              <a:rPr lang="en-IN"/>
-              <a:t>INCIDENT ANALYSIS</a:t>
-            </a:r>
-            <a:endParaRPr lang="en-IN" dirty="0"/>
-          </a:p>
-        </p:txBody>
-      </p:sp>
-      <p:sp>
-        <p:nvSpPr>
-          <p:cNvPr id="12" name="Rectangle 11">
-            <a:extLst>
-              <a:ext uri="{FF2B5EF4-FFF2-40B4-BE49-F238E27FC236}">
-                <a16:creationId xmlns:a16="http://schemas.microsoft.com/office/drawing/2014/main" id="{6FBF8FC7-2DDA-ED44-0322-ADC78A542545}"/>
-              </a:ext>
-            </a:extLst>
-          </p:cNvPr>
-          <p:cNvSpPr/>
-          <p:nvPr/>
-        </p:nvSpPr>
-        <p:spPr>
-          <a:xfrm>
-            <a:off x="8716297" y="5476567"/>
-            <a:ext cx="2654709" cy="634919"/>
-          </a:xfrm>
-          <a:prstGeom prst="rect">
-            <a:avLst/>
-          </a:prstGeom>
-        </p:spPr>
-        <p:style>
-          <a:lnRef idx="2">
-            <a:schemeClr val="accent2">
-              <a:shade val="15000"/>
-            </a:schemeClr>
-          </a:lnRef>
-          <a:fillRef idx="1">
-            <a:schemeClr val="accent2"/>
-          </a:fillRef>
-          <a:effectRef idx="0">
-            <a:schemeClr val="accent2"/>
-          </a:effectRef>
-          <a:fontRef idx="minor">
-            <a:schemeClr val="lt1"/>
-          </a:fontRef>
-        </p:style>
-        <p:txBody>
-          <a:bodyPr rtlCol="0" anchor="ctr"/>
-          <a:lstStyle/>
-          <a:p>
-            <a:pPr algn="ctr"/>
-            <a:r>
-              <a:rPr lang="en-IN" dirty="0"/>
-              <a:t>LOCATION / MAP</a:t>
-            </a:r>
-          </a:p>
-        </p:txBody>
-      </p:sp>
-      <p:sp>
-        <p:nvSpPr>
-          <p:cNvPr id="13" name="Arrow: Down 12">
-            <a:extLst>
-              <a:ext uri="{FF2B5EF4-FFF2-40B4-BE49-F238E27FC236}">
-                <a16:creationId xmlns:a16="http://schemas.microsoft.com/office/drawing/2014/main" id="{696C1DD2-873C-F3F7-9A7B-28864274E8DB}"/>
-              </a:ext>
-            </a:extLst>
-          </p:cNvPr>
-          <p:cNvSpPr/>
-          <p:nvPr/>
-        </p:nvSpPr>
-        <p:spPr>
-          <a:xfrm>
-            <a:off x="9886335" y="2139781"/>
-            <a:ext cx="314632" cy="796413"/>
-          </a:xfrm>
-          <a:prstGeom prst="downArrow">
-            <a:avLst/>
-          </a:prstGeom>
-        </p:spPr>
-        <p:style>
-          <a:lnRef idx="2">
-            <a:schemeClr val="accent1">
-              <a:shade val="15000"/>
-            </a:schemeClr>
-          </a:lnRef>
-          <a:fillRef idx="1">
-            <a:schemeClr val="accent1"/>
-          </a:fillRef>
-          <a:effectRef idx="0">
-            <a:schemeClr val="accent1"/>
-          </a:effectRef>
-          <a:fontRef idx="minor">
-            <a:schemeClr val="lt1"/>
-          </a:fontRef>
-        </p:style>
-        <p:txBody>
-          <a:bodyPr rtlCol="0" anchor="ctr"/>
-          <a:lstStyle/>
-          <a:p>
-            <a:pPr algn="ctr"/>
-            <a:endParaRPr lang="en-IN"/>
-          </a:p>
-        </p:txBody>
-      </p:sp>
-      <p:sp>
-        <p:nvSpPr>
-          <p:cNvPr id="15" name="Arrow: Down 14">
-            <a:extLst>
-              <a:ext uri="{FF2B5EF4-FFF2-40B4-BE49-F238E27FC236}">
-                <a16:creationId xmlns:a16="http://schemas.microsoft.com/office/drawing/2014/main" id="{4B6D6AEB-0C41-5429-827C-85BA15069F58}"/>
-              </a:ext>
-            </a:extLst>
-          </p:cNvPr>
-          <p:cNvSpPr/>
-          <p:nvPr/>
-        </p:nvSpPr>
-        <p:spPr>
-          <a:xfrm>
-            <a:off x="9861754" y="4364305"/>
-            <a:ext cx="314632" cy="796413"/>
-          </a:xfrm>
-          <a:prstGeom prst="downArrow">
-            <a:avLst/>
-          </a:prstGeom>
-        </p:spPr>
-        <p:style>
-          <a:lnRef idx="2">
-            <a:schemeClr val="accent1">
-              <a:shade val="15000"/>
-            </a:schemeClr>
-          </a:lnRef>
-          <a:fillRef idx="1">
-            <a:schemeClr val="accent1"/>
-          </a:fillRef>
-          <a:effectRef idx="0">
-            <a:schemeClr val="accent1"/>
-          </a:effectRef>
-          <a:fontRef idx="minor">
-            <a:schemeClr val="lt1"/>
-          </a:fontRef>
-        </p:style>
-        <p:txBody>
-          <a:bodyPr rtlCol="0" anchor="ctr"/>
-          <a:lstStyle/>
-          <a:p>
-            <a:pPr algn="ctr"/>
-            <a:endParaRPr lang="en-IN"/>
-          </a:p>
-        </p:txBody>
-      </p:sp>
     </p:spTree>
     <p:extLst>
       <p:ext uri="{BB962C8B-B14F-4D97-AF65-F5344CB8AC3E}">
-        <p14:creationId xmlns:p14="http://schemas.microsoft.com/office/powerpoint/2010/main" val="1117982374"/>
+        <p14:creationId xmlns:p14="http://schemas.microsoft.com/office/powerpoint/2010/main" val="3456078867"/>
       </p:ext>
     </p:extLst>
   </p:cSld>
